--- a/harness-customizer-intro.pptx
+++ b/harness-customizer-intro.pptx
@@ -19,6 +19,10 @@
     <p:sldId id="267" r:id="rId18"/>
     <p:sldId id="268" r:id="rId19"/>
     <p:sldId id="269" r:id="rId20"/>
+    <p:sldId id="270" r:id="rId21"/>
+    <p:sldId id="271" r:id="rId22"/>
+    <p:sldId id="272" r:id="rId23"/>
+    <p:sldId id="273" r:id="rId24"/>
   </p:sldIdLst>
   <p:sldSz cx="12188952" cy="6858000" type="screen4x3"/>
   <p:notesSz cx="6858000" cy="9144000"/>
@@ -5932,23 +5936,59 @@
       </p:sp>
       <p:sp>
         <p:nvSpPr>
-          <p:cNvPr id="4" name="Rectangle 3"/>
+          <p:cNvPr id="4" name="TextBox 3"/>
+          <p:cNvSpPr txBox="1"/>
+          <p:nvPr/>
+        </p:nvSpPr>
+        <p:spPr>
+          <a:xfrm>
+            <a:off x="731520" y="274320"/>
+            <a:ext cx="10058400" cy="640080"/>
+          </a:xfrm>
+          <a:prstGeom prst="rect">
+            <a:avLst/>
+          </a:prstGeom>
+          <a:noFill/>
+        </p:spPr>
+        <p:txBody>
+          <a:bodyPr wrap="square">
+            <a:spAutoFit/>
+          </a:bodyPr>
+          <a:lstStyle/>
+          <a:p>
+            <a:pPr algn="l"/>
+            <a:r>
+              <a:rPr sz="3000" b="1" i="0">
+                <a:solidFill>
+                  <a:srgbClr val="FFFFFF"/>
+                </a:solidFill>
+              </a:rPr>
+              <a:t>지금 검증, 어디가 문제인가?</a:t>
+            </a:r>
+          </a:p>
+        </p:txBody>
+      </p:sp>
+      <p:sp>
+        <p:nvSpPr>
+          <p:cNvPr id="5" name="Rectangle 4"/>
           <p:cNvSpPr/>
           <p:nvPr/>
         </p:nvSpPr>
         <p:spPr>
           <a:xfrm>
-            <a:off x="731520" y="182880"/>
-            <a:ext cx="1737360" cy="292608"/>
+            <a:off x="548640" y="1097280"/>
+            <a:ext cx="11064240" cy="2103120"/>
           </a:xfrm>
           <a:prstGeom prst="rect">
             <a:avLst/>
           </a:prstGeom>
           <a:solidFill>
-            <a:srgbClr val="00D4AA"/>
+            <a:srgbClr val="1A0810"/>
           </a:solidFill>
-          <a:ln>
-            <a:noFill/>
+          <a:ln w="19050">
+            <a:solidFill>
+              <a:srgbClr val="FF4D6D"/>
+            </a:solidFill>
           </a:ln>
         </p:spPr>
         <p:style>
@@ -5975,68 +6015,34 @@
       </p:sp>
       <p:sp>
         <p:nvSpPr>
-          <p:cNvPr id="5" name="TextBox 4"/>
-          <p:cNvSpPr txBox="1"/>
-          <p:nvPr/>
-        </p:nvSpPr>
-        <p:spPr>
-          <a:xfrm>
-            <a:off x="777240" y="210312"/>
-            <a:ext cx="1737360" cy="292608"/>
-          </a:xfrm>
-          <a:prstGeom prst="rect">
-            <a:avLst/>
-          </a:prstGeom>
-          <a:noFill/>
-        </p:spPr>
-        <p:txBody>
-          <a:bodyPr wrap="square">
-            <a:spAutoFit/>
-          </a:bodyPr>
-          <a:lstStyle/>
-          <a:p>
-            <a:pPr algn="ctr"/>
-            <a:r>
-              <a:rPr sz="1300" b="1" i="0">
-                <a:solidFill>
-                  <a:srgbClr val="FFFFFF"/>
-                </a:solidFill>
-              </a:rPr>
-              <a:t>시나리오 3 — 라이브 테스트</a:t>
-            </a:r>
-          </a:p>
-        </p:txBody>
-      </p:sp>
-      <p:sp>
-        <p:nvSpPr>
           <p:cNvPr id="6" name="TextBox 5"/>
           <p:cNvSpPr txBox="1"/>
           <p:nvPr/>
         </p:nvSpPr>
         <p:spPr>
           <a:xfrm>
-            <a:off x="731520" y="548640"/>
-            <a:ext cx="10058400" cy="594360"/>
-          </a:xfrm>
-          <a:prstGeom prst="rect">
-            <a:avLst/>
-          </a:prstGeom>
-          <a:noFill/>
-        </p:spPr>
-        <p:txBody>
-          <a:bodyPr wrap="square">
-            <a:spAutoFit/>
-          </a:bodyPr>
-          <a:lstStyle/>
-          <a:p>
-            <a:pPr algn="l"/>
-            <a:r>
-              <a:rPr sz="2600" b="1" i="0">
-                <a:solidFill>
-                  <a:srgbClr val="FFFFFF"/>
-                </a:solidFill>
-              </a:rPr>
-              <a:t>도메인 지식 주입 경로를 묻는 질문</a:t>
+            <a:off x="777240" y="1188720"/>
+            <a:ext cx="5486400" cy="365760"/>
+          </a:xfrm>
+          <a:prstGeom prst="rect">
+            <a:avLst/>
+          </a:prstGeom>
+          <a:noFill/>
+        </p:spPr>
+        <p:txBody>
+          <a:bodyPr wrap="square">
+            <a:spAutoFit/>
+          </a:bodyPr>
+          <a:lstStyle/>
+          <a:p>
+            <a:pPr algn="l"/>
+            <a:r>
+              <a:rPr sz="1400" b="1" i="0">
+                <a:solidFill>
+                  <a:srgbClr val="FF4D6D"/>
+                </a:solidFill>
+              </a:rPr>
+              <a:t>현재 검증 흐름 (AS-IS)</a:t>
             </a:r>
           </a:p>
         </p:txBody>
@@ -6049,18 +6055,18 @@
         </p:nvSpPr>
         <p:spPr>
           <a:xfrm>
-            <a:off x="548640" y="1325880"/>
-            <a:ext cx="11064240" cy="822960"/>
+            <a:off x="822960" y="1600200"/>
+            <a:ext cx="2377440" cy="548640"/>
           </a:xfrm>
           <a:prstGeom prst="rect">
             <a:avLst/>
           </a:prstGeom>
           <a:solidFill>
-            <a:srgbClr val="061A1A"/>
+            <a:srgbClr val="2A3A5A"/>
           </a:solidFill>
           <a:ln w="19050">
             <a:solidFill>
-              <a:srgbClr val="00D4AA"/>
+              <a:srgbClr val="B8C9E8"/>
             </a:solidFill>
           </a:ln>
         </p:spPr>
@@ -6094,28 +6100,28 @@
         </p:nvSpPr>
         <p:spPr>
           <a:xfrm>
-            <a:off x="777240" y="1389888"/>
-            <a:ext cx="2286000" cy="320040"/>
-          </a:xfrm>
-          <a:prstGeom prst="rect">
-            <a:avLst/>
-          </a:prstGeom>
-          <a:noFill/>
-        </p:spPr>
-        <p:txBody>
-          <a:bodyPr wrap="square">
-            <a:spAutoFit/>
-          </a:bodyPr>
-          <a:lstStyle/>
-          <a:p>
-            <a:pPr algn="l"/>
-            <a:r>
-              <a:rPr sz="1300" b="1" i="0">
-                <a:solidFill>
-                  <a:srgbClr val="00D4AA"/>
-                </a:solidFill>
-              </a:rPr>
-              <a:t>💬 개발자 입력:</a:t>
+            <a:off x="914400" y="1691640"/>
+            <a:ext cx="2194560" cy="365760"/>
+          </a:xfrm>
+          <a:prstGeom prst="rect">
+            <a:avLst/>
+          </a:prstGeom>
+          <a:noFill/>
+        </p:spPr>
+        <p:txBody>
+          <a:bodyPr wrap="square">
+            <a:spAutoFit/>
+          </a:bodyPr>
+          <a:lstStyle/>
+          <a:p>
+            <a:pPr algn="ctr"/>
+            <a:r>
+              <a:rPr sz="1100" b="0" i="0">
+                <a:solidFill>
+                  <a:srgbClr val="B8C9E8"/>
+                </a:solidFill>
+              </a:rPr>
+              <a:t>개발자 요구사항</a:t>
             </a:r>
           </a:p>
         </p:txBody>
@@ -6128,29 +6134,28 @@
         </p:nvSpPr>
         <p:spPr>
           <a:xfrm>
-            <a:off x="777240" y="1664208"/>
-            <a:ext cx="10515600" cy="411480"/>
-          </a:xfrm>
-          <a:prstGeom prst="rect">
-            <a:avLst/>
-          </a:prstGeom>
-          <a:noFill/>
-        </p:spPr>
-        <p:txBody>
-          <a:bodyPr wrap="square">
-            <a:spAutoFit/>
-          </a:bodyPr>
-          <a:lstStyle/>
-          <a:p>
-            <a:pPr algn="l"/>
-            <a:r>
-              <a:rPr sz="1300" b="0" i="0">
-                <a:solidFill>
-                  <a:srgbClr val="FFFFFF"/>
-                </a:solidFill>
-              </a:rPr>
-              <a:t>"취약성 검사가 필요하여 관련 정보를 주입하고 싶은데,
- 어느 경로에 어떤 내용을 적어야 할까? 솔루션 명까지 적어야 하나?"</a:t>
+            <a:off x="3200400" y="1783080"/>
+            <a:ext cx="365760" cy="274320"/>
+          </a:xfrm>
+          <a:prstGeom prst="rect">
+            <a:avLst/>
+          </a:prstGeom>
+          <a:noFill/>
+        </p:spPr>
+        <p:txBody>
+          <a:bodyPr wrap="square">
+            <a:spAutoFit/>
+          </a:bodyPr>
+          <a:lstStyle/>
+          <a:p>
+            <a:pPr algn="ctr"/>
+            <a:r>
+              <a:rPr sz="1600" b="1" i="0">
+                <a:solidFill>
+                  <a:srgbClr val="B8C9E8"/>
+                </a:solidFill>
+              </a:rPr>
+              <a:t>→</a:t>
             </a:r>
           </a:p>
         </p:txBody>
@@ -6163,8 +6168,8 @@
         </p:nvSpPr>
         <p:spPr>
           <a:xfrm>
-            <a:off x="548640" y="2331720"/>
-            <a:ext cx="3474720" cy="3749039"/>
+            <a:off x="3566160" y="1600200"/>
+            <a:ext cx="2377440" cy="548640"/>
           </a:xfrm>
           <a:prstGeom prst="rect">
             <a:avLst/>
@@ -6174,7 +6179,7 @@
           </a:solidFill>
           <a:ln w="19050">
             <a:solidFill>
-              <a:srgbClr val="4A9EFF"/>
+              <a:srgbClr val="B8C9E8"/>
             </a:solidFill>
           </a:ln>
         </p:spPr>
@@ -6208,28 +6213,28 @@
         </p:nvSpPr>
         <p:spPr>
           <a:xfrm>
-            <a:off x="731520" y="2423160"/>
-            <a:ext cx="3108960" cy="347472"/>
-          </a:xfrm>
-          <a:prstGeom prst="rect">
-            <a:avLst/>
-          </a:prstGeom>
-          <a:noFill/>
-        </p:spPr>
-        <p:txBody>
-          <a:bodyPr wrap="square">
-            <a:spAutoFit/>
-          </a:bodyPr>
-          <a:lstStyle/>
-          <a:p>
-            <a:pPr algn="l"/>
-            <a:r>
-              <a:rPr sz="1300" b="1" i="0">
-                <a:solidFill>
-                  <a:srgbClr val="4A9EFF"/>
-                </a:solidFill>
-              </a:rPr>
-              <a:t>Phase 0 — navigator</a:t>
+            <a:off x="3657600" y="1691640"/>
+            <a:ext cx="2194560" cy="365760"/>
+          </a:xfrm>
+          <a:prstGeom prst="rect">
+            <a:avLst/>
+          </a:prstGeom>
+          <a:noFill/>
+        </p:spPr>
+        <p:txBody>
+          <a:bodyPr wrap="square">
+            <a:spAutoFit/>
+          </a:bodyPr>
+          <a:lstStyle/>
+          <a:p>
+            <a:pPr algn="ctr"/>
+            <a:r>
+              <a:rPr sz="1100" b="0" i="0">
+                <a:solidFill>
+                  <a:srgbClr val="B8C9E8"/>
+                </a:solidFill>
+              </a:rPr>
+              <a:t>봇이 수정 제안</a:t>
             </a:r>
           </a:p>
         </p:txBody>
@@ -6242,36 +6247,28 @@
         </p:nvSpPr>
         <p:spPr>
           <a:xfrm>
-            <a:off x="731520" y="2834640"/>
-            <a:ext cx="3200400" cy="3017520"/>
-          </a:xfrm>
-          <a:prstGeom prst="rect">
-            <a:avLst/>
-          </a:prstGeom>
-          <a:noFill/>
-        </p:spPr>
-        <p:txBody>
-          <a:bodyPr wrap="square">
-            <a:spAutoFit/>
-          </a:bodyPr>
-          <a:lstStyle/>
-          <a:p>
-            <a:pPr algn="l"/>
-            <a:r>
-              <a:rPr sz="1100" b="0" i="0">
+            <a:off x="5943600" y="1783080"/>
+            <a:ext cx="365760" cy="274320"/>
+          </a:xfrm>
+          <a:prstGeom prst="rect">
+            <a:avLst/>
+          </a:prstGeom>
+          <a:noFill/>
+        </p:spPr>
+        <p:txBody>
+          <a:bodyPr wrap="square">
+            <a:spAutoFit/>
+          </a:bodyPr>
+          <a:lstStyle/>
+          <a:p>
+            <a:pPr algn="ctr"/>
+            <a:r>
+              <a:rPr sz="1600" b="1" i="0">
                 <a:solidFill>
                   <a:srgbClr val="B8C9E8"/>
                 </a:solidFill>
               </a:rPr>
-              <a:t>키워드: "취약성 검사"
-→ 도메인 지식 주입 요청 감지
-domain-knowledge/ 확인
-→ 관련 파일 없음
-⚠️ 도메인 지식 부족
-필요 정보:
-  • 솔루션명
-  • 검사 범위·결과 형식
-  • 기존 게이트 연동 여부</a:t>
+              <a:t>→</a:t>
             </a:r>
           </a:p>
         </p:txBody>
@@ -6284,8 +6281,583 @@
         </p:nvSpPr>
         <p:spPr>
           <a:xfrm>
-            <a:off x="4206240" y="2331720"/>
-            <a:ext cx="7406640" cy="3749039"/>
+            <a:off x="6309360" y="1600200"/>
+            <a:ext cx="2377440" cy="548640"/>
+          </a:xfrm>
+          <a:prstGeom prst="rect">
+            <a:avLst/>
+          </a:prstGeom>
+          <a:solidFill>
+            <a:srgbClr val="2A3A5A"/>
+          </a:solidFill>
+          <a:ln w="19050">
+            <a:solidFill>
+              <a:srgbClr val="FF8C42"/>
+            </a:solidFill>
+          </a:ln>
+        </p:spPr>
+        <p:style>
+          <a:lnRef idx="1">
+            <a:schemeClr val="accent1"/>
+          </a:lnRef>
+          <a:fillRef idx="3">
+            <a:schemeClr val="accent1"/>
+          </a:fillRef>
+          <a:effectRef idx="2">
+            <a:schemeClr val="accent1"/>
+          </a:effectRef>
+          <a:fontRef idx="minor">
+            <a:schemeClr val="lt1"/>
+          </a:fontRef>
+        </p:style>
+        <p:txBody>
+          <a:bodyPr rtlCol="0" anchor="ctr"/>
+          <a:lstStyle/>
+          <a:p>
+            <a:pPr algn="ctr"/>
+          </a:p>
+        </p:txBody>
+      </p:sp>
+      <p:sp>
+        <p:nvSpPr>
+          <p:cNvPr id="14" name="TextBox 13"/>
+          <p:cNvSpPr txBox="1"/>
+          <p:nvPr/>
+        </p:nvSpPr>
+        <p:spPr>
+          <a:xfrm>
+            <a:off x="6400800" y="1691640"/>
+            <a:ext cx="2194560" cy="365760"/>
+          </a:xfrm>
+          <a:prstGeom prst="rect">
+            <a:avLst/>
+          </a:prstGeom>
+          <a:noFill/>
+        </p:spPr>
+        <p:txBody>
+          <a:bodyPr wrap="square">
+            <a:spAutoFit/>
+          </a:bodyPr>
+          <a:lstStyle/>
+          <a:p>
+            <a:pPr algn="ctr"/>
+            <a:r>
+              <a:rPr sz="1100" b="0" i="0">
+                <a:solidFill>
+                  <a:srgbClr val="FF8C42"/>
+                </a:solidFill>
+              </a:rPr>
+              <a:t>시뮬레이터: "아마 이렇게 될 거예요" (예측)</a:t>
+            </a:r>
+          </a:p>
+        </p:txBody>
+      </p:sp>
+      <p:sp>
+        <p:nvSpPr>
+          <p:cNvPr id="15" name="TextBox 14"/>
+          <p:cNvSpPr txBox="1"/>
+          <p:nvPr/>
+        </p:nvSpPr>
+        <p:spPr>
+          <a:xfrm>
+            <a:off x="8686800" y="1783080"/>
+            <a:ext cx="365760" cy="274320"/>
+          </a:xfrm>
+          <a:prstGeom prst="rect">
+            <a:avLst/>
+          </a:prstGeom>
+          <a:noFill/>
+        </p:spPr>
+        <p:txBody>
+          <a:bodyPr wrap="square">
+            <a:spAutoFit/>
+          </a:bodyPr>
+          <a:lstStyle/>
+          <a:p>
+            <a:pPr algn="ctr"/>
+            <a:r>
+              <a:rPr sz="1600" b="1" i="0">
+                <a:solidFill>
+                  <a:srgbClr val="B8C9E8"/>
+                </a:solidFill>
+              </a:rPr>
+              <a:t>→</a:t>
+            </a:r>
+          </a:p>
+        </p:txBody>
+      </p:sp>
+      <p:sp>
+        <p:nvSpPr>
+          <p:cNvPr id="16" name="Rectangle 15"/>
+          <p:cNvSpPr/>
+          <p:nvPr/>
+        </p:nvSpPr>
+        <p:spPr>
+          <a:xfrm>
+            <a:off x="9052560" y="1600200"/>
+            <a:ext cx="2377440" cy="548640"/>
+          </a:xfrm>
+          <a:prstGeom prst="rect">
+            <a:avLst/>
+          </a:prstGeom>
+          <a:solidFill>
+            <a:srgbClr val="2A3A5A"/>
+          </a:solidFill>
+          <a:ln w="19050">
+            <a:solidFill>
+              <a:srgbClr val="FF4D6D"/>
+            </a:solidFill>
+          </a:ln>
+        </p:spPr>
+        <p:style>
+          <a:lnRef idx="1">
+            <a:schemeClr val="accent1"/>
+          </a:lnRef>
+          <a:fillRef idx="3">
+            <a:schemeClr val="accent1"/>
+          </a:fillRef>
+          <a:effectRef idx="2">
+            <a:schemeClr val="accent1"/>
+          </a:effectRef>
+          <a:fontRef idx="minor">
+            <a:schemeClr val="lt1"/>
+          </a:fontRef>
+        </p:style>
+        <p:txBody>
+          <a:bodyPr rtlCol="0" anchor="ctr"/>
+          <a:lstStyle/>
+          <a:p>
+            <a:pPr algn="ctr"/>
+          </a:p>
+        </p:txBody>
+      </p:sp>
+      <p:sp>
+        <p:nvSpPr>
+          <p:cNvPr id="17" name="TextBox 16"/>
+          <p:cNvSpPr txBox="1"/>
+          <p:nvPr/>
+        </p:nvSpPr>
+        <p:spPr>
+          <a:xfrm>
+            <a:off x="9144000" y="1691640"/>
+            <a:ext cx="2194560" cy="365760"/>
+          </a:xfrm>
+          <a:prstGeom prst="rect">
+            <a:avLst/>
+          </a:prstGeom>
+          <a:noFill/>
+        </p:spPr>
+        <p:txBody>
+          <a:bodyPr wrap="square">
+            <a:spAutoFit/>
+          </a:bodyPr>
+          <a:lstStyle/>
+          <a:p>
+            <a:pPr algn="ctr"/>
+            <a:r>
+              <a:rPr sz="1100" b="0" i="0">
+                <a:solidFill>
+                  <a:srgbClr val="FF4D6D"/>
+                </a:solidFill>
+              </a:rPr>
+              <a:t>판정봇: "그럴듯해 보이니 PASS" (예측을 채점)</a:t>
+            </a:r>
+          </a:p>
+        </p:txBody>
+      </p:sp>
+      <p:sp>
+        <p:nvSpPr>
+          <p:cNvPr id="18" name="Rectangle 17"/>
+          <p:cNvSpPr/>
+          <p:nvPr/>
+        </p:nvSpPr>
+        <p:spPr>
+          <a:xfrm>
+            <a:off x="8686800" y="2240280"/>
+            <a:ext cx="2743200" cy="777240"/>
+          </a:xfrm>
+          <a:prstGeom prst="rect">
+            <a:avLst/>
+          </a:prstGeom>
+          <a:solidFill>
+            <a:srgbClr val="2A0810"/>
+          </a:solidFill>
+          <a:ln>
+            <a:noFill/>
+          </a:ln>
+        </p:spPr>
+        <p:style>
+          <a:lnRef idx="1">
+            <a:schemeClr val="accent1"/>
+          </a:lnRef>
+          <a:fillRef idx="3">
+            <a:schemeClr val="accent1"/>
+          </a:fillRef>
+          <a:effectRef idx="2">
+            <a:schemeClr val="accent1"/>
+          </a:effectRef>
+          <a:fontRef idx="minor">
+            <a:schemeClr val="lt1"/>
+          </a:fontRef>
+        </p:style>
+        <p:txBody>
+          <a:bodyPr rtlCol="0" anchor="ctr"/>
+          <a:lstStyle/>
+          <a:p>
+            <a:pPr algn="ctr"/>
+          </a:p>
+        </p:txBody>
+      </p:sp>
+      <p:sp>
+        <p:nvSpPr>
+          <p:cNvPr id="19" name="TextBox 18"/>
+          <p:cNvSpPr txBox="1"/>
+          <p:nvPr/>
+        </p:nvSpPr>
+        <p:spPr>
+          <a:xfrm>
+            <a:off x="8778240" y="2286000"/>
+            <a:ext cx="2560320" cy="685800"/>
+          </a:xfrm>
+          <a:prstGeom prst="rect">
+            <a:avLst/>
+          </a:prstGeom>
+          <a:noFill/>
+        </p:spPr>
+        <p:txBody>
+          <a:bodyPr wrap="square">
+            <a:spAutoFit/>
+          </a:bodyPr>
+          <a:lstStyle/>
+          <a:p>
+            <a:pPr algn="ctr"/>
+            <a:r>
+              <a:rPr sz="1100" b="0" i="0">
+                <a:solidFill>
+                  <a:srgbClr val="FF4D6D"/>
+                </a:solidFill>
+              </a:rPr>
+              <a:t>⚠️ 예측이 틀려도
+PASS가 나올 수 있음</a:t>
+            </a:r>
+          </a:p>
+        </p:txBody>
+      </p:sp>
+      <p:sp>
+        <p:nvSpPr>
+          <p:cNvPr id="20" name="Rectangle 19"/>
+          <p:cNvSpPr/>
+          <p:nvPr/>
+        </p:nvSpPr>
+        <p:spPr>
+          <a:xfrm>
+            <a:off x="548640" y="3429000"/>
+            <a:ext cx="11064240" cy="2560320"/>
+          </a:xfrm>
+          <a:prstGeom prst="rect">
+            <a:avLst/>
+          </a:prstGeom>
+          <a:solidFill>
+            <a:srgbClr val="061810"/>
+          </a:solidFill>
+          <a:ln w="19050">
+            <a:solidFill>
+              <a:srgbClr val="06D68A"/>
+            </a:solidFill>
+          </a:ln>
+        </p:spPr>
+        <p:style>
+          <a:lnRef idx="1">
+            <a:schemeClr val="accent1"/>
+          </a:lnRef>
+          <a:fillRef idx="3">
+            <a:schemeClr val="accent1"/>
+          </a:fillRef>
+          <a:effectRef idx="2">
+            <a:schemeClr val="accent1"/>
+          </a:effectRef>
+          <a:fontRef idx="minor">
+            <a:schemeClr val="lt1"/>
+          </a:fontRef>
+        </p:style>
+        <p:txBody>
+          <a:bodyPr rtlCol="0" anchor="ctr"/>
+          <a:lstStyle/>
+          <a:p>
+            <a:pPr algn="ctr"/>
+          </a:p>
+        </p:txBody>
+      </p:sp>
+      <p:sp>
+        <p:nvSpPr>
+          <p:cNvPr id="21" name="TextBox 20"/>
+          <p:cNvSpPr txBox="1"/>
+          <p:nvPr/>
+        </p:nvSpPr>
+        <p:spPr>
+          <a:xfrm>
+            <a:off x="777240" y="3520440"/>
+            <a:ext cx="5486400" cy="365760"/>
+          </a:xfrm>
+          <a:prstGeom prst="rect">
+            <a:avLst/>
+          </a:prstGeom>
+          <a:noFill/>
+        </p:spPr>
+        <p:txBody>
+          <a:bodyPr wrap="square">
+            <a:spAutoFit/>
+          </a:bodyPr>
+          <a:lstStyle/>
+          <a:p>
+            <a:pPr algn="l"/>
+            <a:r>
+              <a:rPr sz="1400" b="1" i="0">
+                <a:solidFill>
+                  <a:srgbClr val="06D68A"/>
+                </a:solidFill>
+              </a:rPr>
+              <a:t>원하는 검증 흐름 (TO-BE)</a:t>
+            </a:r>
+          </a:p>
+        </p:txBody>
+      </p:sp>
+      <p:sp>
+        <p:nvSpPr>
+          <p:cNvPr id="22" name="Rectangle 21"/>
+          <p:cNvSpPr/>
+          <p:nvPr/>
+        </p:nvSpPr>
+        <p:spPr>
+          <a:xfrm>
+            <a:off x="822960" y="3977639"/>
+            <a:ext cx="2377440" cy="731520"/>
+          </a:xfrm>
+          <a:prstGeom prst="rect">
+            <a:avLst/>
+          </a:prstGeom>
+          <a:solidFill>
+            <a:srgbClr val="2A3A5A"/>
+          </a:solidFill>
+          <a:ln w="19050">
+            <a:solidFill>
+              <a:srgbClr val="B8C9E8"/>
+            </a:solidFill>
+          </a:ln>
+        </p:spPr>
+        <p:style>
+          <a:lnRef idx="1">
+            <a:schemeClr val="accent1"/>
+          </a:lnRef>
+          <a:fillRef idx="3">
+            <a:schemeClr val="accent1"/>
+          </a:fillRef>
+          <a:effectRef idx="2">
+            <a:schemeClr val="accent1"/>
+          </a:effectRef>
+          <a:fontRef idx="minor">
+            <a:schemeClr val="lt1"/>
+          </a:fontRef>
+        </p:style>
+        <p:txBody>
+          <a:bodyPr rtlCol="0" anchor="ctr"/>
+          <a:lstStyle/>
+          <a:p>
+            <a:pPr algn="ctr"/>
+          </a:p>
+        </p:txBody>
+      </p:sp>
+      <p:sp>
+        <p:nvSpPr>
+          <p:cNvPr id="23" name="TextBox 22"/>
+          <p:cNvSpPr txBox="1"/>
+          <p:nvPr/>
+        </p:nvSpPr>
+        <p:spPr>
+          <a:xfrm>
+            <a:off x="914400" y="4069080"/>
+            <a:ext cx="2194560" cy="548640"/>
+          </a:xfrm>
+          <a:prstGeom prst="rect">
+            <a:avLst/>
+          </a:prstGeom>
+          <a:noFill/>
+        </p:spPr>
+        <p:txBody>
+          <a:bodyPr wrap="square">
+            <a:spAutoFit/>
+          </a:bodyPr>
+          <a:lstStyle/>
+          <a:p>
+            <a:pPr algn="ctr"/>
+            <a:r>
+              <a:rPr sz="1100" b="0" i="0">
+                <a:solidFill>
+                  <a:srgbClr val="B8C9E8"/>
+                </a:solidFill>
+              </a:rPr>
+              <a:t>개발자 요구사항</a:t>
+            </a:r>
+          </a:p>
+        </p:txBody>
+      </p:sp>
+      <p:sp>
+        <p:nvSpPr>
+          <p:cNvPr id="24" name="TextBox 23"/>
+          <p:cNvSpPr txBox="1"/>
+          <p:nvPr/>
+        </p:nvSpPr>
+        <p:spPr>
+          <a:xfrm>
+            <a:off x="3200400" y="4206240"/>
+            <a:ext cx="365760" cy="274320"/>
+          </a:xfrm>
+          <a:prstGeom prst="rect">
+            <a:avLst/>
+          </a:prstGeom>
+          <a:noFill/>
+        </p:spPr>
+        <p:txBody>
+          <a:bodyPr wrap="square">
+            <a:spAutoFit/>
+          </a:bodyPr>
+          <a:lstStyle/>
+          <a:p>
+            <a:pPr algn="ctr"/>
+            <a:r>
+              <a:rPr sz="1600" b="1" i="0">
+                <a:solidFill>
+                  <a:srgbClr val="B8C9E8"/>
+                </a:solidFill>
+              </a:rPr>
+              <a:t>→</a:t>
+            </a:r>
+          </a:p>
+        </p:txBody>
+      </p:sp>
+      <p:sp>
+        <p:nvSpPr>
+          <p:cNvPr id="25" name="Rectangle 24"/>
+          <p:cNvSpPr/>
+          <p:nvPr/>
+        </p:nvSpPr>
+        <p:spPr>
+          <a:xfrm>
+            <a:off x="3566160" y="3977639"/>
+            <a:ext cx="2377440" cy="731520"/>
+          </a:xfrm>
+          <a:prstGeom prst="rect">
+            <a:avLst/>
+          </a:prstGeom>
+          <a:solidFill>
+            <a:srgbClr val="2A3A5A"/>
+          </a:solidFill>
+          <a:ln w="19050">
+            <a:solidFill>
+              <a:srgbClr val="B8C9E8"/>
+            </a:solidFill>
+          </a:ln>
+        </p:spPr>
+        <p:style>
+          <a:lnRef idx="1">
+            <a:schemeClr val="accent1"/>
+          </a:lnRef>
+          <a:fillRef idx="3">
+            <a:schemeClr val="accent1"/>
+          </a:fillRef>
+          <a:effectRef idx="2">
+            <a:schemeClr val="accent1"/>
+          </a:effectRef>
+          <a:fontRef idx="minor">
+            <a:schemeClr val="lt1"/>
+          </a:fontRef>
+        </p:style>
+        <p:txBody>
+          <a:bodyPr rtlCol="0" anchor="ctr"/>
+          <a:lstStyle/>
+          <a:p>
+            <a:pPr algn="ctr"/>
+          </a:p>
+        </p:txBody>
+      </p:sp>
+      <p:sp>
+        <p:nvSpPr>
+          <p:cNvPr id="26" name="TextBox 25"/>
+          <p:cNvSpPr txBox="1"/>
+          <p:nvPr/>
+        </p:nvSpPr>
+        <p:spPr>
+          <a:xfrm>
+            <a:off x="3657600" y="4069080"/>
+            <a:ext cx="2194560" cy="548640"/>
+          </a:xfrm>
+          <a:prstGeom prst="rect">
+            <a:avLst/>
+          </a:prstGeom>
+          <a:noFill/>
+        </p:spPr>
+        <p:txBody>
+          <a:bodyPr wrap="square">
+            <a:spAutoFit/>
+          </a:bodyPr>
+          <a:lstStyle/>
+          <a:p>
+            <a:pPr algn="ctr"/>
+            <a:r>
+              <a:rPr sz="1100" b="0" i="0">
+                <a:solidFill>
+                  <a:srgbClr val="B8C9E8"/>
+                </a:solidFill>
+              </a:rPr>
+              <a:t>봇이 수정 제안</a:t>
+            </a:r>
+          </a:p>
+        </p:txBody>
+      </p:sp>
+      <p:sp>
+        <p:nvSpPr>
+          <p:cNvPr id="27" name="TextBox 26"/>
+          <p:cNvSpPr txBox="1"/>
+          <p:nvPr/>
+        </p:nvSpPr>
+        <p:spPr>
+          <a:xfrm>
+            <a:off x="5943600" y="4206240"/>
+            <a:ext cx="365760" cy="274320"/>
+          </a:xfrm>
+          <a:prstGeom prst="rect">
+            <a:avLst/>
+          </a:prstGeom>
+          <a:noFill/>
+        </p:spPr>
+        <p:txBody>
+          <a:bodyPr wrap="square">
+            <a:spAutoFit/>
+          </a:bodyPr>
+          <a:lstStyle/>
+          <a:p>
+            <a:pPr algn="ctr"/>
+            <a:r>
+              <a:rPr sz="1600" b="1" i="0">
+                <a:solidFill>
+                  <a:srgbClr val="B8C9E8"/>
+                </a:solidFill>
+              </a:rPr>
+              <a:t>→</a:t>
+            </a:r>
+          </a:p>
+        </p:txBody>
+      </p:sp>
+      <p:sp>
+        <p:nvSpPr>
+          <p:cNvPr id="28" name="Rectangle 27"/>
+          <p:cNvSpPr/>
+          <p:nvPr/>
+        </p:nvSpPr>
+        <p:spPr>
+          <a:xfrm>
+            <a:off x="6309360" y="3977639"/>
+            <a:ext cx="2377440" cy="731520"/>
           </a:xfrm>
           <a:prstGeom prst="rect">
             <a:avLst/>
@@ -6323,544 +6895,251 @@
       </p:sp>
       <p:sp>
         <p:nvSpPr>
-          <p:cNvPr id="14" name="TextBox 13"/>
-          <p:cNvSpPr txBox="1"/>
-          <p:nvPr/>
-        </p:nvSpPr>
-        <p:spPr>
-          <a:xfrm>
-            <a:off x="4389120" y="2423160"/>
-            <a:ext cx="6858000" cy="347472"/>
-          </a:xfrm>
-          <a:prstGeom prst="rect">
-            <a:avLst/>
-          </a:prstGeom>
-          <a:noFill/>
-        </p:spPr>
-        <p:txBody>
-          <a:bodyPr wrap="square">
-            <a:spAutoFit/>
-          </a:bodyPr>
-          <a:lstStyle/>
-          <a:p>
-            <a:pPr algn="l"/>
-            <a:r>
-              <a:rPr sz="1300" b="1" i="0">
+          <p:cNvPr id="29" name="TextBox 28"/>
+          <p:cNvSpPr txBox="1"/>
+          <p:nvPr/>
+        </p:nvSpPr>
+        <p:spPr>
+          <a:xfrm>
+            <a:off x="6400800" y="4069080"/>
+            <a:ext cx="2194560" cy="548640"/>
+          </a:xfrm>
+          <a:prstGeom prst="rect">
+            <a:avLst/>
+          </a:prstGeom>
+          <a:noFill/>
+        </p:spPr>
+        <p:txBody>
+          <a:bodyPr wrap="square">
+            <a:spAutoFit/>
+          </a:bodyPr>
+          <a:lstStyle/>
+          <a:p>
+            <a:pPr algn="ctr"/>
+            <a:r>
+              <a:rPr sz="1100" b="0" i="0">
                 <a:solidFill>
                   <a:srgbClr val="00D4AA"/>
                 </a:solidFill>
               </a:rPr>
-              <a:t>봇의 답변</a:t>
-            </a:r>
-          </a:p>
-        </p:txBody>
-      </p:sp>
-      <p:sp>
-        <p:nvSpPr>
-          <p:cNvPr id="15" name="TextBox 14"/>
-          <p:cNvSpPr txBox="1"/>
-          <p:nvPr/>
-        </p:nvSpPr>
-        <p:spPr>
-          <a:xfrm>
-            <a:off x="4389120" y="2834640"/>
-            <a:ext cx="7040880" cy="246888"/>
-          </a:xfrm>
-          <a:prstGeom prst="rect">
-            <a:avLst/>
-          </a:prstGeom>
-          <a:noFill/>
-        </p:spPr>
-        <p:txBody>
-          <a:bodyPr wrap="square">
-            <a:spAutoFit/>
-          </a:bodyPr>
-          <a:lstStyle/>
-          <a:p>
-            <a:pPr algn="l"/>
+              <a:t>실제로 실행
+(bash / 에이전트 호출)</a:t>
+            </a:r>
+          </a:p>
+        </p:txBody>
+      </p:sp>
+      <p:sp>
+        <p:nvSpPr>
+          <p:cNvPr id="30" name="TextBox 29"/>
+          <p:cNvSpPr txBox="1"/>
+          <p:nvPr/>
+        </p:nvSpPr>
+        <p:spPr>
+          <a:xfrm>
+            <a:off x="8686800" y="4206240"/>
+            <a:ext cx="365760" cy="274320"/>
+          </a:xfrm>
+          <a:prstGeom prst="rect">
+            <a:avLst/>
+          </a:prstGeom>
+          <a:noFill/>
+        </p:spPr>
+        <p:txBody>
+          <a:bodyPr wrap="square">
+            <a:spAutoFit/>
+          </a:bodyPr>
+          <a:lstStyle/>
+          <a:p>
+            <a:pPr algn="ctr"/>
+            <a:r>
+              <a:rPr sz="1600" b="1" i="0">
+                <a:solidFill>
+                  <a:srgbClr val="B8C9E8"/>
+                </a:solidFill>
+              </a:rPr>
+              <a:t>→</a:t>
+            </a:r>
+          </a:p>
+        </p:txBody>
+      </p:sp>
+      <p:sp>
+        <p:nvSpPr>
+          <p:cNvPr id="31" name="Rectangle 30"/>
+          <p:cNvSpPr/>
+          <p:nvPr/>
+        </p:nvSpPr>
+        <p:spPr>
+          <a:xfrm>
+            <a:off x="9052560" y="3977639"/>
+            <a:ext cx="2377440" cy="731520"/>
+          </a:xfrm>
+          <a:prstGeom prst="rect">
+            <a:avLst/>
+          </a:prstGeom>
+          <a:solidFill>
+            <a:srgbClr val="2A3A5A"/>
+          </a:solidFill>
+          <a:ln w="19050">
+            <a:solidFill>
+              <a:srgbClr val="06D68A"/>
+            </a:solidFill>
+          </a:ln>
+        </p:spPr>
+        <p:style>
+          <a:lnRef idx="1">
+            <a:schemeClr val="accent1"/>
+          </a:lnRef>
+          <a:fillRef idx="3">
+            <a:schemeClr val="accent1"/>
+          </a:fillRef>
+          <a:effectRef idx="2">
+            <a:schemeClr val="accent1"/>
+          </a:effectRef>
+          <a:fontRef idx="minor">
+            <a:schemeClr val="lt1"/>
+          </a:fontRef>
+        </p:style>
+        <p:txBody>
+          <a:bodyPr rtlCol="0" anchor="ctr"/>
+          <a:lstStyle/>
+          <a:p>
+            <a:pPr algn="ctr"/>
+          </a:p>
+        </p:txBody>
+      </p:sp>
+      <p:sp>
+        <p:nvSpPr>
+          <p:cNvPr id="32" name="TextBox 31"/>
+          <p:cNvSpPr txBox="1"/>
+          <p:nvPr/>
+        </p:nvSpPr>
+        <p:spPr>
+          <a:xfrm>
+            <a:off x="9144000" y="4069080"/>
+            <a:ext cx="2194560" cy="548640"/>
+          </a:xfrm>
+          <a:prstGeom prst="rect">
+            <a:avLst/>
+          </a:prstGeom>
+          <a:noFill/>
+        </p:spPr>
+        <p:txBody>
+          <a:bodyPr wrap="square">
+            <a:spAutoFit/>
+          </a:bodyPr>
+          <a:lstStyle/>
+          <a:p>
+            <a:pPr algn="ctr"/>
             <a:r>
               <a:rPr sz="1100" b="0" i="0">
                 <a:solidFill>
-                  <a:srgbClr val="FFD66B"/>
-                </a:solidFill>
-              </a:rPr>
-              <a:t>경로:  domain-knowledge/vulnerability-scanner.md</a:t>
-            </a:r>
-          </a:p>
-        </p:txBody>
-      </p:sp>
-      <p:sp>
-        <p:nvSpPr>
-          <p:cNvPr id="16" name="TextBox 15"/>
-          <p:cNvSpPr txBox="1"/>
-          <p:nvPr/>
-        </p:nvSpPr>
-        <p:spPr>
-          <a:xfrm>
-            <a:off x="4389120" y="3090672"/>
-            <a:ext cx="7040880" cy="246888"/>
-          </a:xfrm>
-          <a:prstGeom prst="rect">
-            <a:avLst/>
-          </a:prstGeom>
-          <a:noFill/>
-        </p:spPr>
-        <p:txBody>
-          <a:bodyPr wrap="square">
-            <a:spAutoFit/>
-          </a:bodyPr>
-          <a:lstStyle/>
-          <a:p>
-            <a:pPr algn="l"/>
-            <a:r>
-              <a:rPr sz="1100" b="0" i="0">
-                <a:solidFill>
-                  <a:srgbClr val="B8C9E8"/>
-                </a:solidFill>
-              </a:rPr>
-              <a:t/>
-            </a:r>
-          </a:p>
-        </p:txBody>
-      </p:sp>
-      <p:sp>
-        <p:nvSpPr>
-          <p:cNvPr id="17" name="TextBox 16"/>
-          <p:cNvSpPr txBox="1"/>
-          <p:nvPr/>
-        </p:nvSpPr>
-        <p:spPr>
-          <a:xfrm>
-            <a:off x="4389120" y="3346704"/>
-            <a:ext cx="7040880" cy="246888"/>
-          </a:xfrm>
-          <a:prstGeom prst="rect">
-            <a:avLst/>
-          </a:prstGeom>
-          <a:noFill/>
-        </p:spPr>
-        <p:txBody>
-          <a:bodyPr wrap="square">
-            <a:spAutoFit/>
-          </a:bodyPr>
-          <a:lstStyle/>
-          <a:p>
-            <a:pPr algn="l"/>
-            <a:r>
-              <a:rPr sz="1100" b="0" i="0">
-                <a:solidFill>
-                  <a:srgbClr val="FFFFFF"/>
-                </a:solidFill>
-              </a:rPr>
-              <a:t>포함할 내용:</a:t>
-            </a:r>
-          </a:p>
-        </p:txBody>
-      </p:sp>
-      <p:sp>
-        <p:nvSpPr>
-          <p:cNvPr id="18" name="TextBox 17"/>
-          <p:cNvSpPr txBox="1"/>
-          <p:nvPr/>
-        </p:nvSpPr>
-        <p:spPr>
-          <a:xfrm>
-            <a:off x="4389120" y="3602736"/>
-            <a:ext cx="7040880" cy="246888"/>
-          </a:xfrm>
-          <a:prstGeom prst="rect">
-            <a:avLst/>
-          </a:prstGeom>
-          <a:noFill/>
-        </p:spPr>
-        <p:txBody>
-          <a:bodyPr wrap="square">
-            <a:spAutoFit/>
-          </a:bodyPr>
-          <a:lstStyle/>
-          <a:p>
-            <a:pPr algn="l"/>
-            <a:r>
-              <a:rPr sz="1100" b="0" i="0">
-                <a:solidFill>
-                  <a:srgbClr val="B8C9E8"/>
-                </a:solidFill>
-              </a:rPr>
-              <a:t>  • 솔루션 명  →  예: Checkmarx, Fortify, SonarQube (적어야 함)</a:t>
-            </a:r>
-          </a:p>
-        </p:txBody>
-      </p:sp>
-      <p:sp>
-        <p:nvSpPr>
-          <p:cNvPr id="19" name="TextBox 18"/>
-          <p:cNvSpPr txBox="1"/>
-          <p:nvPr/>
-        </p:nvSpPr>
-        <p:spPr>
-          <a:xfrm>
-            <a:off x="4389120" y="3858768"/>
-            <a:ext cx="7040880" cy="246888"/>
-          </a:xfrm>
-          <a:prstGeom prst="rect">
-            <a:avLst/>
-          </a:prstGeom>
-          <a:noFill/>
-        </p:spPr>
-        <p:txBody>
-          <a:bodyPr wrap="square">
-            <a:spAutoFit/>
-          </a:bodyPr>
-          <a:lstStyle/>
-          <a:p>
-            <a:pPr algn="l"/>
-            <a:r>
-              <a:rPr sz="1100" b="0" i="0">
-                <a:solidFill>
-                  <a:srgbClr val="B8C9E8"/>
-                </a:solidFill>
-              </a:rPr>
-              <a:t>  • 스캔 범위  →  정적분석(SAST)만? 오픈소스(SCA)도?</a:t>
-            </a:r>
-          </a:p>
-        </p:txBody>
-      </p:sp>
-      <p:sp>
-        <p:nvSpPr>
-          <p:cNvPr id="20" name="TextBox 19"/>
-          <p:cNvSpPr txBox="1"/>
-          <p:nvPr/>
-        </p:nvSpPr>
-        <p:spPr>
-          <a:xfrm>
-            <a:off x="4389120" y="4114800"/>
-            <a:ext cx="7040880" cy="246888"/>
-          </a:xfrm>
-          <a:prstGeom prst="rect">
-            <a:avLst/>
-          </a:prstGeom>
-          <a:noFill/>
-        </p:spPr>
-        <p:txBody>
-          <a:bodyPr wrap="square">
-            <a:spAutoFit/>
-          </a:bodyPr>
-          <a:lstStyle/>
-          <a:p>
-            <a:pPr algn="l"/>
-            <a:r>
-              <a:rPr sz="1100" b="0" i="0">
-                <a:solidFill>
-                  <a:srgbClr val="B8C9E8"/>
-                </a:solidFill>
-              </a:rPr>
-              <a:t>  • 결과 등급  →  Critical/High/Medium 기준</a:t>
-            </a:r>
-          </a:p>
-        </p:txBody>
-      </p:sp>
-      <p:sp>
-        <p:nvSpPr>
-          <p:cNvPr id="21" name="TextBox 20"/>
-          <p:cNvSpPr txBox="1"/>
-          <p:nvPr/>
-        </p:nvSpPr>
-        <p:spPr>
-          <a:xfrm>
-            <a:off x="4389120" y="4370832"/>
-            <a:ext cx="7040880" cy="246888"/>
-          </a:xfrm>
-          <a:prstGeom prst="rect">
-            <a:avLst/>
-          </a:prstGeom>
-          <a:noFill/>
-        </p:spPr>
-        <p:txBody>
-          <a:bodyPr wrap="square">
-            <a:spAutoFit/>
-          </a:bodyPr>
-          <a:lstStyle/>
-          <a:p>
-            <a:pPr algn="l"/>
-            <a:r>
-              <a:rPr sz="1100" b="0" i="0">
-                <a:solidFill>
-                  <a:srgbClr val="B8C9E8"/>
-                </a:solidFill>
-              </a:rPr>
-              <a:t>  • 반입 차단 기준  →  Critical 1개라도 있으면 차단?</a:t>
-            </a:r>
-          </a:p>
-        </p:txBody>
-      </p:sp>
-      <p:sp>
-        <p:nvSpPr>
-          <p:cNvPr id="22" name="TextBox 21"/>
-          <p:cNvSpPr txBox="1"/>
-          <p:nvPr/>
-        </p:nvSpPr>
-        <p:spPr>
-          <a:xfrm>
-            <a:off x="4389120" y="4626864"/>
-            <a:ext cx="7040880" cy="246888"/>
-          </a:xfrm>
-          <a:prstGeom prst="rect">
-            <a:avLst/>
-          </a:prstGeom>
-          <a:noFill/>
-        </p:spPr>
-        <p:txBody>
-          <a:bodyPr wrap="square">
-            <a:spAutoFit/>
-          </a:bodyPr>
-          <a:lstStyle/>
-          <a:p>
-            <a:pPr algn="l"/>
-            <a:r>
-              <a:rPr sz="1100" b="0" i="0">
-                <a:solidFill>
-                  <a:srgbClr val="B8C9E8"/>
-                </a:solidFill>
-              </a:rPr>
-              <a:t>  • 리포트 형식  →  XML / JSON / HTML</a:t>
-            </a:r>
-          </a:p>
-        </p:txBody>
-      </p:sp>
-      <p:sp>
-        <p:nvSpPr>
-          <p:cNvPr id="23" name="TextBox 22"/>
-          <p:cNvSpPr txBox="1"/>
-          <p:nvPr/>
-        </p:nvSpPr>
-        <p:spPr>
-          <a:xfrm>
-            <a:off x="4389120" y="4882896"/>
-            <a:ext cx="7040880" cy="246888"/>
-          </a:xfrm>
-          <a:prstGeom prst="rect">
-            <a:avLst/>
-          </a:prstGeom>
-          <a:noFill/>
-        </p:spPr>
-        <p:txBody>
-          <a:bodyPr wrap="square">
-            <a:spAutoFit/>
-          </a:bodyPr>
-          <a:lstStyle/>
-          <a:p>
-            <a:pPr algn="l"/>
-            <a:r>
-              <a:rPr sz="1100" b="0" i="0">
-                <a:solidFill>
-                  <a:srgbClr val="B8C9E8"/>
-                </a:solidFill>
-              </a:rPr>
-              <a:t/>
-            </a:r>
-          </a:p>
-        </p:txBody>
-      </p:sp>
-      <p:sp>
-        <p:nvSpPr>
-          <p:cNvPr id="24" name="TextBox 23"/>
-          <p:cNvSpPr txBox="1"/>
-          <p:nvPr/>
-        </p:nvSpPr>
-        <p:spPr>
-          <a:xfrm>
-            <a:off x="4389120" y="5138928"/>
-            <a:ext cx="7040880" cy="246888"/>
-          </a:xfrm>
-          <a:prstGeom prst="rect">
-            <a:avLst/>
-          </a:prstGeom>
-          <a:noFill/>
-        </p:spPr>
-        <p:txBody>
-          <a:bodyPr wrap="square">
-            <a:spAutoFit/>
-          </a:bodyPr>
-          <a:lstStyle/>
-          <a:p>
-            <a:pPr algn="l"/>
-            <a:r>
-              <a:rPr sz="1100" b="0" i="0">
-                <a:solidFill>
-                  <a:srgbClr val="FFFFFF"/>
-                </a:solidFill>
-              </a:rPr>
-              <a:t>연동할 게이트:</a:t>
-            </a:r>
-          </a:p>
-        </p:txBody>
-      </p:sp>
-      <p:sp>
-        <p:nvSpPr>
-          <p:cNvPr id="25" name="TextBox 24"/>
-          <p:cNvSpPr txBox="1"/>
-          <p:nvPr/>
-        </p:nvSpPr>
-        <p:spPr>
-          <a:xfrm>
-            <a:off x="4389120" y="5394960"/>
-            <a:ext cx="7040880" cy="246888"/>
-          </a:xfrm>
-          <a:prstGeom prst="rect">
-            <a:avLst/>
-          </a:prstGeom>
-          <a:noFill/>
-        </p:spPr>
-        <p:txBody>
-          <a:bodyPr wrap="square">
-            <a:spAutoFit/>
-          </a:bodyPr>
-          <a:lstStyle/>
-          <a:p>
-            <a:pPr algn="l"/>
-            <a:r>
-              <a:rPr sz="1100" b="0" i="0">
-                <a:solidFill>
-                  <a:srgbClr val="B8C9E8"/>
-                </a:solidFill>
-              </a:rPr>
-              <a:t>  gates/check-security.sh (영역 C)  ← 기존 파일 수정</a:t>
-            </a:r>
-          </a:p>
-        </p:txBody>
-      </p:sp>
-      <p:sp>
-        <p:nvSpPr>
-          <p:cNvPr id="26" name="TextBox 25"/>
-          <p:cNvSpPr txBox="1"/>
-          <p:nvPr/>
-        </p:nvSpPr>
-        <p:spPr>
-          <a:xfrm>
-            <a:off x="4389120" y="5650992"/>
-            <a:ext cx="7040880" cy="246888"/>
-          </a:xfrm>
-          <a:prstGeom prst="rect">
-            <a:avLst/>
-          </a:prstGeom>
-          <a:noFill/>
-        </p:spPr>
-        <p:txBody>
-          <a:bodyPr wrap="square">
-            <a:spAutoFit/>
-          </a:bodyPr>
-          <a:lstStyle/>
-          <a:p>
-            <a:pPr algn="l"/>
-            <a:r>
-              <a:rPr sz="1100" b="0" i="0">
-                <a:solidFill>
-                  <a:srgbClr val="B8C9E8"/>
-                </a:solidFill>
-              </a:rPr>
-              <a:t>  또는 gates/check-vuln-policy.sh  ← 신규 게이트 생성</a:t>
-            </a:r>
-          </a:p>
-        </p:txBody>
-      </p:sp>
-      <p:sp>
-        <p:nvSpPr>
-          <p:cNvPr id="27" name="TextBox 26"/>
-          <p:cNvSpPr txBox="1"/>
-          <p:nvPr/>
-        </p:nvSpPr>
-        <p:spPr>
-          <a:xfrm>
-            <a:off x="4389120" y="5907024"/>
-            <a:ext cx="7040880" cy="246888"/>
-          </a:xfrm>
-          <a:prstGeom prst="rect">
-            <a:avLst/>
-          </a:prstGeom>
-          <a:noFill/>
-        </p:spPr>
-        <p:txBody>
-          <a:bodyPr wrap="square">
-            <a:spAutoFit/>
-          </a:bodyPr>
-          <a:lstStyle/>
-          <a:p>
-            <a:pPr algn="l"/>
-            <a:r>
-              <a:rPr sz="1100" b="0" i="0">
-                <a:solidFill>
-                  <a:srgbClr val="B8C9E8"/>
-                </a:solidFill>
-              </a:rPr>
-              <a:t/>
-            </a:r>
-          </a:p>
-        </p:txBody>
-      </p:sp>
-      <p:sp>
-        <p:nvSpPr>
-          <p:cNvPr id="28" name="TextBox 27"/>
-          <p:cNvSpPr txBox="1"/>
-          <p:nvPr/>
-        </p:nvSpPr>
-        <p:spPr>
-          <a:xfrm>
-            <a:off x="4389120" y="6163056"/>
-            <a:ext cx="7040880" cy="246888"/>
-          </a:xfrm>
-          <a:prstGeom prst="rect">
-            <a:avLst/>
-          </a:prstGeom>
-          <a:noFill/>
-        </p:spPr>
-        <p:txBody>
-          <a:bodyPr wrap="square">
-            <a:spAutoFit/>
-          </a:bodyPr>
-          <a:lstStyle/>
-          <a:p>
-            <a:pPr algn="l"/>
-            <a:r>
-              <a:rPr sz="1100" b="0" i="0">
-                <a:solidFill>
-                  <a:srgbClr val="FF8C42"/>
-                </a:solidFill>
-              </a:rPr>
-              <a:t>솔루션명이 없으면: 일반 원칙 수준으로만 제안 가능</a:t>
-            </a:r>
-          </a:p>
-        </p:txBody>
-      </p:sp>
-      <p:sp>
-        <p:nvSpPr>
-          <p:cNvPr id="29" name="TextBox 28"/>
-          <p:cNvSpPr txBox="1"/>
-          <p:nvPr/>
-        </p:nvSpPr>
-        <p:spPr>
-          <a:xfrm>
-            <a:off x="4389120" y="6419088"/>
-            <a:ext cx="7040880" cy="246888"/>
-          </a:xfrm>
-          <a:prstGeom prst="rect">
-            <a:avLst/>
-          </a:prstGeom>
-          <a:noFill/>
-        </p:spPr>
-        <p:txBody>
-          <a:bodyPr wrap="square">
-            <a:spAutoFit/>
-          </a:bodyPr>
-          <a:lstStyle/>
-          <a:p>
-            <a:pPr algn="l"/>
-            <a:r>
-              <a:rPr sz="1100" b="0" i="0">
-                <a:solidFill>
-                  <a:srgbClr val="FF8C42"/>
-                </a:solidFill>
-              </a:rPr>
-              <a:t>  → KNOWLEDGE-GAPS.md에 '솔루션명' 항목 자동 기록</a:t>
+                  <a:srgbClr val="06D68A"/>
+                </a:solidFill>
+              </a:rPr>
+              <a:t>실제 결과로
+판정</a:t>
+            </a:r>
+          </a:p>
+        </p:txBody>
+      </p:sp>
+      <p:sp>
+        <p:nvSpPr>
+          <p:cNvPr id="33" name="TextBox 32"/>
+          <p:cNvSpPr txBox="1"/>
+          <p:nvPr/>
+        </p:nvSpPr>
+        <p:spPr>
+          <a:xfrm>
+            <a:off x="914400" y="4892040"/>
+            <a:ext cx="7315200" cy="365760"/>
+          </a:xfrm>
+          <a:prstGeom prst="rect">
+            <a:avLst/>
+          </a:prstGeom>
+          <a:noFill/>
+        </p:spPr>
+        <p:txBody>
+          <a:bodyPr wrap="square">
+            <a:spAutoFit/>
+          </a:bodyPr>
+          <a:lstStyle/>
+          <a:p>
+            <a:pPr algn="l"/>
+            <a:r>
+              <a:rPr sz="1300" b="0" i="0">
+                <a:solidFill>
+                  <a:srgbClr val="00D4AA"/>
+                </a:solidFill>
+              </a:rPr>
+              <a:t>Phase 1  게이트 스크립트 → bash 실제 실행</a:t>
+            </a:r>
+          </a:p>
+        </p:txBody>
+      </p:sp>
+      <p:sp>
+        <p:nvSpPr>
+          <p:cNvPr id="34" name="TextBox 33"/>
+          <p:cNvSpPr txBox="1"/>
+          <p:nvPr/>
+        </p:nvSpPr>
+        <p:spPr>
+          <a:xfrm>
+            <a:off x="914400" y="5257800"/>
+            <a:ext cx="9144000" cy="365760"/>
+          </a:xfrm>
+          <a:prstGeom prst="rect">
+            <a:avLst/>
+          </a:prstGeom>
+          <a:noFill/>
+        </p:spPr>
+        <p:txBody>
+          <a:bodyPr wrap="square">
+            <a:spAutoFit/>
+          </a:bodyPr>
+          <a:lstStyle/>
+          <a:p>
+            <a:pPr algn="l"/>
+            <a:r>
+              <a:rPr sz="1300" b="0" i="0">
+                <a:solidFill>
+                  <a:srgbClr val="00D4AA"/>
+                </a:solidFill>
+              </a:rPr>
+              <a:t>Phase 2  에이전트 md → 실제 에이전트 호출해서 응답 확인</a:t>
+            </a:r>
+          </a:p>
+        </p:txBody>
+      </p:sp>
+      <p:sp>
+        <p:nvSpPr>
+          <p:cNvPr id="35" name="TextBox 34"/>
+          <p:cNvSpPr txBox="1"/>
+          <p:nvPr/>
+        </p:nvSpPr>
+        <p:spPr>
+          <a:xfrm>
+            <a:off x="914400" y="5669280"/>
+            <a:ext cx="9144000" cy="411480"/>
+          </a:xfrm>
+          <a:prstGeom prst="rect">
+            <a:avLst/>
+          </a:prstGeom>
+          <a:noFill/>
+        </p:spPr>
+        <p:txBody>
+          <a:bodyPr wrap="square">
+            <a:spAutoFit/>
+          </a:bodyPr>
+          <a:lstStyle/>
+          <a:p>
+            <a:pPr algn="l"/>
+            <a:r>
+              <a:rPr sz="1400" b="1" i="0">
+                <a:solidFill>
+                  <a:srgbClr val="06D68A"/>
+                </a:solidFill>
+              </a:rPr>
+              <a:t>→ LLM 예측이 아닌 실제 실행 결과로 판정</a:t>
             </a:r>
           </a:p>
         </p:txBody>
@@ -6971,93 +7250,14 @@
       </p:sp>
       <p:sp>
         <p:nvSpPr>
-          <p:cNvPr id="4" name="TextBox 3"/>
-          <p:cNvSpPr txBox="1"/>
-          <p:nvPr/>
-        </p:nvSpPr>
-        <p:spPr>
-          <a:xfrm>
-            <a:off x="731520" y="274320"/>
-            <a:ext cx="10058400" cy="640080"/>
-          </a:xfrm>
-          <a:prstGeom prst="rect">
-            <a:avLst/>
-          </a:prstGeom>
-          <a:noFill/>
-        </p:spPr>
-        <p:txBody>
-          <a:bodyPr wrap="square">
-            <a:spAutoFit/>
-          </a:bodyPr>
-          <a:lstStyle/>
-          <a:p>
-            <a:pPr algn="l"/>
-            <a:r>
-              <a:rPr sz="3000" b="1" i="0">
-                <a:solidFill>
-                  <a:srgbClr val="FFFFFF"/>
-                </a:solidFill>
-              </a:rPr>
-              <a:t>시작하는 법 — 3단계</a:t>
-            </a:r>
-          </a:p>
-        </p:txBody>
-      </p:sp>
-      <p:sp>
-        <p:nvSpPr>
-          <p:cNvPr id="5" name="Rectangle 4"/>
+          <p:cNvPr id="4" name="Rectangle 3"/>
           <p:cNvSpPr/>
           <p:nvPr/>
         </p:nvSpPr>
         <p:spPr>
           <a:xfrm>
-            <a:off x="548640" y="1188720"/>
-            <a:ext cx="11064240" cy="1417320"/>
-          </a:xfrm>
-          <a:prstGeom prst="rect">
-            <a:avLst/>
-          </a:prstGeom>
-          <a:solidFill>
-            <a:srgbClr val="2A3A5A"/>
-          </a:solidFill>
-          <a:ln w="19050">
-            <a:solidFill>
-              <a:srgbClr val="4A9EFF"/>
-            </a:solidFill>
-          </a:ln>
-        </p:spPr>
-        <p:style>
-          <a:lnRef idx="1">
-            <a:schemeClr val="accent1"/>
-          </a:lnRef>
-          <a:fillRef idx="3">
-            <a:schemeClr val="accent1"/>
-          </a:fillRef>
-          <a:effectRef idx="2">
-            <a:schemeClr val="accent1"/>
-          </a:effectRef>
-          <a:fontRef idx="minor">
-            <a:schemeClr val="lt1"/>
-          </a:fontRef>
-        </p:style>
-        <p:txBody>
-          <a:bodyPr rtlCol="0" anchor="ctr"/>
-          <a:lstStyle/>
-          <a:p>
-            <a:pPr algn="ctr"/>
-          </a:p>
-        </p:txBody>
-      </p:sp>
-      <p:sp>
-        <p:nvSpPr>
-          <p:cNvPr id="6" name="Rectangle 5"/>
-          <p:cNvSpPr/>
-          <p:nvPr/>
-        </p:nvSpPr>
-        <p:spPr>
-          <a:xfrm>
-            <a:off x="548640" y="1188720"/>
-            <a:ext cx="640080" cy="1417320"/>
+            <a:off x="731520" y="182880"/>
+            <a:ext cx="1645920" cy="292608"/>
           </a:xfrm>
           <a:prstGeom prst="rect">
             <a:avLst/>
@@ -7093,91 +7293,127 @@
       </p:sp>
       <p:sp>
         <p:nvSpPr>
+          <p:cNvPr id="5" name="TextBox 4"/>
+          <p:cNvSpPr txBox="1"/>
+          <p:nvPr/>
+        </p:nvSpPr>
+        <p:spPr>
+          <a:xfrm>
+            <a:off x="777240" y="210312"/>
+            <a:ext cx="1645920" cy="292608"/>
+          </a:xfrm>
+          <a:prstGeom prst="rect">
+            <a:avLst/>
+          </a:prstGeom>
+          <a:noFill/>
+        </p:spPr>
+        <p:txBody>
+          <a:bodyPr wrap="square">
+            <a:spAutoFit/>
+          </a:bodyPr>
+          <a:lstStyle/>
+          <a:p>
+            <a:pPr algn="ctr"/>
+            <a:r>
+              <a:rPr sz="1300" b="1" i="0">
+                <a:solidFill>
+                  <a:srgbClr val="FFFFFF"/>
+                </a:solidFill>
+              </a:rPr>
+              <a:t>향후 계획 — Phase 1</a:t>
+            </a:r>
+          </a:p>
+        </p:txBody>
+      </p:sp>
+      <p:sp>
+        <p:nvSpPr>
+          <p:cNvPr id="6" name="TextBox 5"/>
+          <p:cNvSpPr txBox="1"/>
+          <p:nvPr/>
+        </p:nvSpPr>
+        <p:spPr>
+          <a:xfrm>
+            <a:off x="731520" y="548640"/>
+            <a:ext cx="10058400" cy="594360"/>
+          </a:xfrm>
+          <a:prstGeom prst="rect">
+            <a:avLst/>
+          </a:prstGeom>
+          <a:noFill/>
+        </p:spPr>
+        <p:txBody>
+          <a:bodyPr wrap="square">
+            <a:spAutoFit/>
+          </a:bodyPr>
+          <a:lstStyle/>
+          <a:p>
+            <a:pPr algn="l"/>
+            <a:r>
+              <a:rPr sz="2600" b="1" i="0">
+                <a:solidFill>
+                  <a:srgbClr val="FFFFFF"/>
+                </a:solidFill>
+              </a:rPr>
+              <a:t>게이트 스크립트 실제 실행으로 검증</a:t>
+            </a:r>
+          </a:p>
+        </p:txBody>
+      </p:sp>
+      <p:sp>
+        <p:nvSpPr>
           <p:cNvPr id="7" name="TextBox 6"/>
           <p:cNvSpPr txBox="1"/>
           <p:nvPr/>
         </p:nvSpPr>
         <p:spPr>
           <a:xfrm>
-            <a:off x="548640" y="1600200"/>
-            <a:ext cx="640080" cy="548640"/>
-          </a:xfrm>
-          <a:prstGeom prst="rect">
-            <a:avLst/>
-          </a:prstGeom>
-          <a:noFill/>
-        </p:spPr>
-        <p:txBody>
-          <a:bodyPr wrap="square">
-            <a:spAutoFit/>
-          </a:bodyPr>
-          <a:lstStyle/>
-          <a:p>
-            <a:pPr algn="ctr"/>
-            <a:r>
-              <a:rPr sz="2600" b="1" i="0">
-                <a:solidFill>
-                  <a:srgbClr val="0F172A"/>
-                </a:solidFill>
-              </a:rPr>
-              <a:t>1</a:t>
-            </a:r>
-          </a:p>
-        </p:txBody>
-      </p:sp>
-      <p:sp>
-        <p:nvSpPr>
-          <p:cNvPr id="8" name="TextBox 7"/>
-          <p:cNvSpPr txBox="1"/>
-          <p:nvPr/>
-        </p:nvSpPr>
-        <p:spPr>
-          <a:xfrm>
-            <a:off x="1371600" y="1298448"/>
-            <a:ext cx="9601200" cy="411480"/>
-          </a:xfrm>
-          <a:prstGeom prst="rect">
-            <a:avLst/>
-          </a:prstGeom>
-          <a:noFill/>
-        </p:spPr>
-        <p:txBody>
-          <a:bodyPr wrap="square">
-            <a:spAutoFit/>
-          </a:bodyPr>
-          <a:lstStyle/>
-          <a:p>
-            <a:pPr algn="l"/>
-            <a:r>
-              <a:rPr sz="1600" b="1" i="0">
-                <a:solidFill>
-                  <a:srgbClr val="4A9EFF"/>
-                </a:solidFill>
-              </a:rPr>
-              <a:t>base 템플릿 클론</a:t>
-            </a:r>
-          </a:p>
-        </p:txBody>
-      </p:sp>
-      <p:sp>
-        <p:nvSpPr>
-          <p:cNvPr id="9" name="Rectangle 8"/>
+            <a:off x="731520" y="1234440"/>
+            <a:ext cx="9144000" cy="365760"/>
+          </a:xfrm>
+          <a:prstGeom prst="rect">
+            <a:avLst/>
+          </a:prstGeom>
+          <a:noFill/>
+        </p:spPr>
+        <p:txBody>
+          <a:bodyPr wrap="square">
+            <a:spAutoFit/>
+          </a:bodyPr>
+          <a:lstStyle/>
+          <a:p>
+            <a:pPr algn="l"/>
+            <a:r>
+              <a:rPr sz="1400" b="0" i="0">
+                <a:solidFill>
+                  <a:srgbClr val="B8C9E8"/>
+                </a:solidFill>
+              </a:rPr>
+              <a:t>변경 내용: harness-judge.md 에 Bash 도구 추가</a:t>
+            </a:r>
+          </a:p>
+        </p:txBody>
+      </p:sp>
+      <p:sp>
+        <p:nvSpPr>
+          <p:cNvPr id="8" name="Rectangle 7"/>
           <p:cNvSpPr/>
           <p:nvPr/>
         </p:nvSpPr>
         <p:spPr>
           <a:xfrm>
-            <a:off x="1325880" y="1783080"/>
-            <a:ext cx="9966960" cy="594360"/>
+            <a:off x="548640" y="1783080"/>
+            <a:ext cx="5349240" cy="4389120"/>
           </a:xfrm>
           <a:prstGeom prst="rect">
             <a:avLst/>
           </a:prstGeom>
           <a:solidFill>
-            <a:srgbClr val="061020"/>
+            <a:srgbClr val="2A3A5A"/>
           </a:solidFill>
-          <a:ln>
-            <a:noFill/>
+          <a:ln w="19050">
+            <a:solidFill>
+              <a:srgbClr val="FF4D6D"/>
+            </a:solidFill>
           </a:ln>
         </p:spPr>
         <p:style>
@@ -7204,60 +7440,23 @@
       </p:sp>
       <p:sp>
         <p:nvSpPr>
-          <p:cNvPr id="10" name="TextBox 9"/>
-          <p:cNvSpPr txBox="1"/>
-          <p:nvPr/>
-        </p:nvSpPr>
-        <p:spPr>
-          <a:xfrm>
-            <a:off x="1463040" y="1847088"/>
-            <a:ext cx="9784080" cy="457200"/>
-          </a:xfrm>
-          <a:prstGeom prst="rect">
-            <a:avLst/>
-          </a:prstGeom>
-          <a:noFill/>
-        </p:spPr>
-        <p:txBody>
-          <a:bodyPr wrap="square">
-            <a:spAutoFit/>
-          </a:bodyPr>
-          <a:lstStyle/>
-          <a:p>
-            <a:pPr algn="l"/>
-            <a:r>
-              <a:rPr sz="1200" b="0" i="0">
-                <a:solidFill>
-                  <a:srgbClr val="FFD66B"/>
-                </a:solidFill>
-              </a:rPr>
-              <a:t>git clone https://github.com/studioKjm/ai-harness-template
-        /path/to/your/ai-harness-template</a:t>
-            </a:r>
-          </a:p>
-        </p:txBody>
-      </p:sp>
-      <p:sp>
-        <p:nvSpPr>
-          <p:cNvPr id="11" name="Rectangle 10"/>
+          <p:cNvPr id="9" name="Rectangle 8"/>
           <p:cNvSpPr/>
           <p:nvPr/>
         </p:nvSpPr>
         <p:spPr>
           <a:xfrm>
-            <a:off x="548640" y="2834640"/>
-            <a:ext cx="11064240" cy="1417320"/>
+            <a:off x="548640" y="1783080"/>
+            <a:ext cx="5349240" cy="502920"/>
           </a:xfrm>
           <a:prstGeom prst="rect">
             <a:avLst/>
           </a:prstGeom>
           <a:solidFill>
-            <a:srgbClr val="2A3A5A"/>
+            <a:srgbClr val="FF4D6D"/>
           </a:solidFill>
-          <a:ln w="19050">
-            <a:solidFill>
-              <a:srgbClr val="FF8C42"/>
-            </a:solidFill>
+          <a:ln>
+            <a:noFill/>
           </a:ln>
         </p:spPr>
         <p:style>
@@ -7284,202 +7483,456 @@
       </p:sp>
       <p:sp>
         <p:nvSpPr>
-          <p:cNvPr id="12" name="Rectangle 11"/>
+          <p:cNvPr id="10" name="TextBox 9"/>
+          <p:cNvSpPr txBox="1"/>
+          <p:nvPr/>
+        </p:nvSpPr>
+        <p:spPr>
+          <a:xfrm>
+            <a:off x="777240" y="1847088"/>
+            <a:ext cx="4846320" cy="365760"/>
+          </a:xfrm>
+          <a:prstGeom prst="rect">
+            <a:avLst/>
+          </a:prstGeom>
+          <a:noFill/>
+        </p:spPr>
+        <p:txBody>
+          <a:bodyPr wrap="square">
+            <a:spAutoFit/>
+          </a:bodyPr>
+          <a:lstStyle/>
+          <a:p>
+            <a:pPr algn="l"/>
+            <a:r>
+              <a:rPr sz="1400" b="1" i="0">
+                <a:solidFill>
+                  <a:srgbClr val="0F172A"/>
+                </a:solidFill>
+              </a:rPr>
+              <a:t>AS-IS  (지금)</a:t>
+            </a:r>
+          </a:p>
+        </p:txBody>
+      </p:sp>
+      <p:sp>
+        <p:nvSpPr>
+          <p:cNvPr id="11" name="TextBox 10"/>
+          <p:cNvSpPr txBox="1"/>
+          <p:nvPr/>
+        </p:nvSpPr>
+        <p:spPr>
+          <a:xfrm>
+            <a:off x="777240" y="2377440"/>
+            <a:ext cx="4937760" cy="301752"/>
+          </a:xfrm>
+          <a:prstGeom prst="rect">
+            <a:avLst/>
+          </a:prstGeom>
+          <a:noFill/>
+        </p:spPr>
+        <p:txBody>
+          <a:bodyPr wrap="square">
+            <a:spAutoFit/>
+          </a:bodyPr>
+          <a:lstStyle/>
+          <a:p>
+            <a:pPr algn="l"/>
+            <a:r>
+              <a:rPr sz="1100" b="0" i="0">
+                <a:solidFill>
+                  <a:srgbClr val="FFFFFF"/>
+                </a:solidFill>
+              </a:rPr>
+              <a:t>개발자: "sendgrid 쓰면 차단해줘"</a:t>
+            </a:r>
+          </a:p>
+        </p:txBody>
+      </p:sp>
+      <p:sp>
+        <p:nvSpPr>
+          <p:cNvPr id="12" name="TextBox 11"/>
+          <p:cNvSpPr txBox="1"/>
+          <p:nvPr/>
+        </p:nvSpPr>
+        <p:spPr>
+          <a:xfrm>
+            <a:off x="777240" y="2697480"/>
+            <a:ext cx="4937760" cy="301752"/>
+          </a:xfrm>
+          <a:prstGeom prst="rect">
+            <a:avLst/>
+          </a:prstGeom>
+          <a:noFill/>
+        </p:spPr>
+        <p:txBody>
+          <a:bodyPr wrap="square">
+            <a:spAutoFit/>
+          </a:bodyPr>
+          <a:lstStyle/>
+          <a:p>
+            <a:pPr algn="l"/>
+            <a:r>
+              <a:rPr sz="1100" b="0" i="0">
+                <a:solidFill>
+                  <a:srgbClr val="B8C9E8"/>
+                </a:solidFill>
+              </a:rPr>
+              <a:t/>
+            </a:r>
+          </a:p>
+        </p:txBody>
+      </p:sp>
+      <p:sp>
+        <p:nvSpPr>
+          <p:cNvPr id="13" name="TextBox 12"/>
+          <p:cNvSpPr txBox="1"/>
+          <p:nvPr/>
+        </p:nvSpPr>
+        <p:spPr>
+          <a:xfrm>
+            <a:off x="777240" y="3017520"/>
+            <a:ext cx="4937760" cy="301752"/>
+          </a:xfrm>
+          <a:prstGeom prst="rect">
+            <a:avLst/>
+          </a:prstGeom>
+          <a:noFill/>
+        </p:spPr>
+        <p:txBody>
+          <a:bodyPr wrap="square">
+            <a:spAutoFit/>
+          </a:bodyPr>
+          <a:lstStyle/>
+          <a:p>
+            <a:pPr algn="l"/>
+            <a:r>
+              <a:rPr sz="1100" b="0" i="0">
+                <a:solidFill>
+                  <a:srgbClr val="B8C9E8"/>
+                </a:solidFill>
+              </a:rPr>
+              <a:t>봇: check-mail-solution.sh 수정 제안</a:t>
+            </a:r>
+          </a:p>
+        </p:txBody>
+      </p:sp>
+      <p:sp>
+        <p:nvSpPr>
+          <p:cNvPr id="14" name="TextBox 13"/>
+          <p:cNvSpPr txBox="1"/>
+          <p:nvPr/>
+        </p:nvSpPr>
+        <p:spPr>
+          <a:xfrm>
+            <a:off x="777240" y="3337560"/>
+            <a:ext cx="4937760" cy="301752"/>
+          </a:xfrm>
+          <a:prstGeom prst="rect">
+            <a:avLst/>
+          </a:prstGeom>
+          <a:noFill/>
+        </p:spPr>
+        <p:txBody>
+          <a:bodyPr wrap="square">
+            <a:spAutoFit/>
+          </a:bodyPr>
+          <a:lstStyle/>
+          <a:p>
+            <a:pPr algn="l"/>
+            <a:r>
+              <a:rPr sz="1100" b="0" i="0">
+                <a:solidFill>
+                  <a:srgbClr val="B8C9E8"/>
+                </a:solidFill>
+              </a:rPr>
+              <a:t/>
+            </a:r>
+          </a:p>
+        </p:txBody>
+      </p:sp>
+      <p:sp>
+        <p:nvSpPr>
+          <p:cNvPr id="15" name="TextBox 14"/>
+          <p:cNvSpPr txBox="1"/>
+          <p:nvPr/>
+        </p:nvSpPr>
+        <p:spPr>
+          <a:xfrm>
+            <a:off x="777240" y="3657600"/>
+            <a:ext cx="4937760" cy="301752"/>
+          </a:xfrm>
+          <a:prstGeom prst="rect">
+            <a:avLst/>
+          </a:prstGeom>
+          <a:noFill/>
+        </p:spPr>
+        <p:txBody>
+          <a:bodyPr wrap="square">
+            <a:spAutoFit/>
+          </a:bodyPr>
+          <a:lstStyle/>
+          <a:p>
+            <a:pPr algn="l"/>
+            <a:r>
+              <a:rPr sz="1100" b="0" i="0">
+                <a:solidFill>
+                  <a:srgbClr val="FF8C42"/>
+                </a:solidFill>
+              </a:rPr>
+              <a:t>시뮬레이터:</a:t>
+            </a:r>
+          </a:p>
+        </p:txBody>
+      </p:sp>
+      <p:sp>
+        <p:nvSpPr>
+          <p:cNvPr id="16" name="TextBox 15"/>
+          <p:cNvSpPr txBox="1"/>
+          <p:nvPr/>
+        </p:nvSpPr>
+        <p:spPr>
+          <a:xfrm>
+            <a:off x="777240" y="3977639"/>
+            <a:ext cx="4937760" cy="301752"/>
+          </a:xfrm>
+          <a:prstGeom prst="rect">
+            <a:avLst/>
+          </a:prstGeom>
+          <a:noFill/>
+        </p:spPr>
+        <p:txBody>
+          <a:bodyPr wrap="square">
+            <a:spAutoFit/>
+          </a:bodyPr>
+          <a:lstStyle/>
+          <a:p>
+            <a:pPr algn="l"/>
+            <a:r>
+              <a:rPr sz="1100" b="0" i="0">
+                <a:solidFill>
+                  <a:srgbClr val="FF8C42"/>
+                </a:solidFill>
+              </a:rPr>
+              <a:t>"sendgrid import가 있으면 아마 탐지될 거예요"</a:t>
+            </a:r>
+          </a:p>
+        </p:txBody>
+      </p:sp>
+      <p:sp>
+        <p:nvSpPr>
+          <p:cNvPr id="17" name="TextBox 16"/>
+          <p:cNvSpPr txBox="1"/>
+          <p:nvPr/>
+        </p:nvSpPr>
+        <p:spPr>
+          <a:xfrm>
+            <a:off x="777240" y="4297679"/>
+            <a:ext cx="4937760" cy="301752"/>
+          </a:xfrm>
+          <a:prstGeom prst="rect">
+            <a:avLst/>
+          </a:prstGeom>
+          <a:noFill/>
+        </p:spPr>
+        <p:txBody>
+          <a:bodyPr wrap="square">
+            <a:spAutoFit/>
+          </a:bodyPr>
+          <a:lstStyle/>
+          <a:p>
+            <a:pPr algn="l"/>
+            <a:r>
+              <a:rPr sz="1100" b="0" i="0">
+                <a:solidFill>
+                  <a:srgbClr val="B8C9E8"/>
+                </a:solidFill>
+              </a:rPr>
+              <a:t/>
+            </a:r>
+          </a:p>
+        </p:txBody>
+      </p:sp>
+      <p:sp>
+        <p:nvSpPr>
+          <p:cNvPr id="18" name="TextBox 17"/>
+          <p:cNvSpPr txBox="1"/>
+          <p:nvPr/>
+        </p:nvSpPr>
+        <p:spPr>
+          <a:xfrm>
+            <a:off x="777240" y="4617720"/>
+            <a:ext cx="4937760" cy="301752"/>
+          </a:xfrm>
+          <a:prstGeom prst="rect">
+            <a:avLst/>
+          </a:prstGeom>
+          <a:noFill/>
+        </p:spPr>
+        <p:txBody>
+          <a:bodyPr wrap="square">
+            <a:spAutoFit/>
+          </a:bodyPr>
+          <a:lstStyle/>
+          <a:p>
+            <a:pPr algn="l"/>
+            <a:r>
+              <a:rPr sz="1100" b="0" i="0">
+                <a:solidFill>
+                  <a:srgbClr val="FF4D6D"/>
+                </a:solidFill>
+              </a:rPr>
+              <a:t>판정봇:</a:t>
+            </a:r>
+          </a:p>
+        </p:txBody>
+      </p:sp>
+      <p:sp>
+        <p:nvSpPr>
+          <p:cNvPr id="19" name="TextBox 18"/>
+          <p:cNvSpPr txBox="1"/>
+          <p:nvPr/>
+        </p:nvSpPr>
+        <p:spPr>
+          <a:xfrm>
+            <a:off x="777240" y="4937760"/>
+            <a:ext cx="4937760" cy="301752"/>
+          </a:xfrm>
+          <a:prstGeom prst="rect">
+            <a:avLst/>
+          </a:prstGeom>
+          <a:noFill/>
+        </p:spPr>
+        <p:txBody>
+          <a:bodyPr wrap="square">
+            <a:spAutoFit/>
+          </a:bodyPr>
+          <a:lstStyle/>
+          <a:p>
+            <a:pPr algn="l"/>
+            <a:r>
+              <a:rPr sz="1100" b="0" i="0">
+                <a:solidFill>
+                  <a:srgbClr val="FF4D6D"/>
+                </a:solidFill>
+              </a:rPr>
+              <a:t>"시뮬레이션 결과가 그럴듯하니 PASS"</a:t>
+            </a:r>
+          </a:p>
+        </p:txBody>
+      </p:sp>
+      <p:sp>
+        <p:nvSpPr>
+          <p:cNvPr id="20" name="TextBox 19"/>
+          <p:cNvSpPr txBox="1"/>
+          <p:nvPr/>
+        </p:nvSpPr>
+        <p:spPr>
+          <a:xfrm>
+            <a:off x="777240" y="5257800"/>
+            <a:ext cx="4937760" cy="301752"/>
+          </a:xfrm>
+          <a:prstGeom prst="rect">
+            <a:avLst/>
+          </a:prstGeom>
+          <a:noFill/>
+        </p:spPr>
+        <p:txBody>
+          <a:bodyPr wrap="square">
+            <a:spAutoFit/>
+          </a:bodyPr>
+          <a:lstStyle/>
+          <a:p>
+            <a:pPr algn="l"/>
+            <a:r>
+              <a:rPr sz="1100" b="0" i="0">
+                <a:solidFill>
+                  <a:srgbClr val="B8C9E8"/>
+                </a:solidFill>
+              </a:rPr>
+              <a:t/>
+            </a:r>
+          </a:p>
+        </p:txBody>
+      </p:sp>
+      <p:sp>
+        <p:nvSpPr>
+          <p:cNvPr id="21" name="TextBox 20"/>
+          <p:cNvSpPr txBox="1"/>
+          <p:nvPr/>
+        </p:nvSpPr>
+        <p:spPr>
+          <a:xfrm>
+            <a:off x="777240" y="5577840"/>
+            <a:ext cx="4937760" cy="301752"/>
+          </a:xfrm>
+          <a:prstGeom prst="rect">
+            <a:avLst/>
+          </a:prstGeom>
+          <a:noFill/>
+        </p:spPr>
+        <p:txBody>
+          <a:bodyPr wrap="square">
+            <a:spAutoFit/>
+          </a:bodyPr>
+          <a:lstStyle/>
+          <a:p>
+            <a:pPr algn="l"/>
+            <a:r>
+              <a:rPr sz="1100" b="0" i="0">
+                <a:solidFill>
+                  <a:srgbClr val="FF4D6D"/>
+                </a:solidFill>
+              </a:rPr>
+              <a:t>⚠️  실제로 스크립트가 돌아가는지 모름</a:t>
+            </a:r>
+          </a:p>
+        </p:txBody>
+      </p:sp>
+      <p:sp>
+        <p:nvSpPr>
+          <p:cNvPr id="22" name="TextBox 21"/>
+          <p:cNvSpPr txBox="1"/>
+          <p:nvPr/>
+        </p:nvSpPr>
+        <p:spPr>
+          <a:xfrm>
+            <a:off x="777240" y="5897879"/>
+            <a:ext cx="4937760" cy="301752"/>
+          </a:xfrm>
+          <a:prstGeom prst="rect">
+            <a:avLst/>
+          </a:prstGeom>
+          <a:noFill/>
+        </p:spPr>
+        <p:txBody>
+          <a:bodyPr wrap="square">
+            <a:spAutoFit/>
+          </a:bodyPr>
+          <a:lstStyle/>
+          <a:p>
+            <a:pPr algn="l"/>
+            <a:r>
+              <a:rPr sz="1100" b="0" i="0">
+                <a:solidFill>
+                  <a:srgbClr val="FF4D6D"/>
+                </a:solidFill>
+              </a:rPr>
+              <a:t>⚠️  예측이 틀려도 PASS 가능</a:t>
+            </a:r>
+          </a:p>
+        </p:txBody>
+      </p:sp>
+      <p:sp>
+        <p:nvSpPr>
+          <p:cNvPr id="23" name="Rectangle 22"/>
           <p:cNvSpPr/>
           <p:nvPr/>
         </p:nvSpPr>
         <p:spPr>
           <a:xfrm>
-            <a:off x="548640" y="2834640"/>
-            <a:ext cx="640080" cy="1417320"/>
-          </a:xfrm>
-          <a:prstGeom prst="rect">
-            <a:avLst/>
-          </a:prstGeom>
-          <a:solidFill>
-            <a:srgbClr val="FF8C42"/>
-          </a:solidFill>
-          <a:ln>
-            <a:noFill/>
-          </a:ln>
-        </p:spPr>
-        <p:style>
-          <a:lnRef idx="1">
-            <a:schemeClr val="accent1"/>
-          </a:lnRef>
-          <a:fillRef idx="3">
-            <a:schemeClr val="accent1"/>
-          </a:fillRef>
-          <a:effectRef idx="2">
-            <a:schemeClr val="accent1"/>
-          </a:effectRef>
-          <a:fontRef idx="minor">
-            <a:schemeClr val="lt1"/>
-          </a:fontRef>
-        </p:style>
-        <p:txBody>
-          <a:bodyPr rtlCol="0" anchor="ctr"/>
-          <a:lstStyle/>
-          <a:p>
-            <a:pPr algn="ctr"/>
-          </a:p>
-        </p:txBody>
-      </p:sp>
-      <p:sp>
-        <p:nvSpPr>
-          <p:cNvPr id="13" name="TextBox 12"/>
-          <p:cNvSpPr txBox="1"/>
-          <p:nvPr/>
-        </p:nvSpPr>
-        <p:spPr>
-          <a:xfrm>
-            <a:off x="548640" y="3246120"/>
-            <a:ext cx="640080" cy="548640"/>
-          </a:xfrm>
-          <a:prstGeom prst="rect">
-            <a:avLst/>
-          </a:prstGeom>
-          <a:noFill/>
-        </p:spPr>
-        <p:txBody>
-          <a:bodyPr wrap="square">
-            <a:spAutoFit/>
-          </a:bodyPr>
-          <a:lstStyle/>
-          <a:p>
-            <a:pPr algn="ctr"/>
-            <a:r>
-              <a:rPr sz="2600" b="1" i="0">
-                <a:solidFill>
-                  <a:srgbClr val="0F172A"/>
-                </a:solidFill>
-              </a:rPr>
-              <a:t>2</a:t>
-            </a:r>
-          </a:p>
-        </p:txBody>
-      </p:sp>
-      <p:sp>
-        <p:nvSpPr>
-          <p:cNvPr id="14" name="TextBox 13"/>
-          <p:cNvSpPr txBox="1"/>
-          <p:nvPr/>
-        </p:nvSpPr>
-        <p:spPr>
-          <a:xfrm>
-            <a:off x="1371600" y="2944368"/>
-            <a:ext cx="9601200" cy="411480"/>
-          </a:xfrm>
-          <a:prstGeom prst="rect">
-            <a:avLst/>
-          </a:prstGeom>
-          <a:noFill/>
-        </p:spPr>
-        <p:txBody>
-          <a:bodyPr wrap="square">
-            <a:spAutoFit/>
-          </a:bodyPr>
-          <a:lstStyle/>
-          <a:p>
-            <a:pPr algn="l"/>
-            <a:r>
-              <a:rPr sz="1600" b="1" i="0">
-                <a:solidFill>
-                  <a:srgbClr val="FF8C42"/>
-                </a:solidFill>
-              </a:rPr>
-              <a:t>harness-customizer 클론</a:t>
-            </a:r>
-          </a:p>
-        </p:txBody>
-      </p:sp>
-      <p:sp>
-        <p:nvSpPr>
-          <p:cNvPr id="15" name="Rectangle 14"/>
-          <p:cNvSpPr/>
-          <p:nvPr/>
-        </p:nvSpPr>
-        <p:spPr>
-          <a:xfrm>
-            <a:off x="1325880" y="3429000"/>
-            <a:ext cx="9966960" cy="594360"/>
-          </a:xfrm>
-          <a:prstGeom prst="rect">
-            <a:avLst/>
-          </a:prstGeom>
-          <a:solidFill>
-            <a:srgbClr val="061020"/>
-          </a:solidFill>
-          <a:ln>
-            <a:noFill/>
-          </a:ln>
-        </p:spPr>
-        <p:style>
-          <a:lnRef idx="1">
-            <a:schemeClr val="accent1"/>
-          </a:lnRef>
-          <a:fillRef idx="3">
-            <a:schemeClr val="accent1"/>
-          </a:fillRef>
-          <a:effectRef idx="2">
-            <a:schemeClr val="accent1"/>
-          </a:effectRef>
-          <a:fontRef idx="minor">
-            <a:schemeClr val="lt1"/>
-          </a:fontRef>
-        </p:style>
-        <p:txBody>
-          <a:bodyPr rtlCol="0" anchor="ctr"/>
-          <a:lstStyle/>
-          <a:p>
-            <a:pPr algn="ctr"/>
-          </a:p>
-        </p:txBody>
-      </p:sp>
-      <p:sp>
-        <p:nvSpPr>
-          <p:cNvPr id="16" name="TextBox 15"/>
-          <p:cNvSpPr txBox="1"/>
-          <p:nvPr/>
-        </p:nvSpPr>
-        <p:spPr>
-          <a:xfrm>
-            <a:off x="1463040" y="3493008"/>
-            <a:ext cx="9784080" cy="457200"/>
-          </a:xfrm>
-          <a:prstGeom prst="rect">
-            <a:avLst/>
-          </a:prstGeom>
-          <a:noFill/>
-        </p:spPr>
-        <p:txBody>
-          <a:bodyPr wrap="square">
-            <a:spAutoFit/>
-          </a:bodyPr>
-          <a:lstStyle/>
-          <a:p>
-            <a:pPr algn="l"/>
-            <a:r>
-              <a:rPr sz="1200" b="0" i="0">
-                <a:solidFill>
-                  <a:srgbClr val="FFD66B"/>
-                </a:solidFill>
-              </a:rPr>
-              <a:t>git clone https://github.com/easyseop/harness-customizer</a:t>
-            </a:r>
-          </a:p>
-        </p:txBody>
-      </p:sp>
-      <p:sp>
-        <p:nvSpPr>
-          <p:cNvPr id="17" name="Rectangle 16"/>
-          <p:cNvSpPr/>
-          <p:nvPr/>
-        </p:nvSpPr>
-        <p:spPr>
-          <a:xfrm>
-            <a:off x="548640" y="4480560"/>
-            <a:ext cx="11064240" cy="1417320"/>
+            <a:off x="6309360" y="1783080"/>
+            <a:ext cx="5349240" cy="4389120"/>
           </a:xfrm>
           <a:prstGeom prst="rect">
             <a:avLst/>
@@ -7517,14 +7970,14 @@
       </p:sp>
       <p:sp>
         <p:nvSpPr>
-          <p:cNvPr id="18" name="Rectangle 17"/>
+          <p:cNvPr id="24" name="Rectangle 23"/>
           <p:cNvSpPr/>
           <p:nvPr/>
         </p:nvSpPr>
         <p:spPr>
           <a:xfrm>
-            <a:off x="548640" y="4480560"/>
-            <a:ext cx="640080" cy="1417320"/>
+            <a:off x="6309360" y="1783080"/>
+            <a:ext cx="5349240" cy="502920"/>
           </a:xfrm>
           <a:prstGeom prst="rect">
             <a:avLst/>
@@ -7560,88 +8013,462 @@
       </p:sp>
       <p:sp>
         <p:nvSpPr>
-          <p:cNvPr id="19" name="TextBox 18"/>
-          <p:cNvSpPr txBox="1"/>
-          <p:nvPr/>
-        </p:nvSpPr>
-        <p:spPr>
-          <a:xfrm>
-            <a:off x="548640" y="4892040"/>
-            <a:ext cx="640080" cy="548640"/>
-          </a:xfrm>
-          <a:prstGeom prst="rect">
-            <a:avLst/>
-          </a:prstGeom>
-          <a:noFill/>
-        </p:spPr>
-        <p:txBody>
-          <a:bodyPr wrap="square">
-            <a:spAutoFit/>
-          </a:bodyPr>
-          <a:lstStyle/>
-          <a:p>
-            <a:pPr algn="ctr"/>
-            <a:r>
-              <a:rPr sz="2600" b="1" i="0">
+          <p:cNvPr id="25" name="TextBox 24"/>
+          <p:cNvSpPr txBox="1"/>
+          <p:nvPr/>
+        </p:nvSpPr>
+        <p:spPr>
+          <a:xfrm>
+            <a:off x="6537960" y="1847088"/>
+            <a:ext cx="4846320" cy="365760"/>
+          </a:xfrm>
+          <a:prstGeom prst="rect">
+            <a:avLst/>
+          </a:prstGeom>
+          <a:noFill/>
+        </p:spPr>
+        <p:txBody>
+          <a:bodyPr wrap="square">
+            <a:spAutoFit/>
+          </a:bodyPr>
+          <a:lstStyle/>
+          <a:p>
+            <a:pPr algn="l"/>
+            <a:r>
+              <a:rPr sz="1400" b="1" i="0">
                 <a:solidFill>
                   <a:srgbClr val="0F172A"/>
                 </a:solidFill>
               </a:rPr>
-              <a:t>3</a:t>
-            </a:r>
-          </a:p>
-        </p:txBody>
-      </p:sp>
-      <p:sp>
-        <p:nvSpPr>
-          <p:cNvPr id="20" name="TextBox 19"/>
-          <p:cNvSpPr txBox="1"/>
-          <p:nvPr/>
-        </p:nvSpPr>
-        <p:spPr>
-          <a:xfrm>
-            <a:off x="1371600" y="4590288"/>
-            <a:ext cx="9601200" cy="411480"/>
-          </a:xfrm>
-          <a:prstGeom prst="rect">
-            <a:avLst/>
-          </a:prstGeom>
-          <a:noFill/>
-        </p:spPr>
-        <p:txBody>
-          <a:bodyPr wrap="square">
-            <a:spAutoFit/>
-          </a:bodyPr>
-          <a:lstStyle/>
-          <a:p>
-            <a:pPr algn="l"/>
-            <a:r>
-              <a:rPr sz="1600" b="1" i="0">
+              <a:t>TO-BE  (Phase 1)</a:t>
+            </a:r>
+          </a:p>
+        </p:txBody>
+      </p:sp>
+      <p:sp>
+        <p:nvSpPr>
+          <p:cNvPr id="26" name="TextBox 25"/>
+          <p:cNvSpPr txBox="1"/>
+          <p:nvPr/>
+        </p:nvSpPr>
+        <p:spPr>
+          <a:xfrm>
+            <a:off x="6537960" y="2377440"/>
+            <a:ext cx="4937760" cy="301752"/>
+          </a:xfrm>
+          <a:prstGeom prst="rect">
+            <a:avLst/>
+          </a:prstGeom>
+          <a:noFill/>
+        </p:spPr>
+        <p:txBody>
+          <a:bodyPr wrap="square">
+            <a:spAutoFit/>
+          </a:bodyPr>
+          <a:lstStyle/>
+          <a:p>
+            <a:pPr algn="l"/>
+            <a:r>
+              <a:rPr sz="1100" b="0" i="0">
+                <a:solidFill>
+                  <a:srgbClr val="FFFFFF"/>
+                </a:solidFill>
+              </a:rPr>
+              <a:t>개발자: "sendgrid 쓰면 차단해줘"</a:t>
+            </a:r>
+          </a:p>
+        </p:txBody>
+      </p:sp>
+      <p:sp>
+        <p:nvSpPr>
+          <p:cNvPr id="27" name="TextBox 26"/>
+          <p:cNvSpPr txBox="1"/>
+          <p:nvPr/>
+        </p:nvSpPr>
+        <p:spPr>
+          <a:xfrm>
+            <a:off x="6537960" y="2697480"/>
+            <a:ext cx="4937760" cy="301752"/>
+          </a:xfrm>
+          <a:prstGeom prst="rect">
+            <a:avLst/>
+          </a:prstGeom>
+          <a:noFill/>
+        </p:spPr>
+        <p:txBody>
+          <a:bodyPr wrap="square">
+            <a:spAutoFit/>
+          </a:bodyPr>
+          <a:lstStyle/>
+          <a:p>
+            <a:pPr algn="l"/>
+            <a:r>
+              <a:rPr sz="1100" b="0" i="0">
+                <a:solidFill>
+                  <a:srgbClr val="B8C9E8"/>
+                </a:solidFill>
+              </a:rPr>
+              <a:t/>
+            </a:r>
+          </a:p>
+        </p:txBody>
+      </p:sp>
+      <p:sp>
+        <p:nvSpPr>
+          <p:cNvPr id="28" name="TextBox 27"/>
+          <p:cNvSpPr txBox="1"/>
+          <p:nvPr/>
+        </p:nvSpPr>
+        <p:spPr>
+          <a:xfrm>
+            <a:off x="6537960" y="3017520"/>
+            <a:ext cx="4937760" cy="301752"/>
+          </a:xfrm>
+          <a:prstGeom prst="rect">
+            <a:avLst/>
+          </a:prstGeom>
+          <a:noFill/>
+        </p:spPr>
+        <p:txBody>
+          <a:bodyPr wrap="square">
+            <a:spAutoFit/>
+          </a:bodyPr>
+          <a:lstStyle/>
+          <a:p>
+            <a:pPr algn="l"/>
+            <a:r>
+              <a:rPr sz="1100" b="0" i="0">
+                <a:solidFill>
+                  <a:srgbClr val="B8C9E8"/>
+                </a:solidFill>
+              </a:rPr>
+              <a:t>봇: check-mail-solution.sh 수정 적용</a:t>
+            </a:r>
+          </a:p>
+        </p:txBody>
+      </p:sp>
+      <p:sp>
+        <p:nvSpPr>
+          <p:cNvPr id="29" name="TextBox 28"/>
+          <p:cNvSpPr txBox="1"/>
+          <p:nvPr/>
+        </p:nvSpPr>
+        <p:spPr>
+          <a:xfrm>
+            <a:off x="6537960" y="3337560"/>
+            <a:ext cx="4937760" cy="301752"/>
+          </a:xfrm>
+          <a:prstGeom prst="rect">
+            <a:avLst/>
+          </a:prstGeom>
+          <a:noFill/>
+        </p:spPr>
+        <p:txBody>
+          <a:bodyPr wrap="square">
+            <a:spAutoFit/>
+          </a:bodyPr>
+          <a:lstStyle/>
+          <a:p>
+            <a:pPr algn="l"/>
+            <a:r>
+              <a:rPr sz="1100" b="0" i="0">
+                <a:solidFill>
+                  <a:srgbClr val="B8C9E8"/>
+                </a:solidFill>
+              </a:rPr>
+              <a:t/>
+            </a:r>
+          </a:p>
+        </p:txBody>
+      </p:sp>
+      <p:sp>
+        <p:nvSpPr>
+          <p:cNvPr id="30" name="TextBox 29"/>
+          <p:cNvSpPr txBox="1"/>
+          <p:nvPr/>
+        </p:nvSpPr>
+        <p:spPr>
+          <a:xfrm>
+            <a:off x="6537960" y="3657600"/>
+            <a:ext cx="4937760" cy="301752"/>
+          </a:xfrm>
+          <a:prstGeom prst="rect">
+            <a:avLst/>
+          </a:prstGeom>
+          <a:noFill/>
+        </p:spPr>
+        <p:txBody>
+          <a:bodyPr wrap="square">
+            <a:spAutoFit/>
+          </a:bodyPr>
+          <a:lstStyle/>
+          <a:p>
+            <a:pPr algn="l"/>
+            <a:r>
+              <a:rPr sz="1100" b="0" i="0">
+                <a:solidFill>
+                  <a:srgbClr val="00D4AA"/>
+                </a:solidFill>
+              </a:rPr>
+              <a:t>judge (Bash):</a:t>
+            </a:r>
+          </a:p>
+        </p:txBody>
+      </p:sp>
+      <p:sp>
+        <p:nvSpPr>
+          <p:cNvPr id="31" name="TextBox 30"/>
+          <p:cNvSpPr txBox="1"/>
+          <p:nvPr/>
+        </p:nvSpPr>
+        <p:spPr>
+          <a:xfrm>
+            <a:off x="6537960" y="3977639"/>
+            <a:ext cx="4937760" cy="301752"/>
+          </a:xfrm>
+          <a:prstGeom prst="rect">
+            <a:avLst/>
+          </a:prstGeom>
+          <a:noFill/>
+        </p:spPr>
+        <p:txBody>
+          <a:bodyPr wrap="square">
+            <a:spAutoFit/>
+          </a:bodyPr>
+          <a:lstStyle/>
+          <a:p>
+            <a:pPr algn="l"/>
+            <a:r>
+              <a:rPr sz="1100" b="0" i="0">
+                <a:solidFill>
+                  <a:srgbClr val="00D4AA"/>
+                </a:solidFill>
+              </a:rPr>
+              <a:t>① test.py 생성 (import sendgrid 포함)</a:t>
+            </a:r>
+          </a:p>
+        </p:txBody>
+      </p:sp>
+      <p:sp>
+        <p:nvSpPr>
+          <p:cNvPr id="32" name="TextBox 31"/>
+          <p:cNvSpPr txBox="1"/>
+          <p:nvPr/>
+        </p:nvSpPr>
+        <p:spPr>
+          <a:xfrm>
+            <a:off x="6537960" y="4297679"/>
+            <a:ext cx="4937760" cy="301752"/>
+          </a:xfrm>
+          <a:prstGeom prst="rect">
+            <a:avLst/>
+          </a:prstGeom>
+          <a:noFill/>
+        </p:spPr>
+        <p:txBody>
+          <a:bodyPr wrap="square">
+            <a:spAutoFit/>
+          </a:bodyPr>
+          <a:lstStyle/>
+          <a:p>
+            <a:pPr algn="l"/>
+            <a:r>
+              <a:rPr sz="1100" b="0" i="0">
+                <a:solidFill>
+                  <a:srgbClr val="00D4AA"/>
+                </a:solidFill>
+              </a:rPr>
+              <a:t>② bash check-mail-solution.sh 실행</a:t>
+            </a:r>
+          </a:p>
+        </p:txBody>
+      </p:sp>
+      <p:sp>
+        <p:nvSpPr>
+          <p:cNvPr id="33" name="TextBox 32"/>
+          <p:cNvSpPr txBox="1"/>
+          <p:nvPr/>
+        </p:nvSpPr>
+        <p:spPr>
+          <a:xfrm>
+            <a:off x="6537960" y="4617720"/>
+            <a:ext cx="4937760" cy="301752"/>
+          </a:xfrm>
+          <a:prstGeom prst="rect">
+            <a:avLst/>
+          </a:prstGeom>
+          <a:noFill/>
+        </p:spPr>
+        <p:txBody>
+          <a:bodyPr wrap="square">
+            <a:spAutoFit/>
+          </a:bodyPr>
+          <a:lstStyle/>
+          <a:p>
+            <a:pPr algn="l"/>
+            <a:r>
+              <a:rPr sz="1100" b="0" i="0">
+                <a:solidFill>
+                  <a:srgbClr val="00D4AA"/>
+                </a:solidFill>
+              </a:rPr>
+              <a:t>③ 실제 결과 수신:</a:t>
+            </a:r>
+          </a:p>
+        </p:txBody>
+      </p:sp>
+      <p:sp>
+        <p:nvSpPr>
+          <p:cNvPr id="34" name="TextBox 33"/>
+          <p:cNvSpPr txBox="1"/>
+          <p:nvPr/>
+        </p:nvSpPr>
+        <p:spPr>
+          <a:xfrm>
+            <a:off x="6537960" y="4937760"/>
+            <a:ext cx="4937760" cy="301752"/>
+          </a:xfrm>
+          <a:prstGeom prst="rect">
+            <a:avLst/>
+          </a:prstGeom>
+          <a:noFill/>
+        </p:spPr>
+        <p:txBody>
+          <a:bodyPr wrap="square">
+            <a:spAutoFit/>
+          </a:bodyPr>
+          <a:lstStyle/>
+          <a:p>
+            <a:pPr algn="l"/>
+            <a:r>
+              <a:rPr sz="1100" b="0" i="0">
                 <a:solidFill>
                   <a:srgbClr val="06D68A"/>
                 </a:solidFill>
               </a:rPr>
-              <a:t>CLAUDE.md에서 경로 한 줄 수정</a:t>
-            </a:r>
-          </a:p>
-        </p:txBody>
-      </p:sp>
-      <p:sp>
-        <p:nvSpPr>
-          <p:cNvPr id="21" name="Rectangle 20"/>
+              <a:t>   ❌ GATE FAIL — sendgrid 탐지됨</a:t>
+            </a:r>
+          </a:p>
+        </p:txBody>
+      </p:sp>
+      <p:sp>
+        <p:nvSpPr>
+          <p:cNvPr id="35" name="TextBox 34"/>
+          <p:cNvSpPr txBox="1"/>
+          <p:nvPr/>
+        </p:nvSpPr>
+        <p:spPr>
+          <a:xfrm>
+            <a:off x="6537960" y="5257800"/>
+            <a:ext cx="4937760" cy="301752"/>
+          </a:xfrm>
+          <a:prstGeom prst="rect">
+            <a:avLst/>
+          </a:prstGeom>
+          <a:noFill/>
+        </p:spPr>
+        <p:txBody>
+          <a:bodyPr wrap="square">
+            <a:spAutoFit/>
+          </a:bodyPr>
+          <a:lstStyle/>
+          <a:p>
+            <a:pPr algn="l"/>
+            <a:r>
+              <a:rPr sz="1100" b="0" i="0">
+                <a:solidFill>
+                  <a:srgbClr val="B8C9E8"/>
+                </a:solidFill>
+              </a:rPr>
+              <a:t/>
+            </a:r>
+          </a:p>
+        </p:txBody>
+      </p:sp>
+      <p:sp>
+        <p:nvSpPr>
+          <p:cNvPr id="36" name="TextBox 35"/>
+          <p:cNvSpPr txBox="1"/>
+          <p:nvPr/>
+        </p:nvSpPr>
+        <p:spPr>
+          <a:xfrm>
+            <a:off x="6537960" y="5577840"/>
+            <a:ext cx="4937760" cy="301752"/>
+          </a:xfrm>
+          <a:prstGeom prst="rect">
+            <a:avLst/>
+          </a:prstGeom>
+          <a:noFill/>
+        </p:spPr>
+        <p:txBody>
+          <a:bodyPr wrap="square">
+            <a:spAutoFit/>
+          </a:bodyPr>
+          <a:lstStyle/>
+          <a:p>
+            <a:pPr algn="l"/>
+            <a:r>
+              <a:rPr sz="1100" b="0" i="0">
+                <a:solidFill>
+                  <a:srgbClr val="06D68A"/>
+                </a:solidFill>
+              </a:rPr>
+              <a:t>판정봇:</a:t>
+            </a:r>
+          </a:p>
+        </p:txBody>
+      </p:sp>
+      <p:sp>
+        <p:nvSpPr>
+          <p:cNvPr id="37" name="TextBox 36"/>
+          <p:cNvSpPr txBox="1"/>
+          <p:nvPr/>
+        </p:nvSpPr>
+        <p:spPr>
+          <a:xfrm>
+            <a:off x="6537960" y="5897879"/>
+            <a:ext cx="4937760" cy="301752"/>
+          </a:xfrm>
+          <a:prstGeom prst="rect">
+            <a:avLst/>
+          </a:prstGeom>
+          <a:noFill/>
+        </p:spPr>
+        <p:txBody>
+          <a:bodyPr wrap="square">
+            <a:spAutoFit/>
+          </a:bodyPr>
+          <a:lstStyle/>
+          <a:p>
+            <a:pPr algn="l"/>
+            <a:r>
+              <a:rPr sz="1100" b="0" i="0">
+                <a:solidFill>
+                  <a:srgbClr val="06D68A"/>
+                </a:solidFill>
+              </a:rPr>
+              <a:t>"실제 실행으로 확인. PASS"</a:t>
+            </a:r>
+          </a:p>
+        </p:txBody>
+      </p:sp>
+      <p:sp>
+        <p:nvSpPr>
+          <p:cNvPr id="38" name="Rectangle 37"/>
           <p:cNvSpPr/>
           <p:nvPr/>
         </p:nvSpPr>
         <p:spPr>
           <a:xfrm>
-            <a:off x="1325880" y="5074920"/>
-            <a:ext cx="9966960" cy="594360"/>
+            <a:off x="548640" y="6309360"/>
+            <a:ext cx="11064240" cy="411480"/>
           </a:xfrm>
           <a:prstGeom prst="rect">
             <a:avLst/>
           </a:prstGeom>
           <a:solidFill>
-            <a:srgbClr val="061020"/>
+            <a:srgbClr val="061606"/>
           </a:solidFill>
           <a:ln>
             <a:noFill/>
@@ -7671,113 +8498,34 @@
       </p:sp>
       <p:sp>
         <p:nvSpPr>
-          <p:cNvPr id="22" name="TextBox 21"/>
-          <p:cNvSpPr txBox="1"/>
-          <p:nvPr/>
-        </p:nvSpPr>
-        <p:spPr>
-          <a:xfrm>
-            <a:off x="1463040" y="5138928"/>
-            <a:ext cx="9784080" cy="457200"/>
-          </a:xfrm>
-          <a:prstGeom prst="rect">
-            <a:avLst/>
-          </a:prstGeom>
-          <a:noFill/>
-        </p:spPr>
-        <p:txBody>
-          <a:bodyPr wrap="square">
-            <a:spAutoFit/>
-          </a:bodyPr>
-          <a:lstStyle/>
-          <a:p>
-            <a:pPr algn="l"/>
-            <a:r>
-              <a:rPr sz="1200" b="0" i="0">
-                <a:solidFill>
-                  <a:srgbClr val="FFD66B"/>
-                </a:solidFill>
-              </a:rPr>
-              <a:t>| BASE_HARNESS_PATH | /path/to/your/ai-harness-template |</a:t>
-            </a:r>
-          </a:p>
-        </p:txBody>
-      </p:sp>
-      <p:sp>
-        <p:nvSpPr>
-          <p:cNvPr id="23" name="Rectangle 22"/>
-          <p:cNvSpPr/>
-          <p:nvPr/>
-        </p:nvSpPr>
-        <p:spPr>
-          <a:xfrm>
-            <a:off x="548640" y="5989320"/>
-            <a:ext cx="11064240" cy="640080"/>
-          </a:xfrm>
-          <a:prstGeom prst="rect">
-            <a:avLst/>
-          </a:prstGeom>
-          <a:solidFill>
-            <a:srgbClr val="0A2212"/>
-          </a:solidFill>
-          <a:ln w="19050">
-            <a:solidFill>
-              <a:srgbClr val="06D68A"/>
-            </a:solidFill>
-          </a:ln>
-        </p:spPr>
-        <p:style>
-          <a:lnRef idx="1">
-            <a:schemeClr val="accent1"/>
-          </a:lnRef>
-          <a:fillRef idx="3">
-            <a:schemeClr val="accent1"/>
-          </a:fillRef>
-          <a:effectRef idx="2">
-            <a:schemeClr val="accent1"/>
-          </a:effectRef>
-          <a:fontRef idx="minor">
-            <a:schemeClr val="lt1"/>
-          </a:fontRef>
-        </p:style>
-        <p:txBody>
-          <a:bodyPr rtlCol="0" anchor="ctr"/>
-          <a:lstStyle/>
-          <a:p>
-            <a:pPr algn="ctr"/>
-          </a:p>
-        </p:txBody>
-      </p:sp>
-      <p:sp>
-        <p:nvSpPr>
-          <p:cNvPr id="24" name="TextBox 23"/>
-          <p:cNvSpPr txBox="1"/>
-          <p:nvPr/>
-        </p:nvSpPr>
-        <p:spPr>
-          <a:xfrm>
-            <a:off x="914400" y="6099048"/>
-            <a:ext cx="10515600" cy="411480"/>
-          </a:xfrm>
-          <a:prstGeom prst="rect">
-            <a:avLst/>
-          </a:prstGeom>
-          <a:noFill/>
-        </p:spPr>
-        <p:txBody>
-          <a:bodyPr wrap="square">
-            <a:spAutoFit/>
-          </a:bodyPr>
-          <a:lstStyle/>
-          <a:p>
-            <a:pPr algn="l"/>
-            <a:r>
-              <a:rPr sz="1600" b="1" i="0">
+          <p:cNvPr id="39" name="TextBox 38"/>
+          <p:cNvSpPr txBox="1"/>
+          <p:nvPr/>
+        </p:nvSpPr>
+        <p:spPr>
+          <a:xfrm>
+            <a:off x="914400" y="6373368"/>
+            <a:ext cx="10058400" cy="274320"/>
+          </a:xfrm>
+          <a:prstGeom prst="rect">
+            <a:avLst/>
+          </a:prstGeom>
+          <a:noFill/>
+        </p:spPr>
+        <p:txBody>
+          <a:bodyPr wrap="square">
+            <a:spAutoFit/>
+          </a:bodyPr>
+          <a:lstStyle/>
+          <a:p>
+            <a:pPr algn="l"/>
+            <a:r>
+              <a:rPr sz="1300" b="1" i="0">
                 <a:solidFill>
                   <a:srgbClr val="06D68A"/>
                 </a:solidFill>
               </a:rPr>
-              <a:t>✅  이후 Claude Code에서 프로젝트 열고  /customize  를 입력하면 끝</a:t>
+              <a:t>게이트 스크립트 수정 결과는 100% 신뢰 가능해집니다</a:t>
             </a:r>
           </a:p>
         </p:txBody>
@@ -7791,6 +8539,4870 @@
 </file>
 
 <file path=ppt/slides/slide14.xml><?xml version="1.0" encoding="utf-8"?>
+<p:sld xmlns:a="http://schemas.openxmlformats.org/drawingml/2006/main" xmlns:p="http://schemas.openxmlformats.org/presentationml/2006/main" xmlns:r="http://schemas.openxmlformats.org/officeDocument/2006/relationships">
+  <p:cSld>
+    <p:spTree>
+      <p:nvGrpSpPr>
+        <p:cNvPr id="1" name=""/>
+        <p:cNvGrpSpPr/>
+        <p:nvPr/>
+      </p:nvGrpSpPr>
+      <p:grpSpPr/>
+      <p:sp>
+        <p:nvSpPr>
+          <p:cNvPr id="2" name="Rectangle 1"/>
+          <p:cNvSpPr/>
+          <p:nvPr/>
+        </p:nvSpPr>
+        <p:spPr>
+          <a:xfrm>
+            <a:off x="0" y="0"/>
+            <a:ext cx="12188952" cy="6858000"/>
+          </a:xfrm>
+          <a:prstGeom prst="rect">
+            <a:avLst/>
+          </a:prstGeom>
+          <a:solidFill>
+            <a:srgbClr val="0F172A"/>
+          </a:solidFill>
+          <a:ln>
+            <a:noFill/>
+          </a:ln>
+        </p:spPr>
+        <p:style>
+          <a:lnRef idx="1">
+            <a:schemeClr val="accent1"/>
+          </a:lnRef>
+          <a:fillRef idx="3">
+            <a:schemeClr val="accent1"/>
+          </a:fillRef>
+          <a:effectRef idx="2">
+            <a:schemeClr val="accent1"/>
+          </a:effectRef>
+          <a:fontRef idx="minor">
+            <a:schemeClr val="lt1"/>
+          </a:fontRef>
+        </p:style>
+        <p:txBody>
+          <a:bodyPr rtlCol="0" anchor="ctr"/>
+          <a:lstStyle/>
+          <a:p>
+            <a:pPr algn="ctr"/>
+          </a:p>
+        </p:txBody>
+      </p:sp>
+      <p:sp>
+        <p:nvSpPr>
+          <p:cNvPr id="3" name="Rectangle 2"/>
+          <p:cNvSpPr/>
+          <p:nvPr/>
+        </p:nvSpPr>
+        <p:spPr>
+          <a:xfrm>
+            <a:off x="0" y="0"/>
+            <a:ext cx="54864" cy="6858000"/>
+          </a:xfrm>
+          <a:prstGeom prst="rect">
+            <a:avLst/>
+          </a:prstGeom>
+          <a:solidFill>
+            <a:srgbClr val="4A9EFF"/>
+          </a:solidFill>
+          <a:ln>
+            <a:noFill/>
+          </a:ln>
+        </p:spPr>
+        <p:style>
+          <a:lnRef idx="1">
+            <a:schemeClr val="accent1"/>
+          </a:lnRef>
+          <a:fillRef idx="3">
+            <a:schemeClr val="accent1"/>
+          </a:fillRef>
+          <a:effectRef idx="2">
+            <a:schemeClr val="accent1"/>
+          </a:effectRef>
+          <a:fontRef idx="minor">
+            <a:schemeClr val="lt1"/>
+          </a:fontRef>
+        </p:style>
+        <p:txBody>
+          <a:bodyPr rtlCol="0" anchor="ctr"/>
+          <a:lstStyle/>
+          <a:p>
+            <a:pPr algn="ctr"/>
+          </a:p>
+        </p:txBody>
+      </p:sp>
+      <p:sp>
+        <p:nvSpPr>
+          <p:cNvPr id="4" name="Rectangle 3"/>
+          <p:cNvSpPr/>
+          <p:nvPr/>
+        </p:nvSpPr>
+        <p:spPr>
+          <a:xfrm>
+            <a:off x="731520" y="182880"/>
+            <a:ext cx="1645920" cy="292608"/>
+          </a:xfrm>
+          <a:prstGeom prst="rect">
+            <a:avLst/>
+          </a:prstGeom>
+          <a:solidFill>
+            <a:srgbClr val="00D4AA"/>
+          </a:solidFill>
+          <a:ln>
+            <a:noFill/>
+          </a:ln>
+        </p:spPr>
+        <p:style>
+          <a:lnRef idx="1">
+            <a:schemeClr val="accent1"/>
+          </a:lnRef>
+          <a:fillRef idx="3">
+            <a:schemeClr val="accent1"/>
+          </a:fillRef>
+          <a:effectRef idx="2">
+            <a:schemeClr val="accent1"/>
+          </a:effectRef>
+          <a:fontRef idx="minor">
+            <a:schemeClr val="lt1"/>
+          </a:fontRef>
+        </p:style>
+        <p:txBody>
+          <a:bodyPr rtlCol="0" anchor="ctr"/>
+          <a:lstStyle/>
+          <a:p>
+            <a:pPr algn="ctr"/>
+          </a:p>
+        </p:txBody>
+      </p:sp>
+      <p:sp>
+        <p:nvSpPr>
+          <p:cNvPr id="5" name="TextBox 4"/>
+          <p:cNvSpPr txBox="1"/>
+          <p:nvPr/>
+        </p:nvSpPr>
+        <p:spPr>
+          <a:xfrm>
+            <a:off x="777240" y="210312"/>
+            <a:ext cx="1645920" cy="292608"/>
+          </a:xfrm>
+          <a:prstGeom prst="rect">
+            <a:avLst/>
+          </a:prstGeom>
+          <a:noFill/>
+        </p:spPr>
+        <p:txBody>
+          <a:bodyPr wrap="square">
+            <a:spAutoFit/>
+          </a:bodyPr>
+          <a:lstStyle/>
+          <a:p>
+            <a:pPr algn="ctr"/>
+            <a:r>
+              <a:rPr sz="1300" b="1" i="0">
+                <a:solidFill>
+                  <a:srgbClr val="FFFFFF"/>
+                </a:solidFill>
+              </a:rPr>
+              <a:t>향후 계획 — Phase 2</a:t>
+            </a:r>
+          </a:p>
+        </p:txBody>
+      </p:sp>
+      <p:sp>
+        <p:nvSpPr>
+          <p:cNvPr id="6" name="TextBox 5"/>
+          <p:cNvSpPr txBox="1"/>
+          <p:nvPr/>
+        </p:nvSpPr>
+        <p:spPr>
+          <a:xfrm>
+            <a:off x="731520" y="548640"/>
+            <a:ext cx="10058400" cy="594360"/>
+          </a:xfrm>
+          <a:prstGeom prst="rect">
+            <a:avLst/>
+          </a:prstGeom>
+          <a:noFill/>
+        </p:spPr>
+        <p:txBody>
+          <a:bodyPr wrap="square">
+            <a:spAutoFit/>
+          </a:bodyPr>
+          <a:lstStyle/>
+          <a:p>
+            <a:pPr algn="l"/>
+            <a:r>
+              <a:rPr sz="2600" b="1" i="0">
+                <a:solidFill>
+                  <a:srgbClr val="FFFFFF"/>
+                </a:solidFill>
+              </a:rPr>
+              <a:t>에이전트 실제 호출로 행동 변화 확인</a:t>
+            </a:r>
+          </a:p>
+        </p:txBody>
+      </p:sp>
+      <p:sp>
+        <p:nvSpPr>
+          <p:cNvPr id="7" name="TextBox 6"/>
+          <p:cNvSpPr txBox="1"/>
+          <p:nvPr/>
+        </p:nvSpPr>
+        <p:spPr>
+          <a:xfrm>
+            <a:off x="731520" y="1234440"/>
+            <a:ext cx="9144000" cy="365760"/>
+          </a:xfrm>
+          <a:prstGeom prst="rect">
+            <a:avLst/>
+          </a:prstGeom>
+          <a:noFill/>
+        </p:spPr>
+        <p:txBody>
+          <a:bodyPr wrap="square">
+            <a:spAutoFit/>
+          </a:bodyPr>
+          <a:lstStyle/>
+          <a:p>
+            <a:pPr algn="l"/>
+            <a:r>
+              <a:rPr sz="1400" b="0" i="0">
+                <a:solidFill>
+                  <a:srgbClr val="B8C9E8"/>
+                </a:solidFill>
+              </a:rPr>
+              <a:t>변경 내용: harness-judge.md 에 Agent 도구 추가</a:t>
+            </a:r>
+          </a:p>
+        </p:txBody>
+      </p:sp>
+      <p:sp>
+        <p:nvSpPr>
+          <p:cNvPr id="8" name="Rectangle 7"/>
+          <p:cNvSpPr/>
+          <p:nvPr/>
+        </p:nvSpPr>
+        <p:spPr>
+          <a:xfrm>
+            <a:off x="548640" y="1783080"/>
+            <a:ext cx="5349240" cy="4389120"/>
+          </a:xfrm>
+          <a:prstGeom prst="rect">
+            <a:avLst/>
+          </a:prstGeom>
+          <a:solidFill>
+            <a:srgbClr val="2A3A5A"/>
+          </a:solidFill>
+          <a:ln w="19050">
+            <a:solidFill>
+              <a:srgbClr val="FF4D6D"/>
+            </a:solidFill>
+          </a:ln>
+        </p:spPr>
+        <p:style>
+          <a:lnRef idx="1">
+            <a:schemeClr val="accent1"/>
+          </a:lnRef>
+          <a:fillRef idx="3">
+            <a:schemeClr val="accent1"/>
+          </a:fillRef>
+          <a:effectRef idx="2">
+            <a:schemeClr val="accent1"/>
+          </a:effectRef>
+          <a:fontRef idx="minor">
+            <a:schemeClr val="lt1"/>
+          </a:fontRef>
+        </p:style>
+        <p:txBody>
+          <a:bodyPr rtlCol="0" anchor="ctr"/>
+          <a:lstStyle/>
+          <a:p>
+            <a:pPr algn="ctr"/>
+          </a:p>
+        </p:txBody>
+      </p:sp>
+      <p:sp>
+        <p:nvSpPr>
+          <p:cNvPr id="9" name="Rectangle 8"/>
+          <p:cNvSpPr/>
+          <p:nvPr/>
+        </p:nvSpPr>
+        <p:spPr>
+          <a:xfrm>
+            <a:off x="548640" y="1783080"/>
+            <a:ext cx="5349240" cy="502920"/>
+          </a:xfrm>
+          <a:prstGeom prst="rect">
+            <a:avLst/>
+          </a:prstGeom>
+          <a:solidFill>
+            <a:srgbClr val="FF4D6D"/>
+          </a:solidFill>
+          <a:ln>
+            <a:noFill/>
+          </a:ln>
+        </p:spPr>
+        <p:style>
+          <a:lnRef idx="1">
+            <a:schemeClr val="accent1"/>
+          </a:lnRef>
+          <a:fillRef idx="3">
+            <a:schemeClr val="accent1"/>
+          </a:fillRef>
+          <a:effectRef idx="2">
+            <a:schemeClr val="accent1"/>
+          </a:effectRef>
+          <a:fontRef idx="minor">
+            <a:schemeClr val="lt1"/>
+          </a:fontRef>
+        </p:style>
+        <p:txBody>
+          <a:bodyPr rtlCol="0" anchor="ctr"/>
+          <a:lstStyle/>
+          <a:p>
+            <a:pPr algn="ctr"/>
+          </a:p>
+        </p:txBody>
+      </p:sp>
+      <p:sp>
+        <p:nvSpPr>
+          <p:cNvPr id="10" name="TextBox 9"/>
+          <p:cNvSpPr txBox="1"/>
+          <p:nvPr/>
+        </p:nvSpPr>
+        <p:spPr>
+          <a:xfrm>
+            <a:off x="777240" y="1847088"/>
+            <a:ext cx="4846320" cy="365760"/>
+          </a:xfrm>
+          <a:prstGeom prst="rect">
+            <a:avLst/>
+          </a:prstGeom>
+          <a:noFill/>
+        </p:spPr>
+        <p:txBody>
+          <a:bodyPr wrap="square">
+            <a:spAutoFit/>
+          </a:bodyPr>
+          <a:lstStyle/>
+          <a:p>
+            <a:pPr algn="l"/>
+            <a:r>
+              <a:rPr sz="1400" b="1" i="0">
+                <a:solidFill>
+                  <a:srgbClr val="0F172A"/>
+                </a:solidFill>
+              </a:rPr>
+              <a:t>AS-IS  (지금)</a:t>
+            </a:r>
+          </a:p>
+        </p:txBody>
+      </p:sp>
+      <p:sp>
+        <p:nvSpPr>
+          <p:cNvPr id="11" name="TextBox 10"/>
+          <p:cNvSpPr txBox="1"/>
+          <p:nvPr/>
+        </p:nvSpPr>
+        <p:spPr>
+          <a:xfrm>
+            <a:off x="777240" y="2377440"/>
+            <a:ext cx="4937760" cy="301752"/>
+          </a:xfrm>
+          <a:prstGeom prst="rect">
+            <a:avLst/>
+          </a:prstGeom>
+          <a:noFill/>
+        </p:spPr>
+        <p:txBody>
+          <a:bodyPr wrap="square">
+            <a:spAutoFit/>
+          </a:bodyPr>
+          <a:lstStyle/>
+          <a:p>
+            <a:pPr algn="l"/>
+            <a:r>
+              <a:rPr sz="1100" b="0" i="0">
+                <a:solidFill>
+                  <a:srgbClr val="FFFFFF"/>
+                </a:solidFill>
+              </a:rPr>
+              <a:t>"인터뷰어가 CA 인증서 질문 항상 하게"</a:t>
+            </a:r>
+          </a:p>
+        </p:txBody>
+      </p:sp>
+      <p:sp>
+        <p:nvSpPr>
+          <p:cNvPr id="12" name="TextBox 11"/>
+          <p:cNvSpPr txBox="1"/>
+          <p:nvPr/>
+        </p:nvSpPr>
+        <p:spPr>
+          <a:xfrm>
+            <a:off x="777240" y="2697480"/>
+            <a:ext cx="4937760" cy="301752"/>
+          </a:xfrm>
+          <a:prstGeom prst="rect">
+            <a:avLst/>
+          </a:prstGeom>
+          <a:noFill/>
+        </p:spPr>
+        <p:txBody>
+          <a:bodyPr wrap="square">
+            <a:spAutoFit/>
+          </a:bodyPr>
+          <a:lstStyle/>
+          <a:p>
+            <a:pPr algn="l"/>
+            <a:r>
+              <a:rPr sz="1100" b="0" i="0">
+                <a:solidFill>
+                  <a:srgbClr val="B8C9E8"/>
+                </a:solidFill>
+              </a:rPr>
+              <a:t/>
+            </a:r>
+          </a:p>
+        </p:txBody>
+      </p:sp>
+      <p:sp>
+        <p:nvSpPr>
+          <p:cNvPr id="13" name="TextBox 12"/>
+          <p:cNvSpPr txBox="1"/>
+          <p:nvPr/>
+        </p:nvSpPr>
+        <p:spPr>
+          <a:xfrm>
+            <a:off x="777240" y="3017520"/>
+            <a:ext cx="4937760" cy="301752"/>
+          </a:xfrm>
+          <a:prstGeom prst="rect">
+            <a:avLst/>
+          </a:prstGeom>
+          <a:noFill/>
+        </p:spPr>
+        <p:txBody>
+          <a:bodyPr wrap="square">
+            <a:spAutoFit/>
+          </a:bodyPr>
+          <a:lstStyle/>
+          <a:p>
+            <a:pPr algn="l"/>
+            <a:r>
+              <a:rPr sz="1100" b="0" i="0">
+                <a:solidFill>
+                  <a:srgbClr val="B8C9E8"/>
+                </a:solidFill>
+              </a:rPr>
+              <a:t>봇: interviewer.md 수정 제안</a:t>
+            </a:r>
+          </a:p>
+        </p:txBody>
+      </p:sp>
+      <p:sp>
+        <p:nvSpPr>
+          <p:cNvPr id="14" name="TextBox 13"/>
+          <p:cNvSpPr txBox="1"/>
+          <p:nvPr/>
+        </p:nvSpPr>
+        <p:spPr>
+          <a:xfrm>
+            <a:off x="777240" y="3337560"/>
+            <a:ext cx="4937760" cy="301752"/>
+          </a:xfrm>
+          <a:prstGeom prst="rect">
+            <a:avLst/>
+          </a:prstGeom>
+          <a:noFill/>
+        </p:spPr>
+        <p:txBody>
+          <a:bodyPr wrap="square">
+            <a:spAutoFit/>
+          </a:bodyPr>
+          <a:lstStyle/>
+          <a:p>
+            <a:pPr algn="l"/>
+            <a:r>
+              <a:rPr sz="1100" b="0" i="0">
+                <a:solidFill>
+                  <a:srgbClr val="B8C9E8"/>
+                </a:solidFill>
+              </a:rPr>
+              <a:t/>
+            </a:r>
+          </a:p>
+        </p:txBody>
+      </p:sp>
+      <p:sp>
+        <p:nvSpPr>
+          <p:cNvPr id="15" name="TextBox 14"/>
+          <p:cNvSpPr txBox="1"/>
+          <p:nvPr/>
+        </p:nvSpPr>
+        <p:spPr>
+          <a:xfrm>
+            <a:off x="777240" y="3657600"/>
+            <a:ext cx="4937760" cy="301752"/>
+          </a:xfrm>
+          <a:prstGeom prst="rect">
+            <a:avLst/>
+          </a:prstGeom>
+          <a:noFill/>
+        </p:spPr>
+        <p:txBody>
+          <a:bodyPr wrap="square">
+            <a:spAutoFit/>
+          </a:bodyPr>
+          <a:lstStyle/>
+          <a:p>
+            <a:pPr algn="l"/>
+            <a:r>
+              <a:rPr sz="1100" b="0" i="0">
+                <a:solidFill>
+                  <a:srgbClr val="FF8C42"/>
+                </a:solidFill>
+              </a:rPr>
+              <a:t>시뮬레이터:</a:t>
+            </a:r>
+          </a:p>
+        </p:txBody>
+      </p:sp>
+      <p:sp>
+        <p:nvSpPr>
+          <p:cNvPr id="16" name="TextBox 15"/>
+          <p:cNvSpPr txBox="1"/>
+          <p:nvPr/>
+        </p:nvSpPr>
+        <p:spPr>
+          <a:xfrm>
+            <a:off x="777240" y="3977639"/>
+            <a:ext cx="4937760" cy="301752"/>
+          </a:xfrm>
+          <a:prstGeom prst="rect">
+            <a:avLst/>
+          </a:prstGeom>
+          <a:noFill/>
+        </p:spPr>
+        <p:txBody>
+          <a:bodyPr wrap="square">
+            <a:spAutoFit/>
+          </a:bodyPr>
+          <a:lstStyle/>
+          <a:p>
+            <a:pPr algn="l"/>
+            <a:r>
+              <a:rPr sz="1100" b="0" i="0">
+                <a:solidFill>
+                  <a:srgbClr val="FF8C42"/>
+                </a:solidFill>
+              </a:rPr>
+              <a:t>"아마 이렇게 물어볼 거예요:"</a:t>
+            </a:r>
+          </a:p>
+        </p:txBody>
+      </p:sp>
+      <p:sp>
+        <p:nvSpPr>
+          <p:cNvPr id="17" name="TextBox 16"/>
+          <p:cNvSpPr txBox="1"/>
+          <p:nvPr/>
+        </p:nvSpPr>
+        <p:spPr>
+          <a:xfrm>
+            <a:off x="777240" y="4297679"/>
+            <a:ext cx="4937760" cy="301752"/>
+          </a:xfrm>
+          <a:prstGeom prst="rect">
+            <a:avLst/>
+          </a:prstGeom>
+          <a:noFill/>
+        </p:spPr>
+        <p:txBody>
+          <a:bodyPr wrap="square">
+            <a:spAutoFit/>
+          </a:bodyPr>
+          <a:lstStyle/>
+          <a:p>
+            <a:pPr algn="l"/>
+            <a:r>
+              <a:rPr sz="1100" b="0" i="0">
+                <a:solidFill>
+                  <a:srgbClr val="FF8C42"/>
+                </a:solidFill>
+              </a:rPr>
+              <a:t>"사설 CA 쓰시나요? (예상)"</a:t>
+            </a:r>
+          </a:p>
+        </p:txBody>
+      </p:sp>
+      <p:sp>
+        <p:nvSpPr>
+          <p:cNvPr id="18" name="TextBox 17"/>
+          <p:cNvSpPr txBox="1"/>
+          <p:nvPr/>
+        </p:nvSpPr>
+        <p:spPr>
+          <a:xfrm>
+            <a:off x="777240" y="4617720"/>
+            <a:ext cx="4937760" cy="301752"/>
+          </a:xfrm>
+          <a:prstGeom prst="rect">
+            <a:avLst/>
+          </a:prstGeom>
+          <a:noFill/>
+        </p:spPr>
+        <p:txBody>
+          <a:bodyPr wrap="square">
+            <a:spAutoFit/>
+          </a:bodyPr>
+          <a:lstStyle/>
+          <a:p>
+            <a:pPr algn="l"/>
+            <a:r>
+              <a:rPr sz="1100" b="0" i="0">
+                <a:solidFill>
+                  <a:srgbClr val="B8C9E8"/>
+                </a:solidFill>
+              </a:rPr>
+              <a:t/>
+            </a:r>
+          </a:p>
+        </p:txBody>
+      </p:sp>
+      <p:sp>
+        <p:nvSpPr>
+          <p:cNvPr id="19" name="TextBox 18"/>
+          <p:cNvSpPr txBox="1"/>
+          <p:nvPr/>
+        </p:nvSpPr>
+        <p:spPr>
+          <a:xfrm>
+            <a:off x="777240" y="4937760"/>
+            <a:ext cx="4937760" cy="301752"/>
+          </a:xfrm>
+          <a:prstGeom prst="rect">
+            <a:avLst/>
+          </a:prstGeom>
+          <a:noFill/>
+        </p:spPr>
+        <p:txBody>
+          <a:bodyPr wrap="square">
+            <a:spAutoFit/>
+          </a:bodyPr>
+          <a:lstStyle/>
+          <a:p>
+            <a:pPr algn="l"/>
+            <a:r>
+              <a:rPr sz="1100" b="0" i="0">
+                <a:solidFill>
+                  <a:srgbClr val="FF4D6D"/>
+                </a:solidFill>
+              </a:rPr>
+              <a:t>판정봇:</a:t>
+            </a:r>
+          </a:p>
+        </p:txBody>
+      </p:sp>
+      <p:sp>
+        <p:nvSpPr>
+          <p:cNvPr id="20" name="TextBox 19"/>
+          <p:cNvSpPr txBox="1"/>
+          <p:nvPr/>
+        </p:nvSpPr>
+        <p:spPr>
+          <a:xfrm>
+            <a:off x="777240" y="5257800"/>
+            <a:ext cx="4937760" cy="301752"/>
+          </a:xfrm>
+          <a:prstGeom prst="rect">
+            <a:avLst/>
+          </a:prstGeom>
+          <a:noFill/>
+        </p:spPr>
+        <p:txBody>
+          <a:bodyPr wrap="square">
+            <a:spAutoFit/>
+          </a:bodyPr>
+          <a:lstStyle/>
+          <a:p>
+            <a:pPr algn="l"/>
+            <a:r>
+              <a:rPr sz="1100" b="0" i="0">
+                <a:solidFill>
+                  <a:srgbClr val="FF4D6D"/>
+                </a:solidFill>
+              </a:rPr>
+              <a:t>"그럴듯한 질문이 나왔으니 PASS"</a:t>
+            </a:r>
+          </a:p>
+        </p:txBody>
+      </p:sp>
+      <p:sp>
+        <p:nvSpPr>
+          <p:cNvPr id="21" name="TextBox 20"/>
+          <p:cNvSpPr txBox="1"/>
+          <p:nvPr/>
+        </p:nvSpPr>
+        <p:spPr>
+          <a:xfrm>
+            <a:off x="777240" y="5577840"/>
+            <a:ext cx="4937760" cy="301752"/>
+          </a:xfrm>
+          <a:prstGeom prst="rect">
+            <a:avLst/>
+          </a:prstGeom>
+          <a:noFill/>
+        </p:spPr>
+        <p:txBody>
+          <a:bodyPr wrap="square">
+            <a:spAutoFit/>
+          </a:bodyPr>
+          <a:lstStyle/>
+          <a:p>
+            <a:pPr algn="l"/>
+            <a:r>
+              <a:rPr sz="1100" b="0" i="0">
+                <a:solidFill>
+                  <a:srgbClr val="B8C9E8"/>
+                </a:solidFill>
+              </a:rPr>
+              <a:t/>
+            </a:r>
+          </a:p>
+        </p:txBody>
+      </p:sp>
+      <p:sp>
+        <p:nvSpPr>
+          <p:cNvPr id="22" name="TextBox 21"/>
+          <p:cNvSpPr txBox="1"/>
+          <p:nvPr/>
+        </p:nvSpPr>
+        <p:spPr>
+          <a:xfrm>
+            <a:off x="777240" y="5897879"/>
+            <a:ext cx="4937760" cy="301752"/>
+          </a:xfrm>
+          <a:prstGeom prst="rect">
+            <a:avLst/>
+          </a:prstGeom>
+          <a:noFill/>
+        </p:spPr>
+        <p:txBody>
+          <a:bodyPr wrap="square">
+            <a:spAutoFit/>
+          </a:bodyPr>
+          <a:lstStyle/>
+          <a:p>
+            <a:pPr algn="l"/>
+            <a:r>
+              <a:rPr sz="1100" b="0" i="0">
+                <a:solidFill>
+                  <a:srgbClr val="FF4D6D"/>
+                </a:solidFill>
+              </a:rPr>
+              <a:t>⚠️  실제 에이전트를 돌린 게 아님</a:t>
+            </a:r>
+          </a:p>
+        </p:txBody>
+      </p:sp>
+      <p:sp>
+        <p:nvSpPr>
+          <p:cNvPr id="23" name="TextBox 22"/>
+          <p:cNvSpPr txBox="1"/>
+          <p:nvPr/>
+        </p:nvSpPr>
+        <p:spPr>
+          <a:xfrm>
+            <a:off x="777240" y="6217919"/>
+            <a:ext cx="4937760" cy="301752"/>
+          </a:xfrm>
+          <a:prstGeom prst="rect">
+            <a:avLst/>
+          </a:prstGeom>
+          <a:noFill/>
+        </p:spPr>
+        <p:txBody>
+          <a:bodyPr wrap="square">
+            <a:spAutoFit/>
+          </a:bodyPr>
+          <a:lstStyle/>
+          <a:p>
+            <a:pPr algn="l"/>
+            <a:r>
+              <a:rPr sz="1100" b="0" i="0">
+                <a:solidFill>
+                  <a:srgbClr val="FF4D6D"/>
+                </a:solidFill>
+              </a:rPr>
+              <a:t>⚠️  LLM이 LLM을 평가한 것</a:t>
+            </a:r>
+          </a:p>
+        </p:txBody>
+      </p:sp>
+      <p:sp>
+        <p:nvSpPr>
+          <p:cNvPr id="24" name="Rectangle 23"/>
+          <p:cNvSpPr/>
+          <p:nvPr/>
+        </p:nvSpPr>
+        <p:spPr>
+          <a:xfrm>
+            <a:off x="6309360" y="1783080"/>
+            <a:ext cx="5349240" cy="4389120"/>
+          </a:xfrm>
+          <a:prstGeom prst="rect">
+            <a:avLst/>
+          </a:prstGeom>
+          <a:solidFill>
+            <a:srgbClr val="2A3A5A"/>
+          </a:solidFill>
+          <a:ln w="19050">
+            <a:solidFill>
+              <a:srgbClr val="06D68A"/>
+            </a:solidFill>
+          </a:ln>
+        </p:spPr>
+        <p:style>
+          <a:lnRef idx="1">
+            <a:schemeClr val="accent1"/>
+          </a:lnRef>
+          <a:fillRef idx="3">
+            <a:schemeClr val="accent1"/>
+          </a:fillRef>
+          <a:effectRef idx="2">
+            <a:schemeClr val="accent1"/>
+          </a:effectRef>
+          <a:fontRef idx="minor">
+            <a:schemeClr val="lt1"/>
+          </a:fontRef>
+        </p:style>
+        <p:txBody>
+          <a:bodyPr rtlCol="0" anchor="ctr"/>
+          <a:lstStyle/>
+          <a:p>
+            <a:pPr algn="ctr"/>
+          </a:p>
+        </p:txBody>
+      </p:sp>
+      <p:sp>
+        <p:nvSpPr>
+          <p:cNvPr id="25" name="Rectangle 24"/>
+          <p:cNvSpPr/>
+          <p:nvPr/>
+        </p:nvSpPr>
+        <p:spPr>
+          <a:xfrm>
+            <a:off x="6309360" y="1783080"/>
+            <a:ext cx="5349240" cy="502920"/>
+          </a:xfrm>
+          <a:prstGeom prst="rect">
+            <a:avLst/>
+          </a:prstGeom>
+          <a:solidFill>
+            <a:srgbClr val="06D68A"/>
+          </a:solidFill>
+          <a:ln>
+            <a:noFill/>
+          </a:ln>
+        </p:spPr>
+        <p:style>
+          <a:lnRef idx="1">
+            <a:schemeClr val="accent1"/>
+          </a:lnRef>
+          <a:fillRef idx="3">
+            <a:schemeClr val="accent1"/>
+          </a:fillRef>
+          <a:effectRef idx="2">
+            <a:schemeClr val="accent1"/>
+          </a:effectRef>
+          <a:fontRef idx="minor">
+            <a:schemeClr val="lt1"/>
+          </a:fontRef>
+        </p:style>
+        <p:txBody>
+          <a:bodyPr rtlCol="0" anchor="ctr"/>
+          <a:lstStyle/>
+          <a:p>
+            <a:pPr algn="ctr"/>
+          </a:p>
+        </p:txBody>
+      </p:sp>
+      <p:sp>
+        <p:nvSpPr>
+          <p:cNvPr id="26" name="TextBox 25"/>
+          <p:cNvSpPr txBox="1"/>
+          <p:nvPr/>
+        </p:nvSpPr>
+        <p:spPr>
+          <a:xfrm>
+            <a:off x="6537960" y="1847088"/>
+            <a:ext cx="4846320" cy="365760"/>
+          </a:xfrm>
+          <a:prstGeom prst="rect">
+            <a:avLst/>
+          </a:prstGeom>
+          <a:noFill/>
+        </p:spPr>
+        <p:txBody>
+          <a:bodyPr wrap="square">
+            <a:spAutoFit/>
+          </a:bodyPr>
+          <a:lstStyle/>
+          <a:p>
+            <a:pPr algn="l"/>
+            <a:r>
+              <a:rPr sz="1400" b="1" i="0">
+                <a:solidFill>
+                  <a:srgbClr val="0F172A"/>
+                </a:solidFill>
+              </a:rPr>
+              <a:t>TO-BE  (Phase 2)</a:t>
+            </a:r>
+          </a:p>
+        </p:txBody>
+      </p:sp>
+      <p:sp>
+        <p:nvSpPr>
+          <p:cNvPr id="27" name="TextBox 26"/>
+          <p:cNvSpPr txBox="1"/>
+          <p:nvPr/>
+        </p:nvSpPr>
+        <p:spPr>
+          <a:xfrm>
+            <a:off x="6537960" y="2377440"/>
+            <a:ext cx="4937760" cy="301752"/>
+          </a:xfrm>
+          <a:prstGeom prst="rect">
+            <a:avLst/>
+          </a:prstGeom>
+          <a:noFill/>
+        </p:spPr>
+        <p:txBody>
+          <a:bodyPr wrap="square">
+            <a:spAutoFit/>
+          </a:bodyPr>
+          <a:lstStyle/>
+          <a:p>
+            <a:pPr algn="l"/>
+            <a:r>
+              <a:rPr sz="1100" b="0" i="0">
+                <a:solidFill>
+                  <a:srgbClr val="FFFFFF"/>
+                </a:solidFill>
+              </a:rPr>
+              <a:t>"인터뷰어가 CA 인증서 질문 항상 하게"</a:t>
+            </a:r>
+          </a:p>
+        </p:txBody>
+      </p:sp>
+      <p:sp>
+        <p:nvSpPr>
+          <p:cNvPr id="28" name="TextBox 27"/>
+          <p:cNvSpPr txBox="1"/>
+          <p:nvPr/>
+        </p:nvSpPr>
+        <p:spPr>
+          <a:xfrm>
+            <a:off x="6537960" y="2697480"/>
+            <a:ext cx="4937760" cy="301752"/>
+          </a:xfrm>
+          <a:prstGeom prst="rect">
+            <a:avLst/>
+          </a:prstGeom>
+          <a:noFill/>
+        </p:spPr>
+        <p:txBody>
+          <a:bodyPr wrap="square">
+            <a:spAutoFit/>
+          </a:bodyPr>
+          <a:lstStyle/>
+          <a:p>
+            <a:pPr algn="l"/>
+            <a:r>
+              <a:rPr sz="1100" b="0" i="0">
+                <a:solidFill>
+                  <a:srgbClr val="B8C9E8"/>
+                </a:solidFill>
+              </a:rPr>
+              <a:t/>
+            </a:r>
+          </a:p>
+        </p:txBody>
+      </p:sp>
+      <p:sp>
+        <p:nvSpPr>
+          <p:cNvPr id="29" name="TextBox 28"/>
+          <p:cNvSpPr txBox="1"/>
+          <p:nvPr/>
+        </p:nvSpPr>
+        <p:spPr>
+          <a:xfrm>
+            <a:off x="6537960" y="3017520"/>
+            <a:ext cx="4937760" cy="301752"/>
+          </a:xfrm>
+          <a:prstGeom prst="rect">
+            <a:avLst/>
+          </a:prstGeom>
+          <a:noFill/>
+        </p:spPr>
+        <p:txBody>
+          <a:bodyPr wrap="square">
+            <a:spAutoFit/>
+          </a:bodyPr>
+          <a:lstStyle/>
+          <a:p>
+            <a:pPr algn="l"/>
+            <a:r>
+              <a:rPr sz="1100" b="0" i="0">
+                <a:solidFill>
+                  <a:srgbClr val="B8C9E8"/>
+                </a:solidFill>
+              </a:rPr>
+              <a:t>봇: interviewer.md 수정 적용</a:t>
+            </a:r>
+          </a:p>
+        </p:txBody>
+      </p:sp>
+      <p:sp>
+        <p:nvSpPr>
+          <p:cNvPr id="30" name="TextBox 29"/>
+          <p:cNvSpPr txBox="1"/>
+          <p:nvPr/>
+        </p:nvSpPr>
+        <p:spPr>
+          <a:xfrm>
+            <a:off x="6537960" y="3337560"/>
+            <a:ext cx="4937760" cy="301752"/>
+          </a:xfrm>
+          <a:prstGeom prst="rect">
+            <a:avLst/>
+          </a:prstGeom>
+          <a:noFill/>
+        </p:spPr>
+        <p:txBody>
+          <a:bodyPr wrap="square">
+            <a:spAutoFit/>
+          </a:bodyPr>
+          <a:lstStyle/>
+          <a:p>
+            <a:pPr algn="l"/>
+            <a:r>
+              <a:rPr sz="1100" b="0" i="0">
+                <a:solidFill>
+                  <a:srgbClr val="B8C9E8"/>
+                </a:solidFill>
+              </a:rPr>
+              <a:t/>
+            </a:r>
+          </a:p>
+        </p:txBody>
+      </p:sp>
+      <p:sp>
+        <p:nvSpPr>
+          <p:cNvPr id="31" name="TextBox 30"/>
+          <p:cNvSpPr txBox="1"/>
+          <p:nvPr/>
+        </p:nvSpPr>
+        <p:spPr>
+          <a:xfrm>
+            <a:off x="6537960" y="3657600"/>
+            <a:ext cx="4937760" cy="301752"/>
+          </a:xfrm>
+          <a:prstGeom prst="rect">
+            <a:avLst/>
+          </a:prstGeom>
+          <a:noFill/>
+        </p:spPr>
+        <p:txBody>
+          <a:bodyPr wrap="square">
+            <a:spAutoFit/>
+          </a:bodyPr>
+          <a:lstStyle/>
+          <a:p>
+            <a:pPr algn="l"/>
+            <a:r>
+              <a:rPr sz="1100" b="0" i="0">
+                <a:solidFill>
+                  <a:srgbClr val="00D4AA"/>
+                </a:solidFill>
+              </a:rPr>
+              <a:t>judge (Agent 도구):</a:t>
+            </a:r>
+          </a:p>
+        </p:txBody>
+      </p:sp>
+      <p:sp>
+        <p:nvSpPr>
+          <p:cNvPr id="32" name="TextBox 31"/>
+          <p:cNvSpPr txBox="1"/>
+          <p:nvPr/>
+        </p:nvSpPr>
+        <p:spPr>
+          <a:xfrm>
+            <a:off x="6537960" y="3977639"/>
+            <a:ext cx="4937760" cy="301752"/>
+          </a:xfrm>
+          <a:prstGeom prst="rect">
+            <a:avLst/>
+          </a:prstGeom>
+          <a:noFill/>
+        </p:spPr>
+        <p:txBody>
+          <a:bodyPr wrap="square">
+            <a:spAutoFit/>
+          </a:bodyPr>
+          <a:lstStyle/>
+          <a:p>
+            <a:pPr algn="l"/>
+            <a:r>
+              <a:rPr sz="1100" b="0" i="0">
+                <a:solidFill>
+                  <a:srgbClr val="00D4AA"/>
+                </a:solidFill>
+              </a:rPr>
+              <a:t>① 수정된 내용을 컨텍스트로 주입</a:t>
+            </a:r>
+          </a:p>
+        </p:txBody>
+      </p:sp>
+      <p:sp>
+        <p:nvSpPr>
+          <p:cNvPr id="33" name="TextBox 32"/>
+          <p:cNvSpPr txBox="1"/>
+          <p:nvPr/>
+        </p:nvSpPr>
+        <p:spPr>
+          <a:xfrm>
+            <a:off x="6537960" y="4297679"/>
+            <a:ext cx="4937760" cy="301752"/>
+          </a:xfrm>
+          <a:prstGeom prst="rect">
+            <a:avLst/>
+          </a:prstGeom>
+          <a:noFill/>
+        </p:spPr>
+        <p:txBody>
+          <a:bodyPr wrap="square">
+            <a:spAutoFit/>
+          </a:bodyPr>
+          <a:lstStyle/>
+          <a:p>
+            <a:pPr algn="l"/>
+            <a:r>
+              <a:rPr sz="1100" b="0" i="0">
+                <a:solidFill>
+                  <a:srgbClr val="00D4AA"/>
+                </a:solidFill>
+              </a:rPr>
+              <a:t>② 실제 인터뷰어 에이전트 호출</a:t>
+            </a:r>
+          </a:p>
+        </p:txBody>
+      </p:sp>
+      <p:sp>
+        <p:nvSpPr>
+          <p:cNvPr id="34" name="TextBox 33"/>
+          <p:cNvSpPr txBox="1"/>
+          <p:nvPr/>
+        </p:nvSpPr>
+        <p:spPr>
+          <a:xfrm>
+            <a:off x="6537960" y="4617720"/>
+            <a:ext cx="4937760" cy="301752"/>
+          </a:xfrm>
+          <a:prstGeom prst="rect">
+            <a:avLst/>
+          </a:prstGeom>
+          <a:noFill/>
+        </p:spPr>
+        <p:txBody>
+          <a:bodyPr wrap="square">
+            <a:spAutoFit/>
+          </a:bodyPr>
+          <a:lstStyle/>
+          <a:p>
+            <a:pPr algn="l"/>
+            <a:r>
+              <a:rPr sz="1100" b="0" i="0">
+                <a:solidFill>
+                  <a:srgbClr val="00D4AA"/>
+                </a:solidFill>
+              </a:rPr>
+              <a:t>③ 테스트 시나리오로 대화 실행</a:t>
+            </a:r>
+          </a:p>
+        </p:txBody>
+      </p:sp>
+      <p:sp>
+        <p:nvSpPr>
+          <p:cNvPr id="35" name="TextBox 34"/>
+          <p:cNvSpPr txBox="1"/>
+          <p:nvPr/>
+        </p:nvSpPr>
+        <p:spPr>
+          <a:xfrm>
+            <a:off x="6537960" y="4937760"/>
+            <a:ext cx="4937760" cy="301752"/>
+          </a:xfrm>
+          <a:prstGeom prst="rect">
+            <a:avLst/>
+          </a:prstGeom>
+          <a:noFill/>
+        </p:spPr>
+        <p:txBody>
+          <a:bodyPr wrap="square">
+            <a:spAutoFit/>
+          </a:bodyPr>
+          <a:lstStyle/>
+          <a:p>
+            <a:pPr algn="l"/>
+            <a:r>
+              <a:rPr sz="1100" b="0" i="0">
+                <a:solidFill>
+                  <a:srgbClr val="00D4AA"/>
+                </a:solidFill>
+              </a:rPr>
+              <a:t>④ 응답에 CA 질문 등장 여부 확인</a:t>
+            </a:r>
+          </a:p>
+        </p:txBody>
+      </p:sp>
+      <p:sp>
+        <p:nvSpPr>
+          <p:cNvPr id="36" name="TextBox 35"/>
+          <p:cNvSpPr txBox="1"/>
+          <p:nvPr/>
+        </p:nvSpPr>
+        <p:spPr>
+          <a:xfrm>
+            <a:off x="6537960" y="5257800"/>
+            <a:ext cx="4937760" cy="301752"/>
+          </a:xfrm>
+          <a:prstGeom prst="rect">
+            <a:avLst/>
+          </a:prstGeom>
+          <a:noFill/>
+        </p:spPr>
+        <p:txBody>
+          <a:bodyPr wrap="square">
+            <a:spAutoFit/>
+          </a:bodyPr>
+          <a:lstStyle/>
+          <a:p>
+            <a:pPr algn="l"/>
+            <a:r>
+              <a:rPr sz="1100" b="0" i="0">
+                <a:solidFill>
+                  <a:srgbClr val="06D68A"/>
+                </a:solidFill>
+              </a:rPr>
+              <a:t>   ✅ "사설 CA 쓰시나요?" 실제 응답 확인</a:t>
+            </a:r>
+          </a:p>
+        </p:txBody>
+      </p:sp>
+      <p:sp>
+        <p:nvSpPr>
+          <p:cNvPr id="37" name="TextBox 36"/>
+          <p:cNvSpPr txBox="1"/>
+          <p:nvPr/>
+        </p:nvSpPr>
+        <p:spPr>
+          <a:xfrm>
+            <a:off x="6537960" y="5577840"/>
+            <a:ext cx="4937760" cy="301752"/>
+          </a:xfrm>
+          <a:prstGeom prst="rect">
+            <a:avLst/>
+          </a:prstGeom>
+          <a:noFill/>
+        </p:spPr>
+        <p:txBody>
+          <a:bodyPr wrap="square">
+            <a:spAutoFit/>
+          </a:bodyPr>
+          <a:lstStyle/>
+          <a:p>
+            <a:pPr algn="l"/>
+            <a:r>
+              <a:rPr sz="1100" b="0" i="0">
+                <a:solidFill>
+                  <a:srgbClr val="B8C9E8"/>
+                </a:solidFill>
+              </a:rPr>
+              <a:t/>
+            </a:r>
+          </a:p>
+        </p:txBody>
+      </p:sp>
+      <p:sp>
+        <p:nvSpPr>
+          <p:cNvPr id="38" name="TextBox 37"/>
+          <p:cNvSpPr txBox="1"/>
+          <p:nvPr/>
+        </p:nvSpPr>
+        <p:spPr>
+          <a:xfrm>
+            <a:off x="6537960" y="5897879"/>
+            <a:ext cx="4937760" cy="301752"/>
+          </a:xfrm>
+          <a:prstGeom prst="rect">
+            <a:avLst/>
+          </a:prstGeom>
+          <a:noFill/>
+        </p:spPr>
+        <p:txBody>
+          <a:bodyPr wrap="square">
+            <a:spAutoFit/>
+          </a:bodyPr>
+          <a:lstStyle/>
+          <a:p>
+            <a:pPr algn="l"/>
+            <a:r>
+              <a:rPr sz="1100" b="0" i="0">
+                <a:solidFill>
+                  <a:srgbClr val="06D68A"/>
+                </a:solidFill>
+              </a:rPr>
+              <a:t>판정봇:</a:t>
+            </a:r>
+          </a:p>
+        </p:txBody>
+      </p:sp>
+      <p:sp>
+        <p:nvSpPr>
+          <p:cNvPr id="39" name="TextBox 38"/>
+          <p:cNvSpPr txBox="1"/>
+          <p:nvPr/>
+        </p:nvSpPr>
+        <p:spPr>
+          <a:xfrm>
+            <a:off x="6537960" y="6217919"/>
+            <a:ext cx="4937760" cy="301752"/>
+          </a:xfrm>
+          <a:prstGeom prst="rect">
+            <a:avLst/>
+          </a:prstGeom>
+          <a:noFill/>
+        </p:spPr>
+        <p:txBody>
+          <a:bodyPr wrap="square">
+            <a:spAutoFit/>
+          </a:bodyPr>
+          <a:lstStyle/>
+          <a:p>
+            <a:pPr algn="l"/>
+            <a:r>
+              <a:rPr sz="1100" b="0" i="0">
+                <a:solidFill>
+                  <a:srgbClr val="06D68A"/>
+                </a:solidFill>
+              </a:rPr>
+              <a:t>"실제 호출 결과로 확인. PASS"</a:t>
+            </a:r>
+          </a:p>
+        </p:txBody>
+      </p:sp>
+      <p:sp>
+        <p:nvSpPr>
+          <p:cNvPr id="40" name="Rectangle 39"/>
+          <p:cNvSpPr/>
+          <p:nvPr/>
+        </p:nvSpPr>
+        <p:spPr>
+          <a:xfrm>
+            <a:off x="548640" y="6309360"/>
+            <a:ext cx="11064240" cy="411480"/>
+          </a:xfrm>
+          <a:prstGeom prst="rect">
+            <a:avLst/>
+          </a:prstGeom>
+          <a:solidFill>
+            <a:srgbClr val="061606"/>
+          </a:solidFill>
+          <a:ln>
+            <a:noFill/>
+          </a:ln>
+        </p:spPr>
+        <p:style>
+          <a:lnRef idx="1">
+            <a:schemeClr val="accent1"/>
+          </a:lnRef>
+          <a:fillRef idx="3">
+            <a:schemeClr val="accent1"/>
+          </a:fillRef>
+          <a:effectRef idx="2">
+            <a:schemeClr val="accent1"/>
+          </a:effectRef>
+          <a:fontRef idx="minor">
+            <a:schemeClr val="lt1"/>
+          </a:fontRef>
+        </p:style>
+        <p:txBody>
+          <a:bodyPr rtlCol="0" anchor="ctr"/>
+          <a:lstStyle/>
+          <a:p>
+            <a:pPr algn="ctr"/>
+          </a:p>
+        </p:txBody>
+      </p:sp>
+      <p:sp>
+        <p:nvSpPr>
+          <p:cNvPr id="41" name="TextBox 40"/>
+          <p:cNvSpPr txBox="1"/>
+          <p:nvPr/>
+        </p:nvSpPr>
+        <p:spPr>
+          <a:xfrm>
+            <a:off x="914400" y="6373368"/>
+            <a:ext cx="10058400" cy="274320"/>
+          </a:xfrm>
+          <a:prstGeom prst="rect">
+            <a:avLst/>
+          </a:prstGeom>
+          <a:noFill/>
+        </p:spPr>
+        <p:txBody>
+          <a:bodyPr wrap="square">
+            <a:spAutoFit/>
+          </a:bodyPr>
+          <a:lstStyle/>
+          <a:p>
+            <a:pPr algn="l"/>
+            <a:r>
+              <a:rPr sz="1300" b="1" i="0">
+                <a:solidFill>
+                  <a:srgbClr val="06D68A"/>
+                </a:solidFill>
+              </a:rPr>
+              <a:t>에이전트 행동 변화도 실제 실행 결과로 확인 가능해집니다</a:t>
+            </a:r>
+          </a:p>
+        </p:txBody>
+      </p:sp>
+    </p:spTree>
+  </p:cSld>
+  <p:clrMapOvr>
+    <a:masterClrMapping/>
+  </p:clrMapOvr>
+</p:sld>
+</file>
+
+<file path=ppt/slides/slide15.xml><?xml version="1.0" encoding="utf-8"?>
+<p:sld xmlns:a="http://schemas.openxmlformats.org/drawingml/2006/main" xmlns:p="http://schemas.openxmlformats.org/presentationml/2006/main" xmlns:r="http://schemas.openxmlformats.org/officeDocument/2006/relationships">
+  <p:cSld>
+    <p:spTree>
+      <p:nvGrpSpPr>
+        <p:cNvPr id="1" name=""/>
+        <p:cNvGrpSpPr/>
+        <p:nvPr/>
+      </p:nvGrpSpPr>
+      <p:grpSpPr/>
+      <p:sp>
+        <p:nvSpPr>
+          <p:cNvPr id="2" name="Rectangle 1"/>
+          <p:cNvSpPr/>
+          <p:nvPr/>
+        </p:nvSpPr>
+        <p:spPr>
+          <a:xfrm>
+            <a:off x="0" y="0"/>
+            <a:ext cx="12188952" cy="6858000"/>
+          </a:xfrm>
+          <a:prstGeom prst="rect">
+            <a:avLst/>
+          </a:prstGeom>
+          <a:solidFill>
+            <a:srgbClr val="0F172A"/>
+          </a:solidFill>
+          <a:ln>
+            <a:noFill/>
+          </a:ln>
+        </p:spPr>
+        <p:style>
+          <a:lnRef idx="1">
+            <a:schemeClr val="accent1"/>
+          </a:lnRef>
+          <a:fillRef idx="3">
+            <a:schemeClr val="accent1"/>
+          </a:fillRef>
+          <a:effectRef idx="2">
+            <a:schemeClr val="accent1"/>
+          </a:effectRef>
+          <a:fontRef idx="minor">
+            <a:schemeClr val="lt1"/>
+          </a:fontRef>
+        </p:style>
+        <p:txBody>
+          <a:bodyPr rtlCol="0" anchor="ctr"/>
+          <a:lstStyle/>
+          <a:p>
+            <a:pPr algn="ctr"/>
+          </a:p>
+        </p:txBody>
+      </p:sp>
+      <p:sp>
+        <p:nvSpPr>
+          <p:cNvPr id="3" name="Rectangle 2"/>
+          <p:cNvSpPr/>
+          <p:nvPr/>
+        </p:nvSpPr>
+        <p:spPr>
+          <a:xfrm>
+            <a:off x="0" y="0"/>
+            <a:ext cx="54864" cy="6858000"/>
+          </a:xfrm>
+          <a:prstGeom prst="rect">
+            <a:avLst/>
+          </a:prstGeom>
+          <a:solidFill>
+            <a:srgbClr val="4A9EFF"/>
+          </a:solidFill>
+          <a:ln>
+            <a:noFill/>
+          </a:ln>
+        </p:spPr>
+        <p:style>
+          <a:lnRef idx="1">
+            <a:schemeClr val="accent1"/>
+          </a:lnRef>
+          <a:fillRef idx="3">
+            <a:schemeClr val="accent1"/>
+          </a:fillRef>
+          <a:effectRef idx="2">
+            <a:schemeClr val="accent1"/>
+          </a:effectRef>
+          <a:fontRef idx="minor">
+            <a:schemeClr val="lt1"/>
+          </a:fontRef>
+        </p:style>
+        <p:txBody>
+          <a:bodyPr rtlCol="0" anchor="ctr"/>
+          <a:lstStyle/>
+          <a:p>
+            <a:pPr algn="ctr"/>
+          </a:p>
+        </p:txBody>
+      </p:sp>
+      <p:sp>
+        <p:nvSpPr>
+          <p:cNvPr id="4" name="TextBox 3"/>
+          <p:cNvSpPr txBox="1"/>
+          <p:nvPr/>
+        </p:nvSpPr>
+        <p:spPr>
+          <a:xfrm>
+            <a:off x="731520" y="274320"/>
+            <a:ext cx="10058400" cy="640080"/>
+          </a:xfrm>
+          <a:prstGeom prst="rect">
+            <a:avLst/>
+          </a:prstGeom>
+          <a:noFill/>
+        </p:spPr>
+        <p:txBody>
+          <a:bodyPr wrap="square">
+            <a:spAutoFit/>
+          </a:bodyPr>
+          <a:lstStyle/>
+          <a:p>
+            <a:pPr algn="l"/>
+            <a:r>
+              <a:rPr sz="3000" b="1" i="0">
+                <a:solidFill>
+                  <a:srgbClr val="FFFFFF"/>
+                </a:solidFill>
+              </a:rPr>
+              <a:t>개선 후 달라지는 것</a:t>
+            </a:r>
+          </a:p>
+        </p:txBody>
+      </p:sp>
+      <p:sp>
+        <p:nvSpPr>
+          <p:cNvPr id="5" name="Rectangle 4"/>
+          <p:cNvSpPr/>
+          <p:nvPr/>
+        </p:nvSpPr>
+        <p:spPr>
+          <a:xfrm>
+            <a:off x="548640" y="1097280"/>
+            <a:ext cx="3108960" cy="594360"/>
+          </a:xfrm>
+          <a:prstGeom prst="rect">
+            <a:avLst/>
+          </a:prstGeom>
+          <a:solidFill>
+            <a:srgbClr val="4A9EFF"/>
+          </a:solidFill>
+          <a:ln>
+            <a:noFill/>
+          </a:ln>
+        </p:spPr>
+        <p:style>
+          <a:lnRef idx="1">
+            <a:schemeClr val="accent1"/>
+          </a:lnRef>
+          <a:fillRef idx="3">
+            <a:schemeClr val="accent1"/>
+          </a:fillRef>
+          <a:effectRef idx="2">
+            <a:schemeClr val="accent1"/>
+          </a:effectRef>
+          <a:fontRef idx="minor">
+            <a:schemeClr val="lt1"/>
+          </a:fontRef>
+        </p:style>
+        <p:txBody>
+          <a:bodyPr rtlCol="0" anchor="ctr"/>
+          <a:lstStyle/>
+          <a:p>
+            <a:pPr algn="ctr"/>
+          </a:p>
+        </p:txBody>
+      </p:sp>
+      <p:sp>
+        <p:nvSpPr>
+          <p:cNvPr id="6" name="TextBox 5"/>
+          <p:cNvSpPr txBox="1"/>
+          <p:nvPr/>
+        </p:nvSpPr>
+        <p:spPr>
+          <a:xfrm>
+            <a:off x="640080" y="1143000"/>
+            <a:ext cx="2971800" cy="502920"/>
+          </a:xfrm>
+          <a:prstGeom prst="rect">
+            <a:avLst/>
+          </a:prstGeom>
+          <a:noFill/>
+        </p:spPr>
+        <p:txBody>
+          <a:bodyPr wrap="square">
+            <a:spAutoFit/>
+          </a:bodyPr>
+          <a:lstStyle/>
+          <a:p>
+            <a:pPr algn="ctr"/>
+            <a:r>
+              <a:rPr sz="1200" b="1" i="0">
+                <a:solidFill>
+                  <a:srgbClr val="0F172A"/>
+                </a:solidFill>
+              </a:rPr>
+              <a:t>수정 파일 종류</a:t>
+            </a:r>
+          </a:p>
+        </p:txBody>
+      </p:sp>
+      <p:sp>
+        <p:nvSpPr>
+          <p:cNvPr id="7" name="Rectangle 6"/>
+          <p:cNvSpPr/>
+          <p:nvPr/>
+        </p:nvSpPr>
+        <p:spPr>
+          <a:xfrm>
+            <a:off x="3931920" y="1097280"/>
+            <a:ext cx="2194560" cy="594360"/>
+          </a:xfrm>
+          <a:prstGeom prst="rect">
+            <a:avLst/>
+          </a:prstGeom>
+          <a:solidFill>
+            <a:srgbClr val="4A9EFF"/>
+          </a:solidFill>
+          <a:ln>
+            <a:noFill/>
+          </a:ln>
+        </p:spPr>
+        <p:style>
+          <a:lnRef idx="1">
+            <a:schemeClr val="accent1"/>
+          </a:lnRef>
+          <a:fillRef idx="3">
+            <a:schemeClr val="accent1"/>
+          </a:fillRef>
+          <a:effectRef idx="2">
+            <a:schemeClr val="accent1"/>
+          </a:effectRef>
+          <a:fontRef idx="minor">
+            <a:schemeClr val="lt1"/>
+          </a:fontRef>
+        </p:style>
+        <p:txBody>
+          <a:bodyPr rtlCol="0" anchor="ctr"/>
+          <a:lstStyle/>
+          <a:p>
+            <a:pPr algn="ctr"/>
+          </a:p>
+        </p:txBody>
+      </p:sp>
+      <p:sp>
+        <p:nvSpPr>
+          <p:cNvPr id="8" name="TextBox 7"/>
+          <p:cNvSpPr txBox="1"/>
+          <p:nvPr/>
+        </p:nvSpPr>
+        <p:spPr>
+          <a:xfrm>
+            <a:off x="4023359" y="1143000"/>
+            <a:ext cx="2057400" cy="502920"/>
+          </a:xfrm>
+          <a:prstGeom prst="rect">
+            <a:avLst/>
+          </a:prstGeom>
+          <a:noFill/>
+        </p:spPr>
+        <p:txBody>
+          <a:bodyPr wrap="square">
+            <a:spAutoFit/>
+          </a:bodyPr>
+          <a:lstStyle/>
+          <a:p>
+            <a:pPr algn="ctr"/>
+            <a:r>
+              <a:rPr sz="1200" b="1" i="0">
+                <a:solidFill>
+                  <a:srgbClr val="0F172A"/>
+                </a:solidFill>
+              </a:rPr>
+              <a:t>현재</a:t>
+            </a:r>
+          </a:p>
+        </p:txBody>
+      </p:sp>
+      <p:sp>
+        <p:nvSpPr>
+          <p:cNvPr id="9" name="Rectangle 8"/>
+          <p:cNvSpPr/>
+          <p:nvPr/>
+        </p:nvSpPr>
+        <p:spPr>
+          <a:xfrm>
+            <a:off x="6355080" y="1097280"/>
+            <a:ext cx="2468879" cy="594360"/>
+          </a:xfrm>
+          <a:prstGeom prst="rect">
+            <a:avLst/>
+          </a:prstGeom>
+          <a:solidFill>
+            <a:srgbClr val="4A9EFF"/>
+          </a:solidFill>
+          <a:ln>
+            <a:noFill/>
+          </a:ln>
+        </p:spPr>
+        <p:style>
+          <a:lnRef idx="1">
+            <a:schemeClr val="accent1"/>
+          </a:lnRef>
+          <a:fillRef idx="3">
+            <a:schemeClr val="accent1"/>
+          </a:fillRef>
+          <a:effectRef idx="2">
+            <a:schemeClr val="accent1"/>
+          </a:effectRef>
+          <a:fontRef idx="minor">
+            <a:schemeClr val="lt1"/>
+          </a:fontRef>
+        </p:style>
+        <p:txBody>
+          <a:bodyPr rtlCol="0" anchor="ctr"/>
+          <a:lstStyle/>
+          <a:p>
+            <a:pPr algn="ctr"/>
+          </a:p>
+        </p:txBody>
+      </p:sp>
+      <p:sp>
+        <p:nvSpPr>
+          <p:cNvPr id="10" name="TextBox 9"/>
+          <p:cNvSpPr txBox="1"/>
+          <p:nvPr/>
+        </p:nvSpPr>
+        <p:spPr>
+          <a:xfrm>
+            <a:off x="6446520" y="1143000"/>
+            <a:ext cx="2331720" cy="502920"/>
+          </a:xfrm>
+          <a:prstGeom prst="rect">
+            <a:avLst/>
+          </a:prstGeom>
+          <a:noFill/>
+        </p:spPr>
+        <p:txBody>
+          <a:bodyPr wrap="square">
+            <a:spAutoFit/>
+          </a:bodyPr>
+          <a:lstStyle/>
+          <a:p>
+            <a:pPr algn="ctr"/>
+            <a:r>
+              <a:rPr sz="1200" b="1" i="0">
+                <a:solidFill>
+                  <a:srgbClr val="0F172A"/>
+                </a:solidFill>
+              </a:rPr>
+              <a:t>Phase 1
+(Bash 추가)</a:t>
+            </a:r>
+          </a:p>
+        </p:txBody>
+      </p:sp>
+      <p:sp>
+        <p:nvSpPr>
+          <p:cNvPr id="11" name="Rectangle 10"/>
+          <p:cNvSpPr/>
+          <p:nvPr/>
+        </p:nvSpPr>
+        <p:spPr>
+          <a:xfrm>
+            <a:off x="9052560" y="1097280"/>
+            <a:ext cx="2468879" cy="594360"/>
+          </a:xfrm>
+          <a:prstGeom prst="rect">
+            <a:avLst/>
+          </a:prstGeom>
+          <a:solidFill>
+            <a:srgbClr val="4A9EFF"/>
+          </a:solidFill>
+          <a:ln>
+            <a:noFill/>
+          </a:ln>
+        </p:spPr>
+        <p:style>
+          <a:lnRef idx="1">
+            <a:schemeClr val="accent1"/>
+          </a:lnRef>
+          <a:fillRef idx="3">
+            <a:schemeClr val="accent1"/>
+          </a:fillRef>
+          <a:effectRef idx="2">
+            <a:schemeClr val="accent1"/>
+          </a:effectRef>
+          <a:fontRef idx="minor">
+            <a:schemeClr val="lt1"/>
+          </a:fontRef>
+        </p:style>
+        <p:txBody>
+          <a:bodyPr rtlCol="0" anchor="ctr"/>
+          <a:lstStyle/>
+          <a:p>
+            <a:pPr algn="ctr"/>
+          </a:p>
+        </p:txBody>
+      </p:sp>
+      <p:sp>
+        <p:nvSpPr>
+          <p:cNvPr id="12" name="TextBox 11"/>
+          <p:cNvSpPr txBox="1"/>
+          <p:nvPr/>
+        </p:nvSpPr>
+        <p:spPr>
+          <a:xfrm>
+            <a:off x="9144000" y="1143000"/>
+            <a:ext cx="2331720" cy="502920"/>
+          </a:xfrm>
+          <a:prstGeom prst="rect">
+            <a:avLst/>
+          </a:prstGeom>
+          <a:noFill/>
+        </p:spPr>
+        <p:txBody>
+          <a:bodyPr wrap="square">
+            <a:spAutoFit/>
+          </a:bodyPr>
+          <a:lstStyle/>
+          <a:p>
+            <a:pPr algn="ctr"/>
+            <a:r>
+              <a:rPr sz="1200" b="1" i="0">
+                <a:solidFill>
+                  <a:srgbClr val="0F172A"/>
+                </a:solidFill>
+              </a:rPr>
+              <a:t>Phase 2
+(Agent 추가)</a:t>
+            </a:r>
+          </a:p>
+        </p:txBody>
+      </p:sp>
+      <p:sp>
+        <p:nvSpPr>
+          <p:cNvPr id="13" name="Rectangle 12"/>
+          <p:cNvSpPr/>
+          <p:nvPr/>
+        </p:nvSpPr>
+        <p:spPr>
+          <a:xfrm>
+            <a:off x="548640" y="1874519"/>
+            <a:ext cx="3108960" cy="1097280"/>
+          </a:xfrm>
+          <a:prstGeom prst="rect">
+            <a:avLst/>
+          </a:prstGeom>
+          <a:solidFill>
+            <a:srgbClr val="2A3A5A"/>
+          </a:solidFill>
+          <a:ln>
+            <a:noFill/>
+          </a:ln>
+        </p:spPr>
+        <p:style>
+          <a:lnRef idx="1">
+            <a:schemeClr val="accent1"/>
+          </a:lnRef>
+          <a:fillRef idx="3">
+            <a:schemeClr val="accent1"/>
+          </a:fillRef>
+          <a:effectRef idx="2">
+            <a:schemeClr val="accent1"/>
+          </a:effectRef>
+          <a:fontRef idx="minor">
+            <a:schemeClr val="lt1"/>
+          </a:fontRef>
+        </p:style>
+        <p:txBody>
+          <a:bodyPr rtlCol="0" anchor="ctr"/>
+          <a:lstStyle/>
+          <a:p>
+            <a:pPr algn="ctr"/>
+          </a:p>
+        </p:txBody>
+      </p:sp>
+      <p:sp>
+        <p:nvSpPr>
+          <p:cNvPr id="14" name="TextBox 13"/>
+          <p:cNvSpPr txBox="1"/>
+          <p:nvPr/>
+        </p:nvSpPr>
+        <p:spPr>
+          <a:xfrm>
+            <a:off x="640080" y="2011679"/>
+            <a:ext cx="2971800" cy="822960"/>
+          </a:xfrm>
+          <a:prstGeom prst="rect">
+            <a:avLst/>
+          </a:prstGeom>
+          <a:noFill/>
+        </p:spPr>
+        <p:txBody>
+          <a:bodyPr wrap="square">
+            <a:spAutoFit/>
+          </a:bodyPr>
+          <a:lstStyle/>
+          <a:p>
+            <a:pPr algn="ctr"/>
+            <a:r>
+              <a:rPr sz="1200" b="1" i="0">
+                <a:solidFill>
+                  <a:srgbClr val="FFFFFF"/>
+                </a:solidFill>
+              </a:rPr>
+              <a:t>게이트 스크립트
+(.sh)</a:t>
+            </a:r>
+          </a:p>
+        </p:txBody>
+      </p:sp>
+      <p:sp>
+        <p:nvSpPr>
+          <p:cNvPr id="15" name="Rectangle 14"/>
+          <p:cNvSpPr/>
+          <p:nvPr/>
+        </p:nvSpPr>
+        <p:spPr>
+          <a:xfrm>
+            <a:off x="3931920" y="1874519"/>
+            <a:ext cx="2194560" cy="1097280"/>
+          </a:xfrm>
+          <a:prstGeom prst="rect">
+            <a:avLst/>
+          </a:prstGeom>
+          <a:solidFill>
+            <a:srgbClr val="2A3A5A"/>
+          </a:solidFill>
+          <a:ln>
+            <a:noFill/>
+          </a:ln>
+        </p:spPr>
+        <p:style>
+          <a:lnRef idx="1">
+            <a:schemeClr val="accent1"/>
+          </a:lnRef>
+          <a:fillRef idx="3">
+            <a:schemeClr val="accent1"/>
+          </a:fillRef>
+          <a:effectRef idx="2">
+            <a:schemeClr val="accent1"/>
+          </a:effectRef>
+          <a:fontRef idx="minor">
+            <a:schemeClr val="lt1"/>
+          </a:fontRef>
+        </p:style>
+        <p:txBody>
+          <a:bodyPr rtlCol="0" anchor="ctr"/>
+          <a:lstStyle/>
+          <a:p>
+            <a:pPr algn="ctr"/>
+          </a:p>
+        </p:txBody>
+      </p:sp>
+      <p:sp>
+        <p:nvSpPr>
+          <p:cNvPr id="16" name="TextBox 15"/>
+          <p:cNvSpPr txBox="1"/>
+          <p:nvPr/>
+        </p:nvSpPr>
+        <p:spPr>
+          <a:xfrm>
+            <a:off x="4023359" y="2011679"/>
+            <a:ext cx="2057400" cy="822960"/>
+          </a:xfrm>
+          <a:prstGeom prst="rect">
+            <a:avLst/>
+          </a:prstGeom>
+          <a:noFill/>
+        </p:spPr>
+        <p:txBody>
+          <a:bodyPr wrap="square">
+            <a:spAutoFit/>
+          </a:bodyPr>
+          <a:lstStyle/>
+          <a:p>
+            <a:pPr algn="ctr"/>
+            <a:r>
+              <a:rPr sz="1200" b="0" i="0">
+                <a:solidFill>
+                  <a:srgbClr val="FF8C42"/>
+                </a:solidFill>
+              </a:rPr>
+              <a:t>LLM 예측 판정</a:t>
+            </a:r>
+          </a:p>
+        </p:txBody>
+      </p:sp>
+      <p:sp>
+        <p:nvSpPr>
+          <p:cNvPr id="17" name="Rectangle 16"/>
+          <p:cNvSpPr/>
+          <p:nvPr/>
+        </p:nvSpPr>
+        <p:spPr>
+          <a:xfrm>
+            <a:off x="6355080" y="1874519"/>
+            <a:ext cx="2468879" cy="1097280"/>
+          </a:xfrm>
+          <a:prstGeom prst="rect">
+            <a:avLst/>
+          </a:prstGeom>
+          <a:solidFill>
+            <a:srgbClr val="2A3A5A"/>
+          </a:solidFill>
+          <a:ln>
+            <a:noFill/>
+          </a:ln>
+        </p:spPr>
+        <p:style>
+          <a:lnRef idx="1">
+            <a:schemeClr val="accent1"/>
+          </a:lnRef>
+          <a:fillRef idx="3">
+            <a:schemeClr val="accent1"/>
+          </a:fillRef>
+          <a:effectRef idx="2">
+            <a:schemeClr val="accent1"/>
+          </a:effectRef>
+          <a:fontRef idx="minor">
+            <a:schemeClr val="lt1"/>
+          </a:fontRef>
+        </p:style>
+        <p:txBody>
+          <a:bodyPr rtlCol="0" anchor="ctr"/>
+          <a:lstStyle/>
+          <a:p>
+            <a:pPr algn="ctr"/>
+          </a:p>
+        </p:txBody>
+      </p:sp>
+      <p:sp>
+        <p:nvSpPr>
+          <p:cNvPr id="18" name="TextBox 17"/>
+          <p:cNvSpPr txBox="1"/>
+          <p:nvPr/>
+        </p:nvSpPr>
+        <p:spPr>
+          <a:xfrm>
+            <a:off x="6446520" y="2011679"/>
+            <a:ext cx="2331720" cy="822960"/>
+          </a:xfrm>
+          <a:prstGeom prst="rect">
+            <a:avLst/>
+          </a:prstGeom>
+          <a:noFill/>
+        </p:spPr>
+        <p:txBody>
+          <a:bodyPr wrap="square">
+            <a:spAutoFit/>
+          </a:bodyPr>
+          <a:lstStyle/>
+          <a:p>
+            <a:pPr algn="ctr"/>
+            <a:r>
+              <a:rPr sz="1200" b="0" i="0">
+                <a:solidFill>
+                  <a:srgbClr val="06D68A"/>
+                </a:solidFill>
+              </a:rPr>
+              <a:t>✅ bash 실제 실행</a:t>
+            </a:r>
+          </a:p>
+        </p:txBody>
+      </p:sp>
+      <p:sp>
+        <p:nvSpPr>
+          <p:cNvPr id="19" name="Rectangle 18"/>
+          <p:cNvSpPr/>
+          <p:nvPr/>
+        </p:nvSpPr>
+        <p:spPr>
+          <a:xfrm>
+            <a:off x="9052560" y="1874519"/>
+            <a:ext cx="2468879" cy="1097280"/>
+          </a:xfrm>
+          <a:prstGeom prst="rect">
+            <a:avLst/>
+          </a:prstGeom>
+          <a:solidFill>
+            <a:srgbClr val="2A3A5A"/>
+          </a:solidFill>
+          <a:ln>
+            <a:noFill/>
+          </a:ln>
+        </p:spPr>
+        <p:style>
+          <a:lnRef idx="1">
+            <a:schemeClr val="accent1"/>
+          </a:lnRef>
+          <a:fillRef idx="3">
+            <a:schemeClr val="accent1"/>
+          </a:fillRef>
+          <a:effectRef idx="2">
+            <a:schemeClr val="accent1"/>
+          </a:effectRef>
+          <a:fontRef idx="minor">
+            <a:schemeClr val="lt1"/>
+          </a:fontRef>
+        </p:style>
+        <p:txBody>
+          <a:bodyPr rtlCol="0" anchor="ctr"/>
+          <a:lstStyle/>
+          <a:p>
+            <a:pPr algn="ctr"/>
+          </a:p>
+        </p:txBody>
+      </p:sp>
+      <p:sp>
+        <p:nvSpPr>
+          <p:cNvPr id="20" name="TextBox 19"/>
+          <p:cNvSpPr txBox="1"/>
+          <p:nvPr/>
+        </p:nvSpPr>
+        <p:spPr>
+          <a:xfrm>
+            <a:off x="9144000" y="2011679"/>
+            <a:ext cx="2331720" cy="822960"/>
+          </a:xfrm>
+          <a:prstGeom prst="rect">
+            <a:avLst/>
+          </a:prstGeom>
+          <a:noFill/>
+        </p:spPr>
+        <p:txBody>
+          <a:bodyPr wrap="square">
+            <a:spAutoFit/>
+          </a:bodyPr>
+          <a:lstStyle/>
+          <a:p>
+            <a:pPr algn="ctr"/>
+            <a:r>
+              <a:rPr sz="1200" b="0" i="0">
+                <a:solidFill>
+                  <a:srgbClr val="06D68A"/>
+                </a:solidFill>
+              </a:rPr>
+              <a:t>✅ bash 실제 실행</a:t>
+            </a:r>
+          </a:p>
+        </p:txBody>
+      </p:sp>
+      <p:sp>
+        <p:nvSpPr>
+          <p:cNvPr id="21" name="Rectangle 20"/>
+          <p:cNvSpPr/>
+          <p:nvPr/>
+        </p:nvSpPr>
+        <p:spPr>
+          <a:xfrm>
+            <a:off x="548640" y="3108960"/>
+            <a:ext cx="3108960" cy="1097280"/>
+          </a:xfrm>
+          <a:prstGeom prst="rect">
+            <a:avLst/>
+          </a:prstGeom>
+          <a:solidFill>
+            <a:srgbClr val="1E2E4A"/>
+          </a:solidFill>
+          <a:ln>
+            <a:noFill/>
+          </a:ln>
+        </p:spPr>
+        <p:style>
+          <a:lnRef idx="1">
+            <a:schemeClr val="accent1"/>
+          </a:lnRef>
+          <a:fillRef idx="3">
+            <a:schemeClr val="accent1"/>
+          </a:fillRef>
+          <a:effectRef idx="2">
+            <a:schemeClr val="accent1"/>
+          </a:effectRef>
+          <a:fontRef idx="minor">
+            <a:schemeClr val="lt1"/>
+          </a:fontRef>
+        </p:style>
+        <p:txBody>
+          <a:bodyPr rtlCol="0" anchor="ctr"/>
+          <a:lstStyle/>
+          <a:p>
+            <a:pPr algn="ctr"/>
+          </a:p>
+        </p:txBody>
+      </p:sp>
+      <p:sp>
+        <p:nvSpPr>
+          <p:cNvPr id="22" name="TextBox 21"/>
+          <p:cNvSpPr txBox="1"/>
+          <p:nvPr/>
+        </p:nvSpPr>
+        <p:spPr>
+          <a:xfrm>
+            <a:off x="640080" y="3246120"/>
+            <a:ext cx="2971800" cy="822960"/>
+          </a:xfrm>
+          <a:prstGeom prst="rect">
+            <a:avLst/>
+          </a:prstGeom>
+          <a:noFill/>
+        </p:spPr>
+        <p:txBody>
+          <a:bodyPr wrap="square">
+            <a:spAutoFit/>
+          </a:bodyPr>
+          <a:lstStyle/>
+          <a:p>
+            <a:pPr algn="ctr"/>
+            <a:r>
+              <a:rPr sz="1200" b="1" i="0">
+                <a:solidFill>
+                  <a:srgbClr val="FFFFFF"/>
+                </a:solidFill>
+              </a:rPr>
+              <a:t>에이전트 정의
+(.md)</a:t>
+            </a:r>
+          </a:p>
+        </p:txBody>
+      </p:sp>
+      <p:sp>
+        <p:nvSpPr>
+          <p:cNvPr id="23" name="Rectangle 22"/>
+          <p:cNvSpPr/>
+          <p:nvPr/>
+        </p:nvSpPr>
+        <p:spPr>
+          <a:xfrm>
+            <a:off x="3931920" y="3108960"/>
+            <a:ext cx="2194560" cy="1097280"/>
+          </a:xfrm>
+          <a:prstGeom prst="rect">
+            <a:avLst/>
+          </a:prstGeom>
+          <a:solidFill>
+            <a:srgbClr val="1E2E4A"/>
+          </a:solidFill>
+          <a:ln>
+            <a:noFill/>
+          </a:ln>
+        </p:spPr>
+        <p:style>
+          <a:lnRef idx="1">
+            <a:schemeClr val="accent1"/>
+          </a:lnRef>
+          <a:fillRef idx="3">
+            <a:schemeClr val="accent1"/>
+          </a:fillRef>
+          <a:effectRef idx="2">
+            <a:schemeClr val="accent1"/>
+          </a:effectRef>
+          <a:fontRef idx="minor">
+            <a:schemeClr val="lt1"/>
+          </a:fontRef>
+        </p:style>
+        <p:txBody>
+          <a:bodyPr rtlCol="0" anchor="ctr"/>
+          <a:lstStyle/>
+          <a:p>
+            <a:pPr algn="ctr"/>
+          </a:p>
+        </p:txBody>
+      </p:sp>
+      <p:sp>
+        <p:nvSpPr>
+          <p:cNvPr id="24" name="TextBox 23"/>
+          <p:cNvSpPr txBox="1"/>
+          <p:nvPr/>
+        </p:nvSpPr>
+        <p:spPr>
+          <a:xfrm>
+            <a:off x="4023359" y="3246120"/>
+            <a:ext cx="2057400" cy="822960"/>
+          </a:xfrm>
+          <a:prstGeom prst="rect">
+            <a:avLst/>
+          </a:prstGeom>
+          <a:noFill/>
+        </p:spPr>
+        <p:txBody>
+          <a:bodyPr wrap="square">
+            <a:spAutoFit/>
+          </a:bodyPr>
+          <a:lstStyle/>
+          <a:p>
+            <a:pPr algn="ctr"/>
+            <a:r>
+              <a:rPr sz="1200" b="0" i="0">
+                <a:solidFill>
+                  <a:srgbClr val="FF8C42"/>
+                </a:solidFill>
+              </a:rPr>
+              <a:t>LLM 예측 판정</a:t>
+            </a:r>
+          </a:p>
+        </p:txBody>
+      </p:sp>
+      <p:sp>
+        <p:nvSpPr>
+          <p:cNvPr id="25" name="Rectangle 24"/>
+          <p:cNvSpPr/>
+          <p:nvPr/>
+        </p:nvSpPr>
+        <p:spPr>
+          <a:xfrm>
+            <a:off x="6355080" y="3108960"/>
+            <a:ext cx="2468879" cy="1097280"/>
+          </a:xfrm>
+          <a:prstGeom prst="rect">
+            <a:avLst/>
+          </a:prstGeom>
+          <a:solidFill>
+            <a:srgbClr val="1E2E4A"/>
+          </a:solidFill>
+          <a:ln>
+            <a:noFill/>
+          </a:ln>
+        </p:spPr>
+        <p:style>
+          <a:lnRef idx="1">
+            <a:schemeClr val="accent1"/>
+          </a:lnRef>
+          <a:fillRef idx="3">
+            <a:schemeClr val="accent1"/>
+          </a:fillRef>
+          <a:effectRef idx="2">
+            <a:schemeClr val="accent1"/>
+          </a:effectRef>
+          <a:fontRef idx="minor">
+            <a:schemeClr val="lt1"/>
+          </a:fontRef>
+        </p:style>
+        <p:txBody>
+          <a:bodyPr rtlCol="0" anchor="ctr"/>
+          <a:lstStyle/>
+          <a:p>
+            <a:pPr algn="ctr"/>
+          </a:p>
+        </p:txBody>
+      </p:sp>
+      <p:sp>
+        <p:nvSpPr>
+          <p:cNvPr id="26" name="TextBox 25"/>
+          <p:cNvSpPr txBox="1"/>
+          <p:nvPr/>
+        </p:nvSpPr>
+        <p:spPr>
+          <a:xfrm>
+            <a:off x="6446520" y="3246120"/>
+            <a:ext cx="2331720" cy="822960"/>
+          </a:xfrm>
+          <a:prstGeom prst="rect">
+            <a:avLst/>
+          </a:prstGeom>
+          <a:noFill/>
+        </p:spPr>
+        <p:txBody>
+          <a:bodyPr wrap="square">
+            <a:spAutoFit/>
+          </a:bodyPr>
+          <a:lstStyle/>
+          <a:p>
+            <a:pPr algn="ctr"/>
+            <a:r>
+              <a:rPr sz="1200" b="0" i="0">
+                <a:solidFill>
+                  <a:srgbClr val="FFD66B"/>
+                </a:solidFill>
+              </a:rPr>
+              <a:t>LLM 예측 판정</a:t>
+            </a:r>
+          </a:p>
+        </p:txBody>
+      </p:sp>
+      <p:sp>
+        <p:nvSpPr>
+          <p:cNvPr id="27" name="Rectangle 26"/>
+          <p:cNvSpPr/>
+          <p:nvPr/>
+        </p:nvSpPr>
+        <p:spPr>
+          <a:xfrm>
+            <a:off x="9052560" y="3108960"/>
+            <a:ext cx="2468879" cy="1097280"/>
+          </a:xfrm>
+          <a:prstGeom prst="rect">
+            <a:avLst/>
+          </a:prstGeom>
+          <a:solidFill>
+            <a:srgbClr val="1E2E4A"/>
+          </a:solidFill>
+          <a:ln>
+            <a:noFill/>
+          </a:ln>
+        </p:spPr>
+        <p:style>
+          <a:lnRef idx="1">
+            <a:schemeClr val="accent1"/>
+          </a:lnRef>
+          <a:fillRef idx="3">
+            <a:schemeClr val="accent1"/>
+          </a:fillRef>
+          <a:effectRef idx="2">
+            <a:schemeClr val="accent1"/>
+          </a:effectRef>
+          <a:fontRef idx="minor">
+            <a:schemeClr val="lt1"/>
+          </a:fontRef>
+        </p:style>
+        <p:txBody>
+          <a:bodyPr rtlCol="0" anchor="ctr"/>
+          <a:lstStyle/>
+          <a:p>
+            <a:pPr algn="ctr"/>
+          </a:p>
+        </p:txBody>
+      </p:sp>
+      <p:sp>
+        <p:nvSpPr>
+          <p:cNvPr id="28" name="TextBox 27"/>
+          <p:cNvSpPr txBox="1"/>
+          <p:nvPr/>
+        </p:nvSpPr>
+        <p:spPr>
+          <a:xfrm>
+            <a:off x="9144000" y="3246120"/>
+            <a:ext cx="2331720" cy="822960"/>
+          </a:xfrm>
+          <a:prstGeom prst="rect">
+            <a:avLst/>
+          </a:prstGeom>
+          <a:noFill/>
+        </p:spPr>
+        <p:txBody>
+          <a:bodyPr wrap="square">
+            <a:spAutoFit/>
+          </a:bodyPr>
+          <a:lstStyle/>
+          <a:p>
+            <a:pPr algn="ctr"/>
+            <a:r>
+              <a:rPr sz="1200" b="0" i="0">
+                <a:solidFill>
+                  <a:srgbClr val="06D68A"/>
+                </a:solidFill>
+              </a:rPr>
+              <a:t>✅ 에이전트 실제 호출</a:t>
+            </a:r>
+          </a:p>
+        </p:txBody>
+      </p:sp>
+      <p:sp>
+        <p:nvSpPr>
+          <p:cNvPr id="29" name="Rectangle 28"/>
+          <p:cNvSpPr/>
+          <p:nvPr/>
+        </p:nvSpPr>
+        <p:spPr>
+          <a:xfrm>
+            <a:off x="548640" y="4343400"/>
+            <a:ext cx="3108960" cy="1097280"/>
+          </a:xfrm>
+          <a:prstGeom prst="rect">
+            <a:avLst/>
+          </a:prstGeom>
+          <a:solidFill>
+            <a:srgbClr val="2A3A5A"/>
+          </a:solidFill>
+          <a:ln>
+            <a:noFill/>
+          </a:ln>
+        </p:spPr>
+        <p:style>
+          <a:lnRef idx="1">
+            <a:schemeClr val="accent1"/>
+          </a:lnRef>
+          <a:fillRef idx="3">
+            <a:schemeClr val="accent1"/>
+          </a:fillRef>
+          <a:effectRef idx="2">
+            <a:schemeClr val="accent1"/>
+          </a:effectRef>
+          <a:fontRef idx="minor">
+            <a:schemeClr val="lt1"/>
+          </a:fontRef>
+        </p:style>
+        <p:txBody>
+          <a:bodyPr rtlCol="0" anchor="ctr"/>
+          <a:lstStyle/>
+          <a:p>
+            <a:pPr algn="ctr"/>
+          </a:p>
+        </p:txBody>
+      </p:sp>
+      <p:sp>
+        <p:nvSpPr>
+          <p:cNvPr id="30" name="TextBox 29"/>
+          <p:cNvSpPr txBox="1"/>
+          <p:nvPr/>
+        </p:nvSpPr>
+        <p:spPr>
+          <a:xfrm>
+            <a:off x="640080" y="4480560"/>
+            <a:ext cx="2971800" cy="822960"/>
+          </a:xfrm>
+          <a:prstGeom prst="rect">
+            <a:avLst/>
+          </a:prstGeom>
+          <a:noFill/>
+        </p:spPr>
+        <p:txBody>
+          <a:bodyPr wrap="square">
+            <a:spAutoFit/>
+          </a:bodyPr>
+          <a:lstStyle/>
+          <a:p>
+            <a:pPr algn="ctr"/>
+            <a:r>
+              <a:rPr sz="1200" b="1" i="0">
+                <a:solidFill>
+                  <a:srgbClr val="FFFFFF"/>
+                </a:solidFill>
+              </a:rPr>
+              <a:t>CLAUDE.md
+/ yaml</a:t>
+            </a:r>
+          </a:p>
+        </p:txBody>
+      </p:sp>
+      <p:sp>
+        <p:nvSpPr>
+          <p:cNvPr id="31" name="Rectangle 30"/>
+          <p:cNvSpPr/>
+          <p:nvPr/>
+        </p:nvSpPr>
+        <p:spPr>
+          <a:xfrm>
+            <a:off x="3931920" y="4343400"/>
+            <a:ext cx="2194560" cy="1097280"/>
+          </a:xfrm>
+          <a:prstGeom prst="rect">
+            <a:avLst/>
+          </a:prstGeom>
+          <a:solidFill>
+            <a:srgbClr val="2A3A5A"/>
+          </a:solidFill>
+          <a:ln>
+            <a:noFill/>
+          </a:ln>
+        </p:spPr>
+        <p:style>
+          <a:lnRef idx="1">
+            <a:schemeClr val="accent1"/>
+          </a:lnRef>
+          <a:fillRef idx="3">
+            <a:schemeClr val="accent1"/>
+          </a:fillRef>
+          <a:effectRef idx="2">
+            <a:schemeClr val="accent1"/>
+          </a:effectRef>
+          <a:fontRef idx="minor">
+            <a:schemeClr val="lt1"/>
+          </a:fontRef>
+        </p:style>
+        <p:txBody>
+          <a:bodyPr rtlCol="0" anchor="ctr"/>
+          <a:lstStyle/>
+          <a:p>
+            <a:pPr algn="ctr"/>
+          </a:p>
+        </p:txBody>
+      </p:sp>
+      <p:sp>
+        <p:nvSpPr>
+          <p:cNvPr id="32" name="TextBox 31"/>
+          <p:cNvSpPr txBox="1"/>
+          <p:nvPr/>
+        </p:nvSpPr>
+        <p:spPr>
+          <a:xfrm>
+            <a:off x="4023359" y="4480560"/>
+            <a:ext cx="2057400" cy="822960"/>
+          </a:xfrm>
+          <a:prstGeom prst="rect">
+            <a:avLst/>
+          </a:prstGeom>
+          <a:noFill/>
+        </p:spPr>
+        <p:txBody>
+          <a:bodyPr wrap="square">
+            <a:spAutoFit/>
+          </a:bodyPr>
+          <a:lstStyle/>
+          <a:p>
+            <a:pPr algn="ctr"/>
+            <a:r>
+              <a:rPr sz="1200" b="0" i="0">
+                <a:solidFill>
+                  <a:srgbClr val="FF8C42"/>
+                </a:solidFill>
+              </a:rPr>
+              <a:t>LLM 예측 판정</a:t>
+            </a:r>
+          </a:p>
+        </p:txBody>
+      </p:sp>
+      <p:sp>
+        <p:nvSpPr>
+          <p:cNvPr id="33" name="Rectangle 32"/>
+          <p:cNvSpPr/>
+          <p:nvPr/>
+        </p:nvSpPr>
+        <p:spPr>
+          <a:xfrm>
+            <a:off x="6355080" y="4343400"/>
+            <a:ext cx="2468879" cy="1097280"/>
+          </a:xfrm>
+          <a:prstGeom prst="rect">
+            <a:avLst/>
+          </a:prstGeom>
+          <a:solidFill>
+            <a:srgbClr val="2A3A5A"/>
+          </a:solidFill>
+          <a:ln>
+            <a:noFill/>
+          </a:ln>
+        </p:spPr>
+        <p:style>
+          <a:lnRef idx="1">
+            <a:schemeClr val="accent1"/>
+          </a:lnRef>
+          <a:fillRef idx="3">
+            <a:schemeClr val="accent1"/>
+          </a:fillRef>
+          <a:effectRef idx="2">
+            <a:schemeClr val="accent1"/>
+          </a:effectRef>
+          <a:fontRef idx="minor">
+            <a:schemeClr val="lt1"/>
+          </a:fontRef>
+        </p:style>
+        <p:txBody>
+          <a:bodyPr rtlCol="0" anchor="ctr"/>
+          <a:lstStyle/>
+          <a:p>
+            <a:pPr algn="ctr"/>
+          </a:p>
+        </p:txBody>
+      </p:sp>
+      <p:sp>
+        <p:nvSpPr>
+          <p:cNvPr id="34" name="TextBox 33"/>
+          <p:cNvSpPr txBox="1"/>
+          <p:nvPr/>
+        </p:nvSpPr>
+        <p:spPr>
+          <a:xfrm>
+            <a:off x="6446520" y="4480560"/>
+            <a:ext cx="2331720" cy="822960"/>
+          </a:xfrm>
+          <a:prstGeom prst="rect">
+            <a:avLst/>
+          </a:prstGeom>
+          <a:noFill/>
+        </p:spPr>
+        <p:txBody>
+          <a:bodyPr wrap="square">
+            <a:spAutoFit/>
+          </a:bodyPr>
+          <a:lstStyle/>
+          <a:p>
+            <a:pPr algn="ctr"/>
+            <a:r>
+              <a:rPr sz="1200" b="0" i="0">
+                <a:solidFill>
+                  <a:srgbClr val="FFD66B"/>
+                </a:solidFill>
+              </a:rPr>
+              <a:t>구조 검증 추가</a:t>
+            </a:r>
+          </a:p>
+        </p:txBody>
+      </p:sp>
+      <p:sp>
+        <p:nvSpPr>
+          <p:cNvPr id="35" name="Rectangle 34"/>
+          <p:cNvSpPr/>
+          <p:nvPr/>
+        </p:nvSpPr>
+        <p:spPr>
+          <a:xfrm>
+            <a:off x="9052560" y="4343400"/>
+            <a:ext cx="2468879" cy="1097280"/>
+          </a:xfrm>
+          <a:prstGeom prst="rect">
+            <a:avLst/>
+          </a:prstGeom>
+          <a:solidFill>
+            <a:srgbClr val="2A3A5A"/>
+          </a:solidFill>
+          <a:ln>
+            <a:noFill/>
+          </a:ln>
+        </p:spPr>
+        <p:style>
+          <a:lnRef idx="1">
+            <a:schemeClr val="accent1"/>
+          </a:lnRef>
+          <a:fillRef idx="3">
+            <a:schemeClr val="accent1"/>
+          </a:fillRef>
+          <a:effectRef idx="2">
+            <a:schemeClr val="accent1"/>
+          </a:effectRef>
+          <a:fontRef idx="minor">
+            <a:schemeClr val="lt1"/>
+          </a:fontRef>
+        </p:style>
+        <p:txBody>
+          <a:bodyPr rtlCol="0" anchor="ctr"/>
+          <a:lstStyle/>
+          <a:p>
+            <a:pPr algn="ctr"/>
+          </a:p>
+        </p:txBody>
+      </p:sp>
+      <p:sp>
+        <p:nvSpPr>
+          <p:cNvPr id="36" name="TextBox 35"/>
+          <p:cNvSpPr txBox="1"/>
+          <p:nvPr/>
+        </p:nvSpPr>
+        <p:spPr>
+          <a:xfrm>
+            <a:off x="9144000" y="4480560"/>
+            <a:ext cx="2331720" cy="822960"/>
+          </a:xfrm>
+          <a:prstGeom prst="rect">
+            <a:avLst/>
+          </a:prstGeom>
+          <a:noFill/>
+        </p:spPr>
+        <p:txBody>
+          <a:bodyPr wrap="square">
+            <a:spAutoFit/>
+          </a:bodyPr>
+          <a:lstStyle/>
+          <a:p>
+            <a:pPr algn="ctr"/>
+            <a:r>
+              <a:rPr sz="1200" b="0" i="0">
+                <a:solidFill>
+                  <a:srgbClr val="FFD66B"/>
+                </a:solidFill>
+              </a:rPr>
+              <a:t>구조 검증 추가</a:t>
+            </a:r>
+          </a:p>
+        </p:txBody>
+      </p:sp>
+      <p:sp>
+        <p:nvSpPr>
+          <p:cNvPr id="37" name="Rectangle 36"/>
+          <p:cNvSpPr/>
+          <p:nvPr/>
+        </p:nvSpPr>
+        <p:spPr>
+          <a:xfrm>
+            <a:off x="548640" y="5440680"/>
+            <a:ext cx="11064240" cy="594360"/>
+          </a:xfrm>
+          <a:prstGeom prst="rect">
+            <a:avLst/>
+          </a:prstGeom>
+          <a:solidFill>
+            <a:srgbClr val="061606"/>
+          </a:solidFill>
+          <a:ln w="19050">
+            <a:solidFill>
+              <a:srgbClr val="06D68A"/>
+            </a:solidFill>
+          </a:ln>
+        </p:spPr>
+        <p:style>
+          <a:lnRef idx="1">
+            <a:schemeClr val="accent1"/>
+          </a:lnRef>
+          <a:fillRef idx="3">
+            <a:schemeClr val="accent1"/>
+          </a:fillRef>
+          <a:effectRef idx="2">
+            <a:schemeClr val="accent1"/>
+          </a:effectRef>
+          <a:fontRef idx="minor">
+            <a:schemeClr val="lt1"/>
+          </a:fontRef>
+        </p:style>
+        <p:txBody>
+          <a:bodyPr rtlCol="0" anchor="ctr"/>
+          <a:lstStyle/>
+          <a:p>
+            <a:pPr algn="ctr"/>
+          </a:p>
+        </p:txBody>
+      </p:sp>
+      <p:sp>
+        <p:nvSpPr>
+          <p:cNvPr id="38" name="TextBox 37"/>
+          <p:cNvSpPr txBox="1"/>
+          <p:nvPr/>
+        </p:nvSpPr>
+        <p:spPr>
+          <a:xfrm>
+            <a:off x="914400" y="5550408"/>
+            <a:ext cx="10058400" cy="411480"/>
+          </a:xfrm>
+          <a:prstGeom prst="rect">
+            <a:avLst/>
+          </a:prstGeom>
+          <a:noFill/>
+        </p:spPr>
+        <p:txBody>
+          <a:bodyPr wrap="square">
+            <a:spAutoFit/>
+          </a:bodyPr>
+          <a:lstStyle/>
+          <a:p>
+            <a:pPr algn="l"/>
+            <a:r>
+              <a:rPr sz="1400" b="1" i="0">
+                <a:solidFill>
+                  <a:srgbClr val="06D68A"/>
+                </a:solidFill>
+              </a:rPr>
+              <a:t>Phase 1 + Phase 2 완료 시: 수정 제안 → 실제 실행 검증 → 신뢰할 수 있는 판정</a:t>
+            </a:r>
+          </a:p>
+        </p:txBody>
+      </p:sp>
+    </p:spTree>
+  </p:cSld>
+  <p:clrMapOvr>
+    <a:masterClrMapping/>
+  </p:clrMapOvr>
+</p:sld>
+</file>
+
+<file path=ppt/slides/slide16.xml><?xml version="1.0" encoding="utf-8"?>
+<p:sld xmlns:a="http://schemas.openxmlformats.org/drawingml/2006/main" xmlns:p="http://schemas.openxmlformats.org/presentationml/2006/main" xmlns:r="http://schemas.openxmlformats.org/officeDocument/2006/relationships">
+  <p:cSld>
+    <p:spTree>
+      <p:nvGrpSpPr>
+        <p:cNvPr id="1" name=""/>
+        <p:cNvGrpSpPr/>
+        <p:nvPr/>
+      </p:nvGrpSpPr>
+      <p:grpSpPr/>
+      <p:sp>
+        <p:nvSpPr>
+          <p:cNvPr id="2" name="Rectangle 1"/>
+          <p:cNvSpPr/>
+          <p:nvPr/>
+        </p:nvSpPr>
+        <p:spPr>
+          <a:xfrm>
+            <a:off x="0" y="0"/>
+            <a:ext cx="12188952" cy="6858000"/>
+          </a:xfrm>
+          <a:prstGeom prst="rect">
+            <a:avLst/>
+          </a:prstGeom>
+          <a:solidFill>
+            <a:srgbClr val="0F172A"/>
+          </a:solidFill>
+          <a:ln>
+            <a:noFill/>
+          </a:ln>
+        </p:spPr>
+        <p:style>
+          <a:lnRef idx="1">
+            <a:schemeClr val="accent1"/>
+          </a:lnRef>
+          <a:fillRef idx="3">
+            <a:schemeClr val="accent1"/>
+          </a:fillRef>
+          <a:effectRef idx="2">
+            <a:schemeClr val="accent1"/>
+          </a:effectRef>
+          <a:fontRef idx="minor">
+            <a:schemeClr val="lt1"/>
+          </a:fontRef>
+        </p:style>
+        <p:txBody>
+          <a:bodyPr rtlCol="0" anchor="ctr"/>
+          <a:lstStyle/>
+          <a:p>
+            <a:pPr algn="ctr"/>
+          </a:p>
+        </p:txBody>
+      </p:sp>
+      <p:sp>
+        <p:nvSpPr>
+          <p:cNvPr id="3" name="Rectangle 2"/>
+          <p:cNvSpPr/>
+          <p:nvPr/>
+        </p:nvSpPr>
+        <p:spPr>
+          <a:xfrm>
+            <a:off x="0" y="0"/>
+            <a:ext cx="54864" cy="6858000"/>
+          </a:xfrm>
+          <a:prstGeom prst="rect">
+            <a:avLst/>
+          </a:prstGeom>
+          <a:solidFill>
+            <a:srgbClr val="4A9EFF"/>
+          </a:solidFill>
+          <a:ln>
+            <a:noFill/>
+          </a:ln>
+        </p:spPr>
+        <p:style>
+          <a:lnRef idx="1">
+            <a:schemeClr val="accent1"/>
+          </a:lnRef>
+          <a:fillRef idx="3">
+            <a:schemeClr val="accent1"/>
+          </a:fillRef>
+          <a:effectRef idx="2">
+            <a:schemeClr val="accent1"/>
+          </a:effectRef>
+          <a:fontRef idx="minor">
+            <a:schemeClr val="lt1"/>
+          </a:fontRef>
+        </p:style>
+        <p:txBody>
+          <a:bodyPr rtlCol="0" anchor="ctr"/>
+          <a:lstStyle/>
+          <a:p>
+            <a:pPr algn="ctr"/>
+          </a:p>
+        </p:txBody>
+      </p:sp>
+      <p:sp>
+        <p:nvSpPr>
+          <p:cNvPr id="4" name="Rectangle 3"/>
+          <p:cNvSpPr/>
+          <p:nvPr/>
+        </p:nvSpPr>
+        <p:spPr>
+          <a:xfrm>
+            <a:off x="731520" y="182880"/>
+            <a:ext cx="1737360" cy="292608"/>
+          </a:xfrm>
+          <a:prstGeom prst="rect">
+            <a:avLst/>
+          </a:prstGeom>
+          <a:solidFill>
+            <a:srgbClr val="00D4AA"/>
+          </a:solidFill>
+          <a:ln>
+            <a:noFill/>
+          </a:ln>
+        </p:spPr>
+        <p:style>
+          <a:lnRef idx="1">
+            <a:schemeClr val="accent1"/>
+          </a:lnRef>
+          <a:fillRef idx="3">
+            <a:schemeClr val="accent1"/>
+          </a:fillRef>
+          <a:effectRef idx="2">
+            <a:schemeClr val="accent1"/>
+          </a:effectRef>
+          <a:fontRef idx="minor">
+            <a:schemeClr val="lt1"/>
+          </a:fontRef>
+        </p:style>
+        <p:txBody>
+          <a:bodyPr rtlCol="0" anchor="ctr"/>
+          <a:lstStyle/>
+          <a:p>
+            <a:pPr algn="ctr"/>
+          </a:p>
+        </p:txBody>
+      </p:sp>
+      <p:sp>
+        <p:nvSpPr>
+          <p:cNvPr id="5" name="TextBox 4"/>
+          <p:cNvSpPr txBox="1"/>
+          <p:nvPr/>
+        </p:nvSpPr>
+        <p:spPr>
+          <a:xfrm>
+            <a:off x="777240" y="210312"/>
+            <a:ext cx="1737360" cy="292608"/>
+          </a:xfrm>
+          <a:prstGeom prst="rect">
+            <a:avLst/>
+          </a:prstGeom>
+          <a:noFill/>
+        </p:spPr>
+        <p:txBody>
+          <a:bodyPr wrap="square">
+            <a:spAutoFit/>
+          </a:bodyPr>
+          <a:lstStyle/>
+          <a:p>
+            <a:pPr algn="ctr"/>
+            <a:r>
+              <a:rPr sz="1300" b="1" i="0">
+                <a:solidFill>
+                  <a:srgbClr val="FFFFFF"/>
+                </a:solidFill>
+              </a:rPr>
+              <a:t>시나리오 3 — 라이브 테스트</a:t>
+            </a:r>
+          </a:p>
+        </p:txBody>
+      </p:sp>
+      <p:sp>
+        <p:nvSpPr>
+          <p:cNvPr id="6" name="TextBox 5"/>
+          <p:cNvSpPr txBox="1"/>
+          <p:nvPr/>
+        </p:nvSpPr>
+        <p:spPr>
+          <a:xfrm>
+            <a:off x="731520" y="548640"/>
+            <a:ext cx="10058400" cy="594360"/>
+          </a:xfrm>
+          <a:prstGeom prst="rect">
+            <a:avLst/>
+          </a:prstGeom>
+          <a:noFill/>
+        </p:spPr>
+        <p:txBody>
+          <a:bodyPr wrap="square">
+            <a:spAutoFit/>
+          </a:bodyPr>
+          <a:lstStyle/>
+          <a:p>
+            <a:pPr algn="l"/>
+            <a:r>
+              <a:rPr sz="2600" b="1" i="0">
+                <a:solidFill>
+                  <a:srgbClr val="FFFFFF"/>
+                </a:solidFill>
+              </a:rPr>
+              <a:t>도메인 지식 주입 경로를 묻는 질문</a:t>
+            </a:r>
+          </a:p>
+        </p:txBody>
+      </p:sp>
+      <p:sp>
+        <p:nvSpPr>
+          <p:cNvPr id="7" name="Rectangle 6"/>
+          <p:cNvSpPr/>
+          <p:nvPr/>
+        </p:nvSpPr>
+        <p:spPr>
+          <a:xfrm>
+            <a:off x="548640" y="1325880"/>
+            <a:ext cx="11064240" cy="822960"/>
+          </a:xfrm>
+          <a:prstGeom prst="rect">
+            <a:avLst/>
+          </a:prstGeom>
+          <a:solidFill>
+            <a:srgbClr val="061A1A"/>
+          </a:solidFill>
+          <a:ln w="19050">
+            <a:solidFill>
+              <a:srgbClr val="00D4AA"/>
+            </a:solidFill>
+          </a:ln>
+        </p:spPr>
+        <p:style>
+          <a:lnRef idx="1">
+            <a:schemeClr val="accent1"/>
+          </a:lnRef>
+          <a:fillRef idx="3">
+            <a:schemeClr val="accent1"/>
+          </a:fillRef>
+          <a:effectRef idx="2">
+            <a:schemeClr val="accent1"/>
+          </a:effectRef>
+          <a:fontRef idx="minor">
+            <a:schemeClr val="lt1"/>
+          </a:fontRef>
+        </p:style>
+        <p:txBody>
+          <a:bodyPr rtlCol="0" anchor="ctr"/>
+          <a:lstStyle/>
+          <a:p>
+            <a:pPr algn="ctr"/>
+          </a:p>
+        </p:txBody>
+      </p:sp>
+      <p:sp>
+        <p:nvSpPr>
+          <p:cNvPr id="8" name="TextBox 7"/>
+          <p:cNvSpPr txBox="1"/>
+          <p:nvPr/>
+        </p:nvSpPr>
+        <p:spPr>
+          <a:xfrm>
+            <a:off x="777240" y="1389888"/>
+            <a:ext cx="2286000" cy="320040"/>
+          </a:xfrm>
+          <a:prstGeom prst="rect">
+            <a:avLst/>
+          </a:prstGeom>
+          <a:noFill/>
+        </p:spPr>
+        <p:txBody>
+          <a:bodyPr wrap="square">
+            <a:spAutoFit/>
+          </a:bodyPr>
+          <a:lstStyle/>
+          <a:p>
+            <a:pPr algn="l"/>
+            <a:r>
+              <a:rPr sz="1300" b="1" i="0">
+                <a:solidFill>
+                  <a:srgbClr val="00D4AA"/>
+                </a:solidFill>
+              </a:rPr>
+              <a:t>💬 개발자 입력:</a:t>
+            </a:r>
+          </a:p>
+        </p:txBody>
+      </p:sp>
+      <p:sp>
+        <p:nvSpPr>
+          <p:cNvPr id="9" name="TextBox 8"/>
+          <p:cNvSpPr txBox="1"/>
+          <p:nvPr/>
+        </p:nvSpPr>
+        <p:spPr>
+          <a:xfrm>
+            <a:off x="777240" y="1664208"/>
+            <a:ext cx="10515600" cy="411480"/>
+          </a:xfrm>
+          <a:prstGeom prst="rect">
+            <a:avLst/>
+          </a:prstGeom>
+          <a:noFill/>
+        </p:spPr>
+        <p:txBody>
+          <a:bodyPr wrap="square">
+            <a:spAutoFit/>
+          </a:bodyPr>
+          <a:lstStyle/>
+          <a:p>
+            <a:pPr algn="l"/>
+            <a:r>
+              <a:rPr sz="1300" b="0" i="0">
+                <a:solidFill>
+                  <a:srgbClr val="FFFFFF"/>
+                </a:solidFill>
+              </a:rPr>
+              <a:t>"취약성 검사가 필요하여 관련 정보를 주입하고 싶은데,
+ 어느 경로에 어떤 내용을 적어야 할까? 솔루션 명까지 적어야 하나?"</a:t>
+            </a:r>
+          </a:p>
+        </p:txBody>
+      </p:sp>
+      <p:sp>
+        <p:nvSpPr>
+          <p:cNvPr id="10" name="Rectangle 9"/>
+          <p:cNvSpPr/>
+          <p:nvPr/>
+        </p:nvSpPr>
+        <p:spPr>
+          <a:xfrm>
+            <a:off x="548640" y="2331720"/>
+            <a:ext cx="3474720" cy="3749039"/>
+          </a:xfrm>
+          <a:prstGeom prst="rect">
+            <a:avLst/>
+          </a:prstGeom>
+          <a:solidFill>
+            <a:srgbClr val="2A3A5A"/>
+          </a:solidFill>
+          <a:ln w="19050">
+            <a:solidFill>
+              <a:srgbClr val="4A9EFF"/>
+            </a:solidFill>
+          </a:ln>
+        </p:spPr>
+        <p:style>
+          <a:lnRef idx="1">
+            <a:schemeClr val="accent1"/>
+          </a:lnRef>
+          <a:fillRef idx="3">
+            <a:schemeClr val="accent1"/>
+          </a:fillRef>
+          <a:effectRef idx="2">
+            <a:schemeClr val="accent1"/>
+          </a:effectRef>
+          <a:fontRef idx="minor">
+            <a:schemeClr val="lt1"/>
+          </a:fontRef>
+        </p:style>
+        <p:txBody>
+          <a:bodyPr rtlCol="0" anchor="ctr"/>
+          <a:lstStyle/>
+          <a:p>
+            <a:pPr algn="ctr"/>
+          </a:p>
+        </p:txBody>
+      </p:sp>
+      <p:sp>
+        <p:nvSpPr>
+          <p:cNvPr id="11" name="TextBox 10"/>
+          <p:cNvSpPr txBox="1"/>
+          <p:nvPr/>
+        </p:nvSpPr>
+        <p:spPr>
+          <a:xfrm>
+            <a:off x="731520" y="2423160"/>
+            <a:ext cx="3108960" cy="347472"/>
+          </a:xfrm>
+          <a:prstGeom prst="rect">
+            <a:avLst/>
+          </a:prstGeom>
+          <a:noFill/>
+        </p:spPr>
+        <p:txBody>
+          <a:bodyPr wrap="square">
+            <a:spAutoFit/>
+          </a:bodyPr>
+          <a:lstStyle/>
+          <a:p>
+            <a:pPr algn="l"/>
+            <a:r>
+              <a:rPr sz="1300" b="1" i="0">
+                <a:solidFill>
+                  <a:srgbClr val="4A9EFF"/>
+                </a:solidFill>
+              </a:rPr>
+              <a:t>Phase 0 — navigator</a:t>
+            </a:r>
+          </a:p>
+        </p:txBody>
+      </p:sp>
+      <p:sp>
+        <p:nvSpPr>
+          <p:cNvPr id="12" name="TextBox 11"/>
+          <p:cNvSpPr txBox="1"/>
+          <p:nvPr/>
+        </p:nvSpPr>
+        <p:spPr>
+          <a:xfrm>
+            <a:off x="731520" y="2834640"/>
+            <a:ext cx="3200400" cy="3017520"/>
+          </a:xfrm>
+          <a:prstGeom prst="rect">
+            <a:avLst/>
+          </a:prstGeom>
+          <a:noFill/>
+        </p:spPr>
+        <p:txBody>
+          <a:bodyPr wrap="square">
+            <a:spAutoFit/>
+          </a:bodyPr>
+          <a:lstStyle/>
+          <a:p>
+            <a:pPr algn="l"/>
+            <a:r>
+              <a:rPr sz="1100" b="0" i="0">
+                <a:solidFill>
+                  <a:srgbClr val="B8C9E8"/>
+                </a:solidFill>
+              </a:rPr>
+              <a:t>키워드: "취약성 검사"
+→ 도메인 지식 주입 요청 감지
+domain-knowledge/ 확인
+→ 관련 파일 없음
+⚠️ 도메인 지식 부족
+필요 정보:
+  • 솔루션명
+  • 검사 범위·결과 형식
+  • 기존 게이트 연동 여부</a:t>
+            </a:r>
+          </a:p>
+        </p:txBody>
+      </p:sp>
+      <p:sp>
+        <p:nvSpPr>
+          <p:cNvPr id="13" name="Rectangle 12"/>
+          <p:cNvSpPr/>
+          <p:nvPr/>
+        </p:nvSpPr>
+        <p:spPr>
+          <a:xfrm>
+            <a:off x="4206240" y="2331720"/>
+            <a:ext cx="7406640" cy="3749039"/>
+          </a:xfrm>
+          <a:prstGeom prst="rect">
+            <a:avLst/>
+          </a:prstGeom>
+          <a:solidFill>
+            <a:srgbClr val="2A3A5A"/>
+          </a:solidFill>
+          <a:ln w="19050">
+            <a:solidFill>
+              <a:srgbClr val="00D4AA"/>
+            </a:solidFill>
+          </a:ln>
+        </p:spPr>
+        <p:style>
+          <a:lnRef idx="1">
+            <a:schemeClr val="accent1"/>
+          </a:lnRef>
+          <a:fillRef idx="3">
+            <a:schemeClr val="accent1"/>
+          </a:fillRef>
+          <a:effectRef idx="2">
+            <a:schemeClr val="accent1"/>
+          </a:effectRef>
+          <a:fontRef idx="minor">
+            <a:schemeClr val="lt1"/>
+          </a:fontRef>
+        </p:style>
+        <p:txBody>
+          <a:bodyPr rtlCol="0" anchor="ctr"/>
+          <a:lstStyle/>
+          <a:p>
+            <a:pPr algn="ctr"/>
+          </a:p>
+        </p:txBody>
+      </p:sp>
+      <p:sp>
+        <p:nvSpPr>
+          <p:cNvPr id="14" name="TextBox 13"/>
+          <p:cNvSpPr txBox="1"/>
+          <p:nvPr/>
+        </p:nvSpPr>
+        <p:spPr>
+          <a:xfrm>
+            <a:off x="4389120" y="2423160"/>
+            <a:ext cx="6858000" cy="347472"/>
+          </a:xfrm>
+          <a:prstGeom prst="rect">
+            <a:avLst/>
+          </a:prstGeom>
+          <a:noFill/>
+        </p:spPr>
+        <p:txBody>
+          <a:bodyPr wrap="square">
+            <a:spAutoFit/>
+          </a:bodyPr>
+          <a:lstStyle/>
+          <a:p>
+            <a:pPr algn="l"/>
+            <a:r>
+              <a:rPr sz="1300" b="1" i="0">
+                <a:solidFill>
+                  <a:srgbClr val="00D4AA"/>
+                </a:solidFill>
+              </a:rPr>
+              <a:t>봇의 답변</a:t>
+            </a:r>
+          </a:p>
+        </p:txBody>
+      </p:sp>
+      <p:sp>
+        <p:nvSpPr>
+          <p:cNvPr id="15" name="TextBox 14"/>
+          <p:cNvSpPr txBox="1"/>
+          <p:nvPr/>
+        </p:nvSpPr>
+        <p:spPr>
+          <a:xfrm>
+            <a:off x="4389120" y="2834640"/>
+            <a:ext cx="7040880" cy="246888"/>
+          </a:xfrm>
+          <a:prstGeom prst="rect">
+            <a:avLst/>
+          </a:prstGeom>
+          <a:noFill/>
+        </p:spPr>
+        <p:txBody>
+          <a:bodyPr wrap="square">
+            <a:spAutoFit/>
+          </a:bodyPr>
+          <a:lstStyle/>
+          <a:p>
+            <a:pPr algn="l"/>
+            <a:r>
+              <a:rPr sz="1100" b="0" i="0">
+                <a:solidFill>
+                  <a:srgbClr val="FFD66B"/>
+                </a:solidFill>
+              </a:rPr>
+              <a:t>경로:  domain-knowledge/vulnerability-scanner.md</a:t>
+            </a:r>
+          </a:p>
+        </p:txBody>
+      </p:sp>
+      <p:sp>
+        <p:nvSpPr>
+          <p:cNvPr id="16" name="TextBox 15"/>
+          <p:cNvSpPr txBox="1"/>
+          <p:nvPr/>
+        </p:nvSpPr>
+        <p:spPr>
+          <a:xfrm>
+            <a:off x="4389120" y="3090672"/>
+            <a:ext cx="7040880" cy="246888"/>
+          </a:xfrm>
+          <a:prstGeom prst="rect">
+            <a:avLst/>
+          </a:prstGeom>
+          <a:noFill/>
+        </p:spPr>
+        <p:txBody>
+          <a:bodyPr wrap="square">
+            <a:spAutoFit/>
+          </a:bodyPr>
+          <a:lstStyle/>
+          <a:p>
+            <a:pPr algn="l"/>
+            <a:r>
+              <a:rPr sz="1100" b="0" i="0">
+                <a:solidFill>
+                  <a:srgbClr val="B8C9E8"/>
+                </a:solidFill>
+              </a:rPr>
+              <a:t/>
+            </a:r>
+          </a:p>
+        </p:txBody>
+      </p:sp>
+      <p:sp>
+        <p:nvSpPr>
+          <p:cNvPr id="17" name="TextBox 16"/>
+          <p:cNvSpPr txBox="1"/>
+          <p:nvPr/>
+        </p:nvSpPr>
+        <p:spPr>
+          <a:xfrm>
+            <a:off x="4389120" y="3346704"/>
+            <a:ext cx="7040880" cy="246888"/>
+          </a:xfrm>
+          <a:prstGeom prst="rect">
+            <a:avLst/>
+          </a:prstGeom>
+          <a:noFill/>
+        </p:spPr>
+        <p:txBody>
+          <a:bodyPr wrap="square">
+            <a:spAutoFit/>
+          </a:bodyPr>
+          <a:lstStyle/>
+          <a:p>
+            <a:pPr algn="l"/>
+            <a:r>
+              <a:rPr sz="1100" b="0" i="0">
+                <a:solidFill>
+                  <a:srgbClr val="FFFFFF"/>
+                </a:solidFill>
+              </a:rPr>
+              <a:t>포함할 내용:</a:t>
+            </a:r>
+          </a:p>
+        </p:txBody>
+      </p:sp>
+      <p:sp>
+        <p:nvSpPr>
+          <p:cNvPr id="18" name="TextBox 17"/>
+          <p:cNvSpPr txBox="1"/>
+          <p:nvPr/>
+        </p:nvSpPr>
+        <p:spPr>
+          <a:xfrm>
+            <a:off x="4389120" y="3602736"/>
+            <a:ext cx="7040880" cy="246888"/>
+          </a:xfrm>
+          <a:prstGeom prst="rect">
+            <a:avLst/>
+          </a:prstGeom>
+          <a:noFill/>
+        </p:spPr>
+        <p:txBody>
+          <a:bodyPr wrap="square">
+            <a:spAutoFit/>
+          </a:bodyPr>
+          <a:lstStyle/>
+          <a:p>
+            <a:pPr algn="l"/>
+            <a:r>
+              <a:rPr sz="1100" b="0" i="0">
+                <a:solidFill>
+                  <a:srgbClr val="B8C9E8"/>
+                </a:solidFill>
+              </a:rPr>
+              <a:t>  • 솔루션 명  →  예: Checkmarx, Fortify, SonarQube (적어야 함)</a:t>
+            </a:r>
+          </a:p>
+        </p:txBody>
+      </p:sp>
+      <p:sp>
+        <p:nvSpPr>
+          <p:cNvPr id="19" name="TextBox 18"/>
+          <p:cNvSpPr txBox="1"/>
+          <p:nvPr/>
+        </p:nvSpPr>
+        <p:spPr>
+          <a:xfrm>
+            <a:off x="4389120" y="3858768"/>
+            <a:ext cx="7040880" cy="246888"/>
+          </a:xfrm>
+          <a:prstGeom prst="rect">
+            <a:avLst/>
+          </a:prstGeom>
+          <a:noFill/>
+        </p:spPr>
+        <p:txBody>
+          <a:bodyPr wrap="square">
+            <a:spAutoFit/>
+          </a:bodyPr>
+          <a:lstStyle/>
+          <a:p>
+            <a:pPr algn="l"/>
+            <a:r>
+              <a:rPr sz="1100" b="0" i="0">
+                <a:solidFill>
+                  <a:srgbClr val="B8C9E8"/>
+                </a:solidFill>
+              </a:rPr>
+              <a:t>  • 스캔 범위  →  정적분석(SAST)만? 오픈소스(SCA)도?</a:t>
+            </a:r>
+          </a:p>
+        </p:txBody>
+      </p:sp>
+      <p:sp>
+        <p:nvSpPr>
+          <p:cNvPr id="20" name="TextBox 19"/>
+          <p:cNvSpPr txBox="1"/>
+          <p:nvPr/>
+        </p:nvSpPr>
+        <p:spPr>
+          <a:xfrm>
+            <a:off x="4389120" y="4114800"/>
+            <a:ext cx="7040880" cy="246888"/>
+          </a:xfrm>
+          <a:prstGeom prst="rect">
+            <a:avLst/>
+          </a:prstGeom>
+          <a:noFill/>
+        </p:spPr>
+        <p:txBody>
+          <a:bodyPr wrap="square">
+            <a:spAutoFit/>
+          </a:bodyPr>
+          <a:lstStyle/>
+          <a:p>
+            <a:pPr algn="l"/>
+            <a:r>
+              <a:rPr sz="1100" b="0" i="0">
+                <a:solidFill>
+                  <a:srgbClr val="B8C9E8"/>
+                </a:solidFill>
+              </a:rPr>
+              <a:t>  • 결과 등급  →  Critical/High/Medium 기준</a:t>
+            </a:r>
+          </a:p>
+        </p:txBody>
+      </p:sp>
+      <p:sp>
+        <p:nvSpPr>
+          <p:cNvPr id="21" name="TextBox 20"/>
+          <p:cNvSpPr txBox="1"/>
+          <p:nvPr/>
+        </p:nvSpPr>
+        <p:spPr>
+          <a:xfrm>
+            <a:off x="4389120" y="4370832"/>
+            <a:ext cx="7040880" cy="246888"/>
+          </a:xfrm>
+          <a:prstGeom prst="rect">
+            <a:avLst/>
+          </a:prstGeom>
+          <a:noFill/>
+        </p:spPr>
+        <p:txBody>
+          <a:bodyPr wrap="square">
+            <a:spAutoFit/>
+          </a:bodyPr>
+          <a:lstStyle/>
+          <a:p>
+            <a:pPr algn="l"/>
+            <a:r>
+              <a:rPr sz="1100" b="0" i="0">
+                <a:solidFill>
+                  <a:srgbClr val="B8C9E8"/>
+                </a:solidFill>
+              </a:rPr>
+              <a:t>  • 반입 차단 기준  →  Critical 1개라도 있으면 차단?</a:t>
+            </a:r>
+          </a:p>
+        </p:txBody>
+      </p:sp>
+      <p:sp>
+        <p:nvSpPr>
+          <p:cNvPr id="22" name="TextBox 21"/>
+          <p:cNvSpPr txBox="1"/>
+          <p:nvPr/>
+        </p:nvSpPr>
+        <p:spPr>
+          <a:xfrm>
+            <a:off x="4389120" y="4626864"/>
+            <a:ext cx="7040880" cy="246888"/>
+          </a:xfrm>
+          <a:prstGeom prst="rect">
+            <a:avLst/>
+          </a:prstGeom>
+          <a:noFill/>
+        </p:spPr>
+        <p:txBody>
+          <a:bodyPr wrap="square">
+            <a:spAutoFit/>
+          </a:bodyPr>
+          <a:lstStyle/>
+          <a:p>
+            <a:pPr algn="l"/>
+            <a:r>
+              <a:rPr sz="1100" b="0" i="0">
+                <a:solidFill>
+                  <a:srgbClr val="B8C9E8"/>
+                </a:solidFill>
+              </a:rPr>
+              <a:t>  • 리포트 형식  →  XML / JSON / HTML</a:t>
+            </a:r>
+          </a:p>
+        </p:txBody>
+      </p:sp>
+      <p:sp>
+        <p:nvSpPr>
+          <p:cNvPr id="23" name="TextBox 22"/>
+          <p:cNvSpPr txBox="1"/>
+          <p:nvPr/>
+        </p:nvSpPr>
+        <p:spPr>
+          <a:xfrm>
+            <a:off x="4389120" y="4882896"/>
+            <a:ext cx="7040880" cy="246888"/>
+          </a:xfrm>
+          <a:prstGeom prst="rect">
+            <a:avLst/>
+          </a:prstGeom>
+          <a:noFill/>
+        </p:spPr>
+        <p:txBody>
+          <a:bodyPr wrap="square">
+            <a:spAutoFit/>
+          </a:bodyPr>
+          <a:lstStyle/>
+          <a:p>
+            <a:pPr algn="l"/>
+            <a:r>
+              <a:rPr sz="1100" b="0" i="0">
+                <a:solidFill>
+                  <a:srgbClr val="B8C9E8"/>
+                </a:solidFill>
+              </a:rPr>
+              <a:t/>
+            </a:r>
+          </a:p>
+        </p:txBody>
+      </p:sp>
+      <p:sp>
+        <p:nvSpPr>
+          <p:cNvPr id="24" name="TextBox 23"/>
+          <p:cNvSpPr txBox="1"/>
+          <p:nvPr/>
+        </p:nvSpPr>
+        <p:spPr>
+          <a:xfrm>
+            <a:off x="4389120" y="5138928"/>
+            <a:ext cx="7040880" cy="246888"/>
+          </a:xfrm>
+          <a:prstGeom prst="rect">
+            <a:avLst/>
+          </a:prstGeom>
+          <a:noFill/>
+        </p:spPr>
+        <p:txBody>
+          <a:bodyPr wrap="square">
+            <a:spAutoFit/>
+          </a:bodyPr>
+          <a:lstStyle/>
+          <a:p>
+            <a:pPr algn="l"/>
+            <a:r>
+              <a:rPr sz="1100" b="0" i="0">
+                <a:solidFill>
+                  <a:srgbClr val="FFFFFF"/>
+                </a:solidFill>
+              </a:rPr>
+              <a:t>연동할 게이트:</a:t>
+            </a:r>
+          </a:p>
+        </p:txBody>
+      </p:sp>
+      <p:sp>
+        <p:nvSpPr>
+          <p:cNvPr id="25" name="TextBox 24"/>
+          <p:cNvSpPr txBox="1"/>
+          <p:nvPr/>
+        </p:nvSpPr>
+        <p:spPr>
+          <a:xfrm>
+            <a:off x="4389120" y="5394960"/>
+            <a:ext cx="7040880" cy="246888"/>
+          </a:xfrm>
+          <a:prstGeom prst="rect">
+            <a:avLst/>
+          </a:prstGeom>
+          <a:noFill/>
+        </p:spPr>
+        <p:txBody>
+          <a:bodyPr wrap="square">
+            <a:spAutoFit/>
+          </a:bodyPr>
+          <a:lstStyle/>
+          <a:p>
+            <a:pPr algn="l"/>
+            <a:r>
+              <a:rPr sz="1100" b="0" i="0">
+                <a:solidFill>
+                  <a:srgbClr val="B8C9E8"/>
+                </a:solidFill>
+              </a:rPr>
+              <a:t>  gates/check-security.sh (영역 C)  ← 기존 파일 수정</a:t>
+            </a:r>
+          </a:p>
+        </p:txBody>
+      </p:sp>
+      <p:sp>
+        <p:nvSpPr>
+          <p:cNvPr id="26" name="TextBox 25"/>
+          <p:cNvSpPr txBox="1"/>
+          <p:nvPr/>
+        </p:nvSpPr>
+        <p:spPr>
+          <a:xfrm>
+            <a:off x="4389120" y="5650992"/>
+            <a:ext cx="7040880" cy="246888"/>
+          </a:xfrm>
+          <a:prstGeom prst="rect">
+            <a:avLst/>
+          </a:prstGeom>
+          <a:noFill/>
+        </p:spPr>
+        <p:txBody>
+          <a:bodyPr wrap="square">
+            <a:spAutoFit/>
+          </a:bodyPr>
+          <a:lstStyle/>
+          <a:p>
+            <a:pPr algn="l"/>
+            <a:r>
+              <a:rPr sz="1100" b="0" i="0">
+                <a:solidFill>
+                  <a:srgbClr val="B8C9E8"/>
+                </a:solidFill>
+              </a:rPr>
+              <a:t>  또는 gates/check-vuln-policy.sh  ← 신규 게이트 생성</a:t>
+            </a:r>
+          </a:p>
+        </p:txBody>
+      </p:sp>
+      <p:sp>
+        <p:nvSpPr>
+          <p:cNvPr id="27" name="TextBox 26"/>
+          <p:cNvSpPr txBox="1"/>
+          <p:nvPr/>
+        </p:nvSpPr>
+        <p:spPr>
+          <a:xfrm>
+            <a:off x="4389120" y="5907024"/>
+            <a:ext cx="7040880" cy="246888"/>
+          </a:xfrm>
+          <a:prstGeom prst="rect">
+            <a:avLst/>
+          </a:prstGeom>
+          <a:noFill/>
+        </p:spPr>
+        <p:txBody>
+          <a:bodyPr wrap="square">
+            <a:spAutoFit/>
+          </a:bodyPr>
+          <a:lstStyle/>
+          <a:p>
+            <a:pPr algn="l"/>
+            <a:r>
+              <a:rPr sz="1100" b="0" i="0">
+                <a:solidFill>
+                  <a:srgbClr val="B8C9E8"/>
+                </a:solidFill>
+              </a:rPr>
+              <a:t/>
+            </a:r>
+          </a:p>
+        </p:txBody>
+      </p:sp>
+      <p:sp>
+        <p:nvSpPr>
+          <p:cNvPr id="28" name="TextBox 27"/>
+          <p:cNvSpPr txBox="1"/>
+          <p:nvPr/>
+        </p:nvSpPr>
+        <p:spPr>
+          <a:xfrm>
+            <a:off x="4389120" y="6163056"/>
+            <a:ext cx="7040880" cy="246888"/>
+          </a:xfrm>
+          <a:prstGeom prst="rect">
+            <a:avLst/>
+          </a:prstGeom>
+          <a:noFill/>
+        </p:spPr>
+        <p:txBody>
+          <a:bodyPr wrap="square">
+            <a:spAutoFit/>
+          </a:bodyPr>
+          <a:lstStyle/>
+          <a:p>
+            <a:pPr algn="l"/>
+            <a:r>
+              <a:rPr sz="1100" b="0" i="0">
+                <a:solidFill>
+                  <a:srgbClr val="FF8C42"/>
+                </a:solidFill>
+              </a:rPr>
+              <a:t>솔루션명이 없으면: 일반 원칙 수준으로만 제안 가능</a:t>
+            </a:r>
+          </a:p>
+        </p:txBody>
+      </p:sp>
+      <p:sp>
+        <p:nvSpPr>
+          <p:cNvPr id="29" name="TextBox 28"/>
+          <p:cNvSpPr txBox="1"/>
+          <p:nvPr/>
+        </p:nvSpPr>
+        <p:spPr>
+          <a:xfrm>
+            <a:off x="4389120" y="6419088"/>
+            <a:ext cx="7040880" cy="246888"/>
+          </a:xfrm>
+          <a:prstGeom prst="rect">
+            <a:avLst/>
+          </a:prstGeom>
+          <a:noFill/>
+        </p:spPr>
+        <p:txBody>
+          <a:bodyPr wrap="square">
+            <a:spAutoFit/>
+          </a:bodyPr>
+          <a:lstStyle/>
+          <a:p>
+            <a:pPr algn="l"/>
+            <a:r>
+              <a:rPr sz="1100" b="0" i="0">
+                <a:solidFill>
+                  <a:srgbClr val="FF8C42"/>
+                </a:solidFill>
+              </a:rPr>
+              <a:t>  → KNOWLEDGE-GAPS.md에 '솔루션명' 항목 자동 기록</a:t>
+            </a:r>
+          </a:p>
+        </p:txBody>
+      </p:sp>
+    </p:spTree>
+  </p:cSld>
+  <p:clrMapOvr>
+    <a:masterClrMapping/>
+  </p:clrMapOvr>
+</p:sld>
+</file>
+
+<file path=ppt/slides/slide17.xml><?xml version="1.0" encoding="utf-8"?>
+<p:sld xmlns:a="http://schemas.openxmlformats.org/drawingml/2006/main" xmlns:p="http://schemas.openxmlformats.org/presentationml/2006/main" xmlns:r="http://schemas.openxmlformats.org/officeDocument/2006/relationships">
+  <p:cSld>
+    <p:spTree>
+      <p:nvGrpSpPr>
+        <p:cNvPr id="1" name=""/>
+        <p:cNvGrpSpPr/>
+        <p:nvPr/>
+      </p:nvGrpSpPr>
+      <p:grpSpPr/>
+      <p:sp>
+        <p:nvSpPr>
+          <p:cNvPr id="2" name="Rectangle 1"/>
+          <p:cNvSpPr/>
+          <p:nvPr/>
+        </p:nvSpPr>
+        <p:spPr>
+          <a:xfrm>
+            <a:off x="0" y="0"/>
+            <a:ext cx="12188952" cy="6858000"/>
+          </a:xfrm>
+          <a:prstGeom prst="rect">
+            <a:avLst/>
+          </a:prstGeom>
+          <a:solidFill>
+            <a:srgbClr val="0F172A"/>
+          </a:solidFill>
+          <a:ln>
+            <a:noFill/>
+          </a:ln>
+        </p:spPr>
+        <p:style>
+          <a:lnRef idx="1">
+            <a:schemeClr val="accent1"/>
+          </a:lnRef>
+          <a:fillRef idx="3">
+            <a:schemeClr val="accent1"/>
+          </a:fillRef>
+          <a:effectRef idx="2">
+            <a:schemeClr val="accent1"/>
+          </a:effectRef>
+          <a:fontRef idx="minor">
+            <a:schemeClr val="lt1"/>
+          </a:fontRef>
+        </p:style>
+        <p:txBody>
+          <a:bodyPr rtlCol="0" anchor="ctr"/>
+          <a:lstStyle/>
+          <a:p>
+            <a:pPr algn="ctr"/>
+          </a:p>
+        </p:txBody>
+      </p:sp>
+      <p:sp>
+        <p:nvSpPr>
+          <p:cNvPr id="3" name="Rectangle 2"/>
+          <p:cNvSpPr/>
+          <p:nvPr/>
+        </p:nvSpPr>
+        <p:spPr>
+          <a:xfrm>
+            <a:off x="0" y="0"/>
+            <a:ext cx="54864" cy="6858000"/>
+          </a:xfrm>
+          <a:prstGeom prst="rect">
+            <a:avLst/>
+          </a:prstGeom>
+          <a:solidFill>
+            <a:srgbClr val="4A9EFF"/>
+          </a:solidFill>
+          <a:ln>
+            <a:noFill/>
+          </a:ln>
+        </p:spPr>
+        <p:style>
+          <a:lnRef idx="1">
+            <a:schemeClr val="accent1"/>
+          </a:lnRef>
+          <a:fillRef idx="3">
+            <a:schemeClr val="accent1"/>
+          </a:fillRef>
+          <a:effectRef idx="2">
+            <a:schemeClr val="accent1"/>
+          </a:effectRef>
+          <a:fontRef idx="minor">
+            <a:schemeClr val="lt1"/>
+          </a:fontRef>
+        </p:style>
+        <p:txBody>
+          <a:bodyPr rtlCol="0" anchor="ctr"/>
+          <a:lstStyle/>
+          <a:p>
+            <a:pPr algn="ctr"/>
+          </a:p>
+        </p:txBody>
+      </p:sp>
+      <p:sp>
+        <p:nvSpPr>
+          <p:cNvPr id="4" name="TextBox 3"/>
+          <p:cNvSpPr txBox="1"/>
+          <p:nvPr/>
+        </p:nvSpPr>
+        <p:spPr>
+          <a:xfrm>
+            <a:off x="731520" y="274320"/>
+            <a:ext cx="10058400" cy="640080"/>
+          </a:xfrm>
+          <a:prstGeom prst="rect">
+            <a:avLst/>
+          </a:prstGeom>
+          <a:noFill/>
+        </p:spPr>
+        <p:txBody>
+          <a:bodyPr wrap="square">
+            <a:spAutoFit/>
+          </a:bodyPr>
+          <a:lstStyle/>
+          <a:p>
+            <a:pPr algn="l"/>
+            <a:r>
+              <a:rPr sz="3000" b="1" i="0">
+                <a:solidFill>
+                  <a:srgbClr val="FFFFFF"/>
+                </a:solidFill>
+              </a:rPr>
+              <a:t>시작하는 법 — 3단계</a:t>
+            </a:r>
+          </a:p>
+        </p:txBody>
+      </p:sp>
+      <p:sp>
+        <p:nvSpPr>
+          <p:cNvPr id="5" name="Rectangle 4"/>
+          <p:cNvSpPr/>
+          <p:nvPr/>
+        </p:nvSpPr>
+        <p:spPr>
+          <a:xfrm>
+            <a:off x="548640" y="1188720"/>
+            <a:ext cx="11064240" cy="1417320"/>
+          </a:xfrm>
+          <a:prstGeom prst="rect">
+            <a:avLst/>
+          </a:prstGeom>
+          <a:solidFill>
+            <a:srgbClr val="2A3A5A"/>
+          </a:solidFill>
+          <a:ln w="19050">
+            <a:solidFill>
+              <a:srgbClr val="4A9EFF"/>
+            </a:solidFill>
+          </a:ln>
+        </p:spPr>
+        <p:style>
+          <a:lnRef idx="1">
+            <a:schemeClr val="accent1"/>
+          </a:lnRef>
+          <a:fillRef idx="3">
+            <a:schemeClr val="accent1"/>
+          </a:fillRef>
+          <a:effectRef idx="2">
+            <a:schemeClr val="accent1"/>
+          </a:effectRef>
+          <a:fontRef idx="minor">
+            <a:schemeClr val="lt1"/>
+          </a:fontRef>
+        </p:style>
+        <p:txBody>
+          <a:bodyPr rtlCol="0" anchor="ctr"/>
+          <a:lstStyle/>
+          <a:p>
+            <a:pPr algn="ctr"/>
+          </a:p>
+        </p:txBody>
+      </p:sp>
+      <p:sp>
+        <p:nvSpPr>
+          <p:cNvPr id="6" name="Rectangle 5"/>
+          <p:cNvSpPr/>
+          <p:nvPr/>
+        </p:nvSpPr>
+        <p:spPr>
+          <a:xfrm>
+            <a:off x="548640" y="1188720"/>
+            <a:ext cx="640080" cy="1417320"/>
+          </a:xfrm>
+          <a:prstGeom prst="rect">
+            <a:avLst/>
+          </a:prstGeom>
+          <a:solidFill>
+            <a:srgbClr val="4A9EFF"/>
+          </a:solidFill>
+          <a:ln>
+            <a:noFill/>
+          </a:ln>
+        </p:spPr>
+        <p:style>
+          <a:lnRef idx="1">
+            <a:schemeClr val="accent1"/>
+          </a:lnRef>
+          <a:fillRef idx="3">
+            <a:schemeClr val="accent1"/>
+          </a:fillRef>
+          <a:effectRef idx="2">
+            <a:schemeClr val="accent1"/>
+          </a:effectRef>
+          <a:fontRef idx="minor">
+            <a:schemeClr val="lt1"/>
+          </a:fontRef>
+        </p:style>
+        <p:txBody>
+          <a:bodyPr rtlCol="0" anchor="ctr"/>
+          <a:lstStyle/>
+          <a:p>
+            <a:pPr algn="ctr"/>
+          </a:p>
+        </p:txBody>
+      </p:sp>
+      <p:sp>
+        <p:nvSpPr>
+          <p:cNvPr id="7" name="TextBox 6"/>
+          <p:cNvSpPr txBox="1"/>
+          <p:nvPr/>
+        </p:nvSpPr>
+        <p:spPr>
+          <a:xfrm>
+            <a:off x="548640" y="1600200"/>
+            <a:ext cx="640080" cy="548640"/>
+          </a:xfrm>
+          <a:prstGeom prst="rect">
+            <a:avLst/>
+          </a:prstGeom>
+          <a:noFill/>
+        </p:spPr>
+        <p:txBody>
+          <a:bodyPr wrap="square">
+            <a:spAutoFit/>
+          </a:bodyPr>
+          <a:lstStyle/>
+          <a:p>
+            <a:pPr algn="ctr"/>
+            <a:r>
+              <a:rPr sz="2600" b="1" i="0">
+                <a:solidFill>
+                  <a:srgbClr val="0F172A"/>
+                </a:solidFill>
+              </a:rPr>
+              <a:t>1</a:t>
+            </a:r>
+          </a:p>
+        </p:txBody>
+      </p:sp>
+      <p:sp>
+        <p:nvSpPr>
+          <p:cNvPr id="8" name="TextBox 7"/>
+          <p:cNvSpPr txBox="1"/>
+          <p:nvPr/>
+        </p:nvSpPr>
+        <p:spPr>
+          <a:xfrm>
+            <a:off x="1371600" y="1298448"/>
+            <a:ext cx="9601200" cy="411480"/>
+          </a:xfrm>
+          <a:prstGeom prst="rect">
+            <a:avLst/>
+          </a:prstGeom>
+          <a:noFill/>
+        </p:spPr>
+        <p:txBody>
+          <a:bodyPr wrap="square">
+            <a:spAutoFit/>
+          </a:bodyPr>
+          <a:lstStyle/>
+          <a:p>
+            <a:pPr algn="l"/>
+            <a:r>
+              <a:rPr sz="1600" b="1" i="0">
+                <a:solidFill>
+                  <a:srgbClr val="4A9EFF"/>
+                </a:solidFill>
+              </a:rPr>
+              <a:t>base 템플릿 클론</a:t>
+            </a:r>
+          </a:p>
+        </p:txBody>
+      </p:sp>
+      <p:sp>
+        <p:nvSpPr>
+          <p:cNvPr id="9" name="Rectangle 8"/>
+          <p:cNvSpPr/>
+          <p:nvPr/>
+        </p:nvSpPr>
+        <p:spPr>
+          <a:xfrm>
+            <a:off x="1325880" y="1783080"/>
+            <a:ext cx="9966960" cy="594360"/>
+          </a:xfrm>
+          <a:prstGeom prst="rect">
+            <a:avLst/>
+          </a:prstGeom>
+          <a:solidFill>
+            <a:srgbClr val="061020"/>
+          </a:solidFill>
+          <a:ln>
+            <a:noFill/>
+          </a:ln>
+        </p:spPr>
+        <p:style>
+          <a:lnRef idx="1">
+            <a:schemeClr val="accent1"/>
+          </a:lnRef>
+          <a:fillRef idx="3">
+            <a:schemeClr val="accent1"/>
+          </a:fillRef>
+          <a:effectRef idx="2">
+            <a:schemeClr val="accent1"/>
+          </a:effectRef>
+          <a:fontRef idx="minor">
+            <a:schemeClr val="lt1"/>
+          </a:fontRef>
+        </p:style>
+        <p:txBody>
+          <a:bodyPr rtlCol="0" anchor="ctr"/>
+          <a:lstStyle/>
+          <a:p>
+            <a:pPr algn="ctr"/>
+          </a:p>
+        </p:txBody>
+      </p:sp>
+      <p:sp>
+        <p:nvSpPr>
+          <p:cNvPr id="10" name="TextBox 9"/>
+          <p:cNvSpPr txBox="1"/>
+          <p:nvPr/>
+        </p:nvSpPr>
+        <p:spPr>
+          <a:xfrm>
+            <a:off x="1463040" y="1847088"/>
+            <a:ext cx="9784080" cy="457200"/>
+          </a:xfrm>
+          <a:prstGeom prst="rect">
+            <a:avLst/>
+          </a:prstGeom>
+          <a:noFill/>
+        </p:spPr>
+        <p:txBody>
+          <a:bodyPr wrap="square">
+            <a:spAutoFit/>
+          </a:bodyPr>
+          <a:lstStyle/>
+          <a:p>
+            <a:pPr algn="l"/>
+            <a:r>
+              <a:rPr sz="1200" b="0" i="0">
+                <a:solidFill>
+                  <a:srgbClr val="FFD66B"/>
+                </a:solidFill>
+              </a:rPr>
+              <a:t>git clone https://github.com/studioKjm/ai-harness-template
+        /path/to/your/ai-harness-template</a:t>
+            </a:r>
+          </a:p>
+        </p:txBody>
+      </p:sp>
+      <p:sp>
+        <p:nvSpPr>
+          <p:cNvPr id="11" name="Rectangle 10"/>
+          <p:cNvSpPr/>
+          <p:nvPr/>
+        </p:nvSpPr>
+        <p:spPr>
+          <a:xfrm>
+            <a:off x="548640" y="2834640"/>
+            <a:ext cx="11064240" cy="1417320"/>
+          </a:xfrm>
+          <a:prstGeom prst="rect">
+            <a:avLst/>
+          </a:prstGeom>
+          <a:solidFill>
+            <a:srgbClr val="2A3A5A"/>
+          </a:solidFill>
+          <a:ln w="19050">
+            <a:solidFill>
+              <a:srgbClr val="FF8C42"/>
+            </a:solidFill>
+          </a:ln>
+        </p:spPr>
+        <p:style>
+          <a:lnRef idx="1">
+            <a:schemeClr val="accent1"/>
+          </a:lnRef>
+          <a:fillRef idx="3">
+            <a:schemeClr val="accent1"/>
+          </a:fillRef>
+          <a:effectRef idx="2">
+            <a:schemeClr val="accent1"/>
+          </a:effectRef>
+          <a:fontRef idx="minor">
+            <a:schemeClr val="lt1"/>
+          </a:fontRef>
+        </p:style>
+        <p:txBody>
+          <a:bodyPr rtlCol="0" anchor="ctr"/>
+          <a:lstStyle/>
+          <a:p>
+            <a:pPr algn="ctr"/>
+          </a:p>
+        </p:txBody>
+      </p:sp>
+      <p:sp>
+        <p:nvSpPr>
+          <p:cNvPr id="12" name="Rectangle 11"/>
+          <p:cNvSpPr/>
+          <p:nvPr/>
+        </p:nvSpPr>
+        <p:spPr>
+          <a:xfrm>
+            <a:off x="548640" y="2834640"/>
+            <a:ext cx="640080" cy="1417320"/>
+          </a:xfrm>
+          <a:prstGeom prst="rect">
+            <a:avLst/>
+          </a:prstGeom>
+          <a:solidFill>
+            <a:srgbClr val="FF8C42"/>
+          </a:solidFill>
+          <a:ln>
+            <a:noFill/>
+          </a:ln>
+        </p:spPr>
+        <p:style>
+          <a:lnRef idx="1">
+            <a:schemeClr val="accent1"/>
+          </a:lnRef>
+          <a:fillRef idx="3">
+            <a:schemeClr val="accent1"/>
+          </a:fillRef>
+          <a:effectRef idx="2">
+            <a:schemeClr val="accent1"/>
+          </a:effectRef>
+          <a:fontRef idx="minor">
+            <a:schemeClr val="lt1"/>
+          </a:fontRef>
+        </p:style>
+        <p:txBody>
+          <a:bodyPr rtlCol="0" anchor="ctr"/>
+          <a:lstStyle/>
+          <a:p>
+            <a:pPr algn="ctr"/>
+          </a:p>
+        </p:txBody>
+      </p:sp>
+      <p:sp>
+        <p:nvSpPr>
+          <p:cNvPr id="13" name="TextBox 12"/>
+          <p:cNvSpPr txBox="1"/>
+          <p:nvPr/>
+        </p:nvSpPr>
+        <p:spPr>
+          <a:xfrm>
+            <a:off x="548640" y="3246120"/>
+            <a:ext cx="640080" cy="548640"/>
+          </a:xfrm>
+          <a:prstGeom prst="rect">
+            <a:avLst/>
+          </a:prstGeom>
+          <a:noFill/>
+        </p:spPr>
+        <p:txBody>
+          <a:bodyPr wrap="square">
+            <a:spAutoFit/>
+          </a:bodyPr>
+          <a:lstStyle/>
+          <a:p>
+            <a:pPr algn="ctr"/>
+            <a:r>
+              <a:rPr sz="2600" b="1" i="0">
+                <a:solidFill>
+                  <a:srgbClr val="0F172A"/>
+                </a:solidFill>
+              </a:rPr>
+              <a:t>2</a:t>
+            </a:r>
+          </a:p>
+        </p:txBody>
+      </p:sp>
+      <p:sp>
+        <p:nvSpPr>
+          <p:cNvPr id="14" name="TextBox 13"/>
+          <p:cNvSpPr txBox="1"/>
+          <p:nvPr/>
+        </p:nvSpPr>
+        <p:spPr>
+          <a:xfrm>
+            <a:off x="1371600" y="2944368"/>
+            <a:ext cx="9601200" cy="411480"/>
+          </a:xfrm>
+          <a:prstGeom prst="rect">
+            <a:avLst/>
+          </a:prstGeom>
+          <a:noFill/>
+        </p:spPr>
+        <p:txBody>
+          <a:bodyPr wrap="square">
+            <a:spAutoFit/>
+          </a:bodyPr>
+          <a:lstStyle/>
+          <a:p>
+            <a:pPr algn="l"/>
+            <a:r>
+              <a:rPr sz="1600" b="1" i="0">
+                <a:solidFill>
+                  <a:srgbClr val="FF8C42"/>
+                </a:solidFill>
+              </a:rPr>
+              <a:t>harness-customizer 클론</a:t>
+            </a:r>
+          </a:p>
+        </p:txBody>
+      </p:sp>
+      <p:sp>
+        <p:nvSpPr>
+          <p:cNvPr id="15" name="Rectangle 14"/>
+          <p:cNvSpPr/>
+          <p:nvPr/>
+        </p:nvSpPr>
+        <p:spPr>
+          <a:xfrm>
+            <a:off x="1325880" y="3429000"/>
+            <a:ext cx="9966960" cy="594360"/>
+          </a:xfrm>
+          <a:prstGeom prst="rect">
+            <a:avLst/>
+          </a:prstGeom>
+          <a:solidFill>
+            <a:srgbClr val="061020"/>
+          </a:solidFill>
+          <a:ln>
+            <a:noFill/>
+          </a:ln>
+        </p:spPr>
+        <p:style>
+          <a:lnRef idx="1">
+            <a:schemeClr val="accent1"/>
+          </a:lnRef>
+          <a:fillRef idx="3">
+            <a:schemeClr val="accent1"/>
+          </a:fillRef>
+          <a:effectRef idx="2">
+            <a:schemeClr val="accent1"/>
+          </a:effectRef>
+          <a:fontRef idx="minor">
+            <a:schemeClr val="lt1"/>
+          </a:fontRef>
+        </p:style>
+        <p:txBody>
+          <a:bodyPr rtlCol="0" anchor="ctr"/>
+          <a:lstStyle/>
+          <a:p>
+            <a:pPr algn="ctr"/>
+          </a:p>
+        </p:txBody>
+      </p:sp>
+      <p:sp>
+        <p:nvSpPr>
+          <p:cNvPr id="16" name="TextBox 15"/>
+          <p:cNvSpPr txBox="1"/>
+          <p:nvPr/>
+        </p:nvSpPr>
+        <p:spPr>
+          <a:xfrm>
+            <a:off x="1463040" y="3493008"/>
+            <a:ext cx="9784080" cy="457200"/>
+          </a:xfrm>
+          <a:prstGeom prst="rect">
+            <a:avLst/>
+          </a:prstGeom>
+          <a:noFill/>
+        </p:spPr>
+        <p:txBody>
+          <a:bodyPr wrap="square">
+            <a:spAutoFit/>
+          </a:bodyPr>
+          <a:lstStyle/>
+          <a:p>
+            <a:pPr algn="l"/>
+            <a:r>
+              <a:rPr sz="1200" b="0" i="0">
+                <a:solidFill>
+                  <a:srgbClr val="FFD66B"/>
+                </a:solidFill>
+              </a:rPr>
+              <a:t>git clone https://github.com/easyseop/harness-customizer</a:t>
+            </a:r>
+          </a:p>
+        </p:txBody>
+      </p:sp>
+      <p:sp>
+        <p:nvSpPr>
+          <p:cNvPr id="17" name="Rectangle 16"/>
+          <p:cNvSpPr/>
+          <p:nvPr/>
+        </p:nvSpPr>
+        <p:spPr>
+          <a:xfrm>
+            <a:off x="548640" y="4480560"/>
+            <a:ext cx="11064240" cy="1417320"/>
+          </a:xfrm>
+          <a:prstGeom prst="rect">
+            <a:avLst/>
+          </a:prstGeom>
+          <a:solidFill>
+            <a:srgbClr val="2A3A5A"/>
+          </a:solidFill>
+          <a:ln w="19050">
+            <a:solidFill>
+              <a:srgbClr val="06D68A"/>
+            </a:solidFill>
+          </a:ln>
+        </p:spPr>
+        <p:style>
+          <a:lnRef idx="1">
+            <a:schemeClr val="accent1"/>
+          </a:lnRef>
+          <a:fillRef idx="3">
+            <a:schemeClr val="accent1"/>
+          </a:fillRef>
+          <a:effectRef idx="2">
+            <a:schemeClr val="accent1"/>
+          </a:effectRef>
+          <a:fontRef idx="minor">
+            <a:schemeClr val="lt1"/>
+          </a:fontRef>
+        </p:style>
+        <p:txBody>
+          <a:bodyPr rtlCol="0" anchor="ctr"/>
+          <a:lstStyle/>
+          <a:p>
+            <a:pPr algn="ctr"/>
+          </a:p>
+        </p:txBody>
+      </p:sp>
+      <p:sp>
+        <p:nvSpPr>
+          <p:cNvPr id="18" name="Rectangle 17"/>
+          <p:cNvSpPr/>
+          <p:nvPr/>
+        </p:nvSpPr>
+        <p:spPr>
+          <a:xfrm>
+            <a:off x="548640" y="4480560"/>
+            <a:ext cx="640080" cy="1417320"/>
+          </a:xfrm>
+          <a:prstGeom prst="rect">
+            <a:avLst/>
+          </a:prstGeom>
+          <a:solidFill>
+            <a:srgbClr val="06D68A"/>
+          </a:solidFill>
+          <a:ln>
+            <a:noFill/>
+          </a:ln>
+        </p:spPr>
+        <p:style>
+          <a:lnRef idx="1">
+            <a:schemeClr val="accent1"/>
+          </a:lnRef>
+          <a:fillRef idx="3">
+            <a:schemeClr val="accent1"/>
+          </a:fillRef>
+          <a:effectRef idx="2">
+            <a:schemeClr val="accent1"/>
+          </a:effectRef>
+          <a:fontRef idx="minor">
+            <a:schemeClr val="lt1"/>
+          </a:fontRef>
+        </p:style>
+        <p:txBody>
+          <a:bodyPr rtlCol="0" anchor="ctr"/>
+          <a:lstStyle/>
+          <a:p>
+            <a:pPr algn="ctr"/>
+          </a:p>
+        </p:txBody>
+      </p:sp>
+      <p:sp>
+        <p:nvSpPr>
+          <p:cNvPr id="19" name="TextBox 18"/>
+          <p:cNvSpPr txBox="1"/>
+          <p:nvPr/>
+        </p:nvSpPr>
+        <p:spPr>
+          <a:xfrm>
+            <a:off x="548640" y="4892040"/>
+            <a:ext cx="640080" cy="548640"/>
+          </a:xfrm>
+          <a:prstGeom prst="rect">
+            <a:avLst/>
+          </a:prstGeom>
+          <a:noFill/>
+        </p:spPr>
+        <p:txBody>
+          <a:bodyPr wrap="square">
+            <a:spAutoFit/>
+          </a:bodyPr>
+          <a:lstStyle/>
+          <a:p>
+            <a:pPr algn="ctr"/>
+            <a:r>
+              <a:rPr sz="2600" b="1" i="0">
+                <a:solidFill>
+                  <a:srgbClr val="0F172A"/>
+                </a:solidFill>
+              </a:rPr>
+              <a:t>3</a:t>
+            </a:r>
+          </a:p>
+        </p:txBody>
+      </p:sp>
+      <p:sp>
+        <p:nvSpPr>
+          <p:cNvPr id="20" name="TextBox 19"/>
+          <p:cNvSpPr txBox="1"/>
+          <p:nvPr/>
+        </p:nvSpPr>
+        <p:spPr>
+          <a:xfrm>
+            <a:off x="1371600" y="4590288"/>
+            <a:ext cx="9601200" cy="411480"/>
+          </a:xfrm>
+          <a:prstGeom prst="rect">
+            <a:avLst/>
+          </a:prstGeom>
+          <a:noFill/>
+        </p:spPr>
+        <p:txBody>
+          <a:bodyPr wrap="square">
+            <a:spAutoFit/>
+          </a:bodyPr>
+          <a:lstStyle/>
+          <a:p>
+            <a:pPr algn="l"/>
+            <a:r>
+              <a:rPr sz="1600" b="1" i="0">
+                <a:solidFill>
+                  <a:srgbClr val="06D68A"/>
+                </a:solidFill>
+              </a:rPr>
+              <a:t>CLAUDE.md에서 경로 한 줄 수정</a:t>
+            </a:r>
+          </a:p>
+        </p:txBody>
+      </p:sp>
+      <p:sp>
+        <p:nvSpPr>
+          <p:cNvPr id="21" name="Rectangle 20"/>
+          <p:cNvSpPr/>
+          <p:nvPr/>
+        </p:nvSpPr>
+        <p:spPr>
+          <a:xfrm>
+            <a:off x="1325880" y="5074920"/>
+            <a:ext cx="9966960" cy="594360"/>
+          </a:xfrm>
+          <a:prstGeom prst="rect">
+            <a:avLst/>
+          </a:prstGeom>
+          <a:solidFill>
+            <a:srgbClr val="061020"/>
+          </a:solidFill>
+          <a:ln>
+            <a:noFill/>
+          </a:ln>
+        </p:spPr>
+        <p:style>
+          <a:lnRef idx="1">
+            <a:schemeClr val="accent1"/>
+          </a:lnRef>
+          <a:fillRef idx="3">
+            <a:schemeClr val="accent1"/>
+          </a:fillRef>
+          <a:effectRef idx="2">
+            <a:schemeClr val="accent1"/>
+          </a:effectRef>
+          <a:fontRef idx="minor">
+            <a:schemeClr val="lt1"/>
+          </a:fontRef>
+        </p:style>
+        <p:txBody>
+          <a:bodyPr rtlCol="0" anchor="ctr"/>
+          <a:lstStyle/>
+          <a:p>
+            <a:pPr algn="ctr"/>
+          </a:p>
+        </p:txBody>
+      </p:sp>
+      <p:sp>
+        <p:nvSpPr>
+          <p:cNvPr id="22" name="TextBox 21"/>
+          <p:cNvSpPr txBox="1"/>
+          <p:nvPr/>
+        </p:nvSpPr>
+        <p:spPr>
+          <a:xfrm>
+            <a:off x="1463040" y="5138928"/>
+            <a:ext cx="9784080" cy="457200"/>
+          </a:xfrm>
+          <a:prstGeom prst="rect">
+            <a:avLst/>
+          </a:prstGeom>
+          <a:noFill/>
+        </p:spPr>
+        <p:txBody>
+          <a:bodyPr wrap="square">
+            <a:spAutoFit/>
+          </a:bodyPr>
+          <a:lstStyle/>
+          <a:p>
+            <a:pPr algn="l"/>
+            <a:r>
+              <a:rPr sz="1200" b="0" i="0">
+                <a:solidFill>
+                  <a:srgbClr val="FFD66B"/>
+                </a:solidFill>
+              </a:rPr>
+              <a:t>| BASE_HARNESS_PATH | /path/to/your/ai-harness-template |</a:t>
+            </a:r>
+          </a:p>
+        </p:txBody>
+      </p:sp>
+      <p:sp>
+        <p:nvSpPr>
+          <p:cNvPr id="23" name="Rectangle 22"/>
+          <p:cNvSpPr/>
+          <p:nvPr/>
+        </p:nvSpPr>
+        <p:spPr>
+          <a:xfrm>
+            <a:off x="548640" y="5989320"/>
+            <a:ext cx="11064240" cy="640080"/>
+          </a:xfrm>
+          <a:prstGeom prst="rect">
+            <a:avLst/>
+          </a:prstGeom>
+          <a:solidFill>
+            <a:srgbClr val="0A2212"/>
+          </a:solidFill>
+          <a:ln w="19050">
+            <a:solidFill>
+              <a:srgbClr val="06D68A"/>
+            </a:solidFill>
+          </a:ln>
+        </p:spPr>
+        <p:style>
+          <a:lnRef idx="1">
+            <a:schemeClr val="accent1"/>
+          </a:lnRef>
+          <a:fillRef idx="3">
+            <a:schemeClr val="accent1"/>
+          </a:fillRef>
+          <a:effectRef idx="2">
+            <a:schemeClr val="accent1"/>
+          </a:effectRef>
+          <a:fontRef idx="minor">
+            <a:schemeClr val="lt1"/>
+          </a:fontRef>
+        </p:style>
+        <p:txBody>
+          <a:bodyPr rtlCol="0" anchor="ctr"/>
+          <a:lstStyle/>
+          <a:p>
+            <a:pPr algn="ctr"/>
+          </a:p>
+        </p:txBody>
+      </p:sp>
+      <p:sp>
+        <p:nvSpPr>
+          <p:cNvPr id="24" name="TextBox 23"/>
+          <p:cNvSpPr txBox="1"/>
+          <p:nvPr/>
+        </p:nvSpPr>
+        <p:spPr>
+          <a:xfrm>
+            <a:off x="914400" y="6099048"/>
+            <a:ext cx="10515600" cy="411480"/>
+          </a:xfrm>
+          <a:prstGeom prst="rect">
+            <a:avLst/>
+          </a:prstGeom>
+          <a:noFill/>
+        </p:spPr>
+        <p:txBody>
+          <a:bodyPr wrap="square">
+            <a:spAutoFit/>
+          </a:bodyPr>
+          <a:lstStyle/>
+          <a:p>
+            <a:pPr algn="l"/>
+            <a:r>
+              <a:rPr sz="1600" b="1" i="0">
+                <a:solidFill>
+                  <a:srgbClr val="06D68A"/>
+                </a:solidFill>
+              </a:rPr>
+              <a:t>✅  이후 Claude Code에서 프로젝트 열고  /customize  를 입력하면 끝</a:t>
+            </a:r>
+          </a:p>
+        </p:txBody>
+      </p:sp>
+    </p:spTree>
+  </p:cSld>
+  <p:clrMapOvr>
+    <a:masterClrMapping/>
+  </p:clrMapOvr>
+</p:sld>
+</file>
+
+<file path=ppt/slides/slide18.xml><?xml version="1.0" encoding="utf-8"?>
 <p:sld xmlns:a="http://schemas.openxmlformats.org/drawingml/2006/main" xmlns:p="http://schemas.openxmlformats.org/presentationml/2006/main" xmlns:r="http://schemas.openxmlformats.org/officeDocument/2006/relationships">
   <p:cSld>
     <p:spTree>
